--- a/townhall/townhall_finance_editable.pptx
+++ b/townhall/townhall_finance_editable.pptx
@@ -5,12 +5,12 @@
     <p:sldMasterId id="2147483648" r:id="rId1"/>
   </p:sldMasterIdLst>
   <p:sldIdLst>
-    <p:sldId id="256" r:id="rId7"/>
-    <p:sldId id="257" r:id="rId8"/>
-    <p:sldId id="258" r:id="rId9"/>
-    <p:sldId id="259" r:id="rId10"/>
+    <p:sldId id="257" r:id="rId2"/>
+    <p:sldId id="256" r:id="rId3"/>
+    <p:sldId id="258" r:id="rId4"/>
+    <p:sldId id="259" r:id="rId5"/>
   </p:sldIdLst>
-  <p:sldSz cx="12188952" cy="6858000" type="screen4x3"/>
+  <p:sldSz cx="12188825" cy="6858000"/>
   <p:notesSz cx="6858000" cy="9144000"/>
   <p:defaultTextStyle>
     <a:defPPr>
@@ -107,6 +107,22 @@
       </a:defRPr>
     </a:lvl9pPr>
   </p:defaultTextStyle>
+  <p:extLst>
+    <p:ext uri="{EFAFB233-063F-42B5-8137-9DF3F51BA10A}">
+      <p15:sldGuideLst xmlns:p15="http://schemas.microsoft.com/office/powerpoint/2012/main">
+        <p15:guide id="1" orient="horz" pos="2160">
+          <p15:clr>
+            <a:srgbClr val="A4A3A4"/>
+          </p15:clr>
+        </p15:guide>
+        <p15:guide id="2" pos="2880">
+          <p15:clr>
+            <a:srgbClr val="A4A3A4"/>
+          </p15:clr>
+        </p15:guide>
+      </p15:sldGuideLst>
+    </p:ext>
+  </p:extLst>
 </p:presentation>
 </file>
 
@@ -148,10 +164,9 @@
           <a:lstStyle/>
           <a:p>
             <a:r>
-              <a:rPr lang="en-US" smtClean="0"/>
+              <a:rPr lang="en-US"/>
               <a:t>Click to edit Master title style</a:t>
             </a:r>
-            <a:endParaRPr lang="en-US"/>
           </a:p>
         </p:txBody>
       </p:sp>
@@ -267,10 +282,9 @@
           </a:lstStyle>
           <a:p>
             <a:r>
-              <a:rPr lang="en-US" smtClean="0"/>
+              <a:rPr lang="en-US"/>
               <a:t>Click to edit Master subtitle style</a:t>
             </a:r>
-            <a:endParaRPr lang="en-US"/>
           </a:p>
         </p:txBody>
       </p:sp>
@@ -291,7 +305,7 @@
           <a:p>
             <a:fld id="{5BCAD085-E8A6-8845-BD4E-CB4CCA059FC4}" type="datetimeFigureOut">
               <a:rPr lang="en-US" smtClean="0"/>
-              <a:t>1/27/13</a:t>
+              <a:t>2/27/2026</a:t>
             </a:fld>
             <a:endParaRPr lang="en-US"/>
           </a:p>
@@ -385,10 +399,9 @@
           <a:lstStyle/>
           <a:p>
             <a:r>
-              <a:rPr lang="en-US" smtClean="0"/>
+              <a:rPr lang="en-US"/>
               <a:t>Click to edit Master title style</a:t>
             </a:r>
-            <a:endParaRPr lang="en-US"/>
           </a:p>
         </p:txBody>
       </p:sp>
@@ -409,38 +422,37 @@
           <a:p>
             <a:pPr lvl="0"/>
             <a:r>
-              <a:rPr lang="en-US" smtClean="0"/>
+              <a:rPr lang="en-US"/>
               <a:t>Click to edit Master text styles</a:t>
             </a:r>
           </a:p>
           <a:p>
             <a:pPr lvl="1"/>
             <a:r>
-              <a:rPr lang="en-US" smtClean="0"/>
+              <a:rPr lang="en-US"/>
               <a:t>Second level</a:t>
             </a:r>
           </a:p>
           <a:p>
             <a:pPr lvl="2"/>
             <a:r>
-              <a:rPr lang="en-US" smtClean="0"/>
+              <a:rPr lang="en-US"/>
               <a:t>Third level</a:t>
             </a:r>
           </a:p>
           <a:p>
             <a:pPr lvl="3"/>
             <a:r>
-              <a:rPr lang="en-US" smtClean="0"/>
+              <a:rPr lang="en-US"/>
               <a:t>Fourth level</a:t>
             </a:r>
           </a:p>
           <a:p>
             <a:pPr lvl="4"/>
             <a:r>
-              <a:rPr lang="en-US" smtClean="0"/>
+              <a:rPr lang="en-US"/>
               <a:t>Fifth level</a:t>
             </a:r>
-            <a:endParaRPr lang="en-US"/>
           </a:p>
         </p:txBody>
       </p:sp>
@@ -461,7 +473,7 @@
           <a:p>
             <a:fld id="{5BCAD085-E8A6-8845-BD4E-CB4CCA059FC4}" type="datetimeFigureOut">
               <a:rPr lang="en-US" smtClean="0"/>
-              <a:t>1/27/13</a:t>
+              <a:t>2/27/2026</a:t>
             </a:fld>
             <a:endParaRPr lang="en-US"/>
           </a:p>
@@ -560,10 +572,9 @@
           <a:lstStyle/>
           <a:p>
             <a:r>
-              <a:rPr lang="en-US" smtClean="0"/>
+              <a:rPr lang="en-US"/>
               <a:t>Click to edit Master title style</a:t>
             </a:r>
-            <a:endParaRPr lang="en-US"/>
           </a:p>
         </p:txBody>
       </p:sp>
@@ -589,38 +600,37 @@
           <a:p>
             <a:pPr lvl="0"/>
             <a:r>
-              <a:rPr lang="en-US" smtClean="0"/>
+              <a:rPr lang="en-US"/>
               <a:t>Click to edit Master text styles</a:t>
             </a:r>
           </a:p>
           <a:p>
             <a:pPr lvl="1"/>
             <a:r>
-              <a:rPr lang="en-US" smtClean="0"/>
+              <a:rPr lang="en-US"/>
               <a:t>Second level</a:t>
             </a:r>
           </a:p>
           <a:p>
             <a:pPr lvl="2"/>
             <a:r>
-              <a:rPr lang="en-US" smtClean="0"/>
+              <a:rPr lang="en-US"/>
               <a:t>Third level</a:t>
             </a:r>
           </a:p>
           <a:p>
             <a:pPr lvl="3"/>
             <a:r>
-              <a:rPr lang="en-US" smtClean="0"/>
+              <a:rPr lang="en-US"/>
               <a:t>Fourth level</a:t>
             </a:r>
           </a:p>
           <a:p>
             <a:pPr lvl="4"/>
             <a:r>
-              <a:rPr lang="en-US" smtClean="0"/>
+              <a:rPr lang="en-US"/>
               <a:t>Fifth level</a:t>
             </a:r>
-            <a:endParaRPr lang="en-US"/>
           </a:p>
         </p:txBody>
       </p:sp>
@@ -641,7 +651,7 @@
           <a:p>
             <a:fld id="{5BCAD085-E8A6-8845-BD4E-CB4CCA059FC4}" type="datetimeFigureOut">
               <a:rPr lang="en-US" smtClean="0"/>
-              <a:t>1/27/13</a:t>
+              <a:t>2/27/2026</a:t>
             </a:fld>
             <a:endParaRPr lang="en-US"/>
           </a:p>
@@ -735,10 +745,9 @@
           <a:lstStyle/>
           <a:p>
             <a:r>
-              <a:rPr lang="en-US" smtClean="0"/>
+              <a:rPr lang="en-US"/>
               <a:t>Click to edit Master title style</a:t>
             </a:r>
-            <a:endParaRPr lang="en-US"/>
           </a:p>
         </p:txBody>
       </p:sp>
@@ -759,38 +768,37 @@
           <a:p>
             <a:pPr lvl="0"/>
             <a:r>
-              <a:rPr lang="en-US" smtClean="0"/>
+              <a:rPr lang="en-US"/>
               <a:t>Click to edit Master text styles</a:t>
             </a:r>
           </a:p>
           <a:p>
             <a:pPr lvl="1"/>
             <a:r>
-              <a:rPr lang="en-US" smtClean="0"/>
+              <a:rPr lang="en-US"/>
               <a:t>Second level</a:t>
             </a:r>
           </a:p>
           <a:p>
             <a:pPr lvl="2"/>
             <a:r>
-              <a:rPr lang="en-US" smtClean="0"/>
+              <a:rPr lang="en-US"/>
               <a:t>Third level</a:t>
             </a:r>
           </a:p>
           <a:p>
             <a:pPr lvl="3"/>
             <a:r>
-              <a:rPr lang="en-US" smtClean="0"/>
+              <a:rPr lang="en-US"/>
               <a:t>Fourth level</a:t>
             </a:r>
           </a:p>
           <a:p>
             <a:pPr lvl="4"/>
             <a:r>
-              <a:rPr lang="en-US" smtClean="0"/>
+              <a:rPr lang="en-US"/>
               <a:t>Fifth level</a:t>
             </a:r>
-            <a:endParaRPr lang="en-US"/>
           </a:p>
         </p:txBody>
       </p:sp>
@@ -811,7 +819,7 @@
           <a:p>
             <a:fld id="{5BCAD085-E8A6-8845-BD4E-CB4CCA059FC4}" type="datetimeFigureOut">
               <a:rPr lang="en-US" smtClean="0"/>
-              <a:t>1/27/13</a:t>
+              <a:t>2/27/2026</a:t>
             </a:fld>
             <a:endParaRPr lang="en-US"/>
           </a:p>
@@ -914,10 +922,9 @@
           </a:lstStyle>
           <a:p>
             <a:r>
-              <a:rPr lang="en-US" smtClean="0"/>
+              <a:rPr lang="en-US"/>
               <a:t>Click to edit Master title style</a:t>
             </a:r>
-            <a:endParaRPr lang="en-US"/>
           </a:p>
         </p:txBody>
       </p:sp>
@@ -1034,7 +1041,7 @@
           <a:p>
             <a:pPr lvl="0"/>
             <a:r>
-              <a:rPr lang="en-US" smtClean="0"/>
+              <a:rPr lang="en-US"/>
               <a:t>Click to edit Master text styles</a:t>
             </a:r>
           </a:p>
@@ -1057,7 +1064,7 @@
           <a:p>
             <a:fld id="{5BCAD085-E8A6-8845-BD4E-CB4CCA059FC4}" type="datetimeFigureOut">
               <a:rPr lang="en-US" smtClean="0"/>
-              <a:t>1/27/13</a:t>
+              <a:t>2/27/2026</a:t>
             </a:fld>
             <a:endParaRPr lang="en-US"/>
           </a:p>
@@ -1151,10 +1158,9 @@
           <a:lstStyle/>
           <a:p>
             <a:r>
-              <a:rPr lang="en-US" smtClean="0"/>
+              <a:rPr lang="en-US"/>
               <a:t>Click to edit Master title style</a:t>
             </a:r>
-            <a:endParaRPr lang="en-US"/>
           </a:p>
         </p:txBody>
       </p:sp>
@@ -1208,38 +1214,37 @@
           <a:p>
             <a:pPr lvl="0"/>
             <a:r>
-              <a:rPr lang="en-US" smtClean="0"/>
+              <a:rPr lang="en-US"/>
               <a:t>Click to edit Master text styles</a:t>
             </a:r>
           </a:p>
           <a:p>
             <a:pPr lvl="1"/>
             <a:r>
-              <a:rPr lang="en-US" smtClean="0"/>
+              <a:rPr lang="en-US"/>
               <a:t>Second level</a:t>
             </a:r>
           </a:p>
           <a:p>
             <a:pPr lvl="2"/>
             <a:r>
-              <a:rPr lang="en-US" smtClean="0"/>
+              <a:rPr lang="en-US"/>
               <a:t>Third level</a:t>
             </a:r>
           </a:p>
           <a:p>
             <a:pPr lvl="3"/>
             <a:r>
-              <a:rPr lang="en-US" smtClean="0"/>
+              <a:rPr lang="en-US"/>
               <a:t>Fourth level</a:t>
             </a:r>
           </a:p>
           <a:p>
             <a:pPr lvl="4"/>
             <a:r>
-              <a:rPr lang="en-US" smtClean="0"/>
+              <a:rPr lang="en-US"/>
               <a:t>Fifth level</a:t>
             </a:r>
-            <a:endParaRPr lang="en-US"/>
           </a:p>
         </p:txBody>
       </p:sp>
@@ -1293,38 +1298,37 @@
           <a:p>
             <a:pPr lvl="0"/>
             <a:r>
-              <a:rPr lang="en-US" smtClean="0"/>
+              <a:rPr lang="en-US"/>
               <a:t>Click to edit Master text styles</a:t>
             </a:r>
           </a:p>
           <a:p>
             <a:pPr lvl="1"/>
             <a:r>
-              <a:rPr lang="en-US" smtClean="0"/>
+              <a:rPr lang="en-US"/>
               <a:t>Second level</a:t>
             </a:r>
           </a:p>
           <a:p>
             <a:pPr lvl="2"/>
             <a:r>
-              <a:rPr lang="en-US" smtClean="0"/>
+              <a:rPr lang="en-US"/>
               <a:t>Third level</a:t>
             </a:r>
           </a:p>
           <a:p>
             <a:pPr lvl="3"/>
             <a:r>
-              <a:rPr lang="en-US" smtClean="0"/>
+              <a:rPr lang="en-US"/>
               <a:t>Fourth level</a:t>
             </a:r>
           </a:p>
           <a:p>
             <a:pPr lvl="4"/>
             <a:r>
-              <a:rPr lang="en-US" smtClean="0"/>
+              <a:rPr lang="en-US"/>
               <a:t>Fifth level</a:t>
             </a:r>
-            <a:endParaRPr lang="en-US"/>
           </a:p>
         </p:txBody>
       </p:sp>
@@ -1345,7 +1349,7 @@
           <a:p>
             <a:fld id="{5BCAD085-E8A6-8845-BD4E-CB4CCA059FC4}" type="datetimeFigureOut">
               <a:rPr lang="en-US" smtClean="0"/>
-              <a:t>1/27/13</a:t>
+              <a:t>2/27/2026</a:t>
             </a:fld>
             <a:endParaRPr lang="en-US"/>
           </a:p>
@@ -1443,10 +1447,9 @@
           </a:lstStyle>
           <a:p>
             <a:r>
-              <a:rPr lang="en-US" smtClean="0"/>
+              <a:rPr lang="en-US"/>
               <a:t>Click to edit Master title style</a:t>
             </a:r>
-            <a:endParaRPr lang="en-US"/>
           </a:p>
         </p:txBody>
       </p:sp>
@@ -1509,7 +1512,7 @@
           <a:p>
             <a:pPr lvl="0"/>
             <a:r>
-              <a:rPr lang="en-US" smtClean="0"/>
+              <a:rPr lang="en-US"/>
               <a:t>Click to edit Master text styles</a:t>
             </a:r>
           </a:p>
@@ -1565,38 +1568,37 @@
           <a:p>
             <a:pPr lvl="0"/>
             <a:r>
-              <a:rPr lang="en-US" smtClean="0"/>
+              <a:rPr lang="en-US"/>
               <a:t>Click to edit Master text styles</a:t>
             </a:r>
           </a:p>
           <a:p>
             <a:pPr lvl="1"/>
             <a:r>
-              <a:rPr lang="en-US" smtClean="0"/>
+              <a:rPr lang="en-US"/>
               <a:t>Second level</a:t>
             </a:r>
           </a:p>
           <a:p>
             <a:pPr lvl="2"/>
             <a:r>
-              <a:rPr lang="en-US" smtClean="0"/>
+              <a:rPr lang="en-US"/>
               <a:t>Third level</a:t>
             </a:r>
           </a:p>
           <a:p>
             <a:pPr lvl="3"/>
             <a:r>
-              <a:rPr lang="en-US" smtClean="0"/>
+              <a:rPr lang="en-US"/>
               <a:t>Fourth level</a:t>
             </a:r>
           </a:p>
           <a:p>
             <a:pPr lvl="4"/>
             <a:r>
-              <a:rPr lang="en-US" smtClean="0"/>
+              <a:rPr lang="en-US"/>
               <a:t>Fifth level</a:t>
             </a:r>
-            <a:endParaRPr lang="en-US"/>
           </a:p>
         </p:txBody>
       </p:sp>
@@ -1659,7 +1661,7 @@
           <a:p>
             <a:pPr lvl="0"/>
             <a:r>
-              <a:rPr lang="en-US" smtClean="0"/>
+              <a:rPr lang="en-US"/>
               <a:t>Click to edit Master text styles</a:t>
             </a:r>
           </a:p>
@@ -1715,38 +1717,37 @@
           <a:p>
             <a:pPr lvl="0"/>
             <a:r>
-              <a:rPr lang="en-US" smtClean="0"/>
+              <a:rPr lang="en-US"/>
               <a:t>Click to edit Master text styles</a:t>
             </a:r>
           </a:p>
           <a:p>
             <a:pPr lvl="1"/>
             <a:r>
-              <a:rPr lang="en-US" smtClean="0"/>
+              <a:rPr lang="en-US"/>
               <a:t>Second level</a:t>
             </a:r>
           </a:p>
           <a:p>
             <a:pPr lvl="2"/>
             <a:r>
-              <a:rPr lang="en-US" smtClean="0"/>
+              <a:rPr lang="en-US"/>
               <a:t>Third level</a:t>
             </a:r>
           </a:p>
           <a:p>
             <a:pPr lvl="3"/>
             <a:r>
-              <a:rPr lang="en-US" smtClean="0"/>
+              <a:rPr lang="en-US"/>
               <a:t>Fourth level</a:t>
             </a:r>
           </a:p>
           <a:p>
             <a:pPr lvl="4"/>
             <a:r>
-              <a:rPr lang="en-US" smtClean="0"/>
+              <a:rPr lang="en-US"/>
               <a:t>Fifth level</a:t>
             </a:r>
-            <a:endParaRPr lang="en-US"/>
           </a:p>
         </p:txBody>
       </p:sp>
@@ -1767,7 +1768,7 @@
           <a:p>
             <a:fld id="{5BCAD085-E8A6-8845-BD4E-CB4CCA059FC4}" type="datetimeFigureOut">
               <a:rPr lang="en-US" smtClean="0"/>
-              <a:t>1/27/13</a:t>
+              <a:t>2/27/2026</a:t>
             </a:fld>
             <a:endParaRPr lang="en-US"/>
           </a:p>
@@ -1861,10 +1862,9 @@
           <a:lstStyle/>
           <a:p>
             <a:r>
-              <a:rPr lang="en-US" smtClean="0"/>
+              <a:rPr lang="en-US"/>
               <a:t>Click to edit Master title style</a:t>
             </a:r>
-            <a:endParaRPr lang="en-US"/>
           </a:p>
         </p:txBody>
       </p:sp>
@@ -1885,7 +1885,7 @@
           <a:p>
             <a:fld id="{5BCAD085-E8A6-8845-BD4E-CB4CCA059FC4}" type="datetimeFigureOut">
               <a:rPr lang="en-US" smtClean="0"/>
-              <a:t>1/27/13</a:t>
+              <a:t>2/27/2026</a:t>
             </a:fld>
             <a:endParaRPr lang="en-US"/>
           </a:p>
@@ -1980,7 +1980,7 @@
           <a:p>
             <a:fld id="{5BCAD085-E8A6-8845-BD4E-CB4CCA059FC4}" type="datetimeFigureOut">
               <a:rPr lang="en-US" smtClean="0"/>
-              <a:t>1/27/13</a:t>
+              <a:t>2/27/2026</a:t>
             </a:fld>
             <a:endParaRPr lang="en-US"/>
           </a:p>
@@ -2083,10 +2083,9 @@
           </a:lstStyle>
           <a:p>
             <a:r>
-              <a:rPr lang="en-US" smtClean="0"/>
+              <a:rPr lang="en-US"/>
               <a:t>Click to edit Master title style</a:t>
             </a:r>
-            <a:endParaRPr lang="en-US"/>
           </a:p>
         </p:txBody>
       </p:sp>
@@ -2140,38 +2139,37 @@
           <a:p>
             <a:pPr lvl="0"/>
             <a:r>
-              <a:rPr lang="en-US" smtClean="0"/>
+              <a:rPr lang="en-US"/>
               <a:t>Click to edit Master text styles</a:t>
             </a:r>
           </a:p>
           <a:p>
             <a:pPr lvl="1"/>
             <a:r>
-              <a:rPr lang="en-US" smtClean="0"/>
+              <a:rPr lang="en-US"/>
               <a:t>Second level</a:t>
             </a:r>
           </a:p>
           <a:p>
             <a:pPr lvl="2"/>
             <a:r>
-              <a:rPr lang="en-US" smtClean="0"/>
+              <a:rPr lang="en-US"/>
               <a:t>Third level</a:t>
             </a:r>
           </a:p>
           <a:p>
             <a:pPr lvl="3"/>
             <a:r>
-              <a:rPr lang="en-US" smtClean="0"/>
+              <a:rPr lang="en-US"/>
               <a:t>Fourth level</a:t>
             </a:r>
           </a:p>
           <a:p>
             <a:pPr lvl="4"/>
             <a:r>
-              <a:rPr lang="en-US" smtClean="0"/>
+              <a:rPr lang="en-US"/>
               <a:t>Fifth level</a:t>
             </a:r>
-            <a:endParaRPr lang="en-US"/>
           </a:p>
         </p:txBody>
       </p:sp>
@@ -2234,7 +2232,7 @@
           <a:p>
             <a:pPr lvl="0"/>
             <a:r>
-              <a:rPr lang="en-US" smtClean="0"/>
+              <a:rPr lang="en-US"/>
               <a:t>Click to edit Master text styles</a:t>
             </a:r>
           </a:p>
@@ -2257,7 +2255,7 @@
           <a:p>
             <a:fld id="{5BCAD085-E8A6-8845-BD4E-CB4CCA059FC4}" type="datetimeFigureOut">
               <a:rPr lang="en-US" smtClean="0"/>
-              <a:t>1/27/13</a:t>
+              <a:t>2/27/2026</a:t>
             </a:fld>
             <a:endParaRPr lang="en-US"/>
           </a:p>
@@ -2360,10 +2358,9 @@
           </a:lstStyle>
           <a:p>
             <a:r>
-              <a:rPr lang="en-US" smtClean="0"/>
+              <a:rPr lang="en-US"/>
               <a:t>Click to edit Master title style</a:t>
             </a:r>
-            <a:endParaRPr lang="en-US"/>
           </a:p>
         </p:txBody>
       </p:sp>
@@ -2487,7 +2484,7 @@
           <a:p>
             <a:pPr lvl="0"/>
             <a:r>
-              <a:rPr lang="en-US" smtClean="0"/>
+              <a:rPr lang="en-US"/>
               <a:t>Click to edit Master text styles</a:t>
             </a:r>
           </a:p>
@@ -2510,7 +2507,7 @@
           <a:p>
             <a:fld id="{5BCAD085-E8A6-8845-BD4E-CB4CCA059FC4}" type="datetimeFigureOut">
               <a:rPr lang="en-US" smtClean="0"/>
-              <a:t>1/27/13</a:t>
+              <a:t>2/27/2026</a:t>
             </a:fld>
             <a:endParaRPr lang="en-US"/>
           </a:p>
@@ -2619,10 +2616,9 @@
           <a:lstStyle/>
           <a:p>
             <a:r>
-              <a:rPr lang="en-US" smtClean="0"/>
+              <a:rPr lang="en-US"/>
               <a:t>Click to edit Master title style</a:t>
             </a:r>
-            <a:endParaRPr lang="en-US"/>
           </a:p>
         </p:txBody>
       </p:sp>
@@ -2653,38 +2649,37 @@
           <a:p>
             <a:pPr lvl="0"/>
             <a:r>
-              <a:rPr lang="en-US" smtClean="0"/>
+              <a:rPr lang="en-US"/>
               <a:t>Click to edit Master text styles</a:t>
             </a:r>
           </a:p>
           <a:p>
             <a:pPr lvl="1"/>
             <a:r>
-              <a:rPr lang="en-US" smtClean="0"/>
+              <a:rPr lang="en-US"/>
               <a:t>Second level</a:t>
             </a:r>
           </a:p>
           <a:p>
             <a:pPr lvl="2"/>
             <a:r>
-              <a:rPr lang="en-US" smtClean="0"/>
+              <a:rPr lang="en-US"/>
               <a:t>Third level</a:t>
             </a:r>
           </a:p>
           <a:p>
             <a:pPr lvl="3"/>
             <a:r>
-              <a:rPr lang="en-US" smtClean="0"/>
+              <a:rPr lang="en-US"/>
               <a:t>Fourth level</a:t>
             </a:r>
           </a:p>
           <a:p>
             <a:pPr lvl="4"/>
             <a:r>
-              <a:rPr lang="en-US" smtClean="0"/>
+              <a:rPr lang="en-US"/>
               <a:t>Fifth level</a:t>
             </a:r>
-            <a:endParaRPr lang="en-US"/>
           </a:p>
         </p:txBody>
       </p:sp>
@@ -2723,7 +2718,7 @@
           <a:p>
             <a:fld id="{5BCAD085-E8A6-8845-BD4E-CB4CCA059FC4}" type="datetimeFigureOut">
               <a:rPr lang="en-US" smtClean="0"/>
-              <a:t>1/27/13</a:t>
+              <a:t>2/27/2026</a:t>
             </a:fld>
             <a:endParaRPr lang="en-US"/>
           </a:p>
@@ -3082,7 +3077,7 @@
 </file>
 
 <file path=ppt/slides/slide1.xml><?xml version="1.0" encoding="utf-8"?>
-<p:sld xmlns:a="http://schemas.openxmlformats.org/drawingml/2006/main" xmlns:p="http://schemas.openxmlformats.org/presentationml/2006/main" xmlns:r="http://schemas.openxmlformats.org/officeDocument/2006/relationships">
+<p:sld xmlns:a="http://schemas.openxmlformats.org/drawingml/2006/main" xmlns:r="http://schemas.openxmlformats.org/officeDocument/2006/relationships" xmlns:p="http://schemas.openxmlformats.org/presentationml/2006/main">
   <p:cSld>
     <p:bg>
       <p:bgPr>
@@ -3098,7 +3093,14 @@
         <p:cNvGrpSpPr/>
         <p:nvPr/>
       </p:nvGrpSpPr>
-      <p:grpSpPr/>
+      <p:grpSpPr>
+        <a:xfrm>
+          <a:off x="0" y="0"/>
+          <a:ext cx="0" cy="0"/>
+          <a:chOff x="0" y="0"/>
+          <a:chExt cx="0" cy="0"/>
+        </a:xfrm>
+      </p:grpSpPr>
       <p:sp>
         <p:nvSpPr>
           <p:cNvPr id="2" name="TextBox 1"/>
@@ -3116,7 +3118,7 @@
           <a:noFill/>
         </p:spPr>
         <p:txBody>
-          <a:bodyPr wrap="none" lIns="0" rIns="0" tIns="0" bIns="0">
+          <a:bodyPr wrap="none" lIns="0" tIns="0" rIns="0" bIns="0">
             <a:spAutoFit/>
           </a:bodyPr>
           <a:lstStyle/>
@@ -3151,7 +3153,7 @@
           <a:noFill/>
         </p:spPr>
         <p:txBody>
-          <a:bodyPr wrap="none" lIns="0" rIns="0" tIns="0" bIns="0">
+          <a:bodyPr wrap="none" lIns="0" tIns="0" rIns="0" bIns="0">
             <a:spAutoFit/>
           </a:bodyPr>
           <a:lstStyle/>
@@ -3164,7 +3166,7 @@
                 </a:solidFill>
                 <a:latin typeface="Malgun Gothic"/>
               </a:rPr>
-              <a:t>Cash Position</a:t>
+              <a:t>Revenue</a:t>
             </a:r>
           </a:p>
         </p:txBody>
@@ -3209,6 +3211,7 @@
           <a:lstStyle/>
           <a:p>
             <a:pPr algn="ctr"/>
+            <a:endParaRPr/>
           </a:p>
         </p:txBody>
       </p:sp>
@@ -3229,7 +3232,7 @@
           <a:noFill/>
         </p:spPr>
         <p:txBody>
-          <a:bodyPr wrap="none" lIns="0" rIns="0" tIns="0" bIns="0">
+          <a:bodyPr wrap="none" lIns="0" tIns="0" rIns="0" bIns="0">
             <a:spAutoFit/>
           </a:bodyPr>
           <a:lstStyle/>
@@ -3264,7 +3267,7 @@
           <a:noFill/>
         </p:spPr>
         <p:txBody>
-          <a:bodyPr wrap="none" lIns="0" rIns="0" tIns="0" bIns="0">
+          <a:bodyPr wrap="none" lIns="0" tIns="0" rIns="0" bIns="0">
             <a:spAutoFit/>
           </a:bodyPr>
           <a:lstStyle/>
@@ -3277,7 +3280,7 @@
                 </a:solidFill>
                 <a:latin typeface="Malgun Gothic"/>
               </a:rPr>
-              <a:t>01 / 04</a:t>
+              <a:t>02 / 04</a:t>
             </a:r>
           </a:p>
         </p:txBody>
@@ -3299,7 +3302,7 @@
           <a:noFill/>
         </p:spPr>
         <p:txBody>
-          <a:bodyPr wrap="none" lIns="0" rIns="0" tIns="0" bIns="0">
+          <a:bodyPr wrap="none" lIns="0" tIns="0" rIns="0" bIns="0">
             <a:spAutoFit/>
           </a:bodyPr>
           <a:lstStyle/>
@@ -3312,7 +3315,7 @@
                 </a:solidFill>
                 <a:latin typeface="Malgun Gothic"/>
               </a:rPr>
-              <a:t>Consolidated Cash Balance</a:t>
+              <a:t>Jan–Feb Cumulative Revenue</a:t>
             </a:r>
           </a:p>
         </p:txBody>
@@ -3326,29 +3329,35 @@
         <p:spPr>
           <a:xfrm>
             <a:off x="685628" y="952261"/>
-            <a:ext cx="4761309" cy="761809"/>
-          </a:xfrm>
-          <a:prstGeom prst="rect">
-            <a:avLst/>
-          </a:prstGeom>
-          <a:noFill/>
-        </p:spPr>
-        <p:txBody>
-          <a:bodyPr wrap="none" lIns="0" rIns="0" tIns="0" bIns="0">
+            <a:ext cx="2050241" cy="830997"/>
+          </a:xfrm>
+          <a:prstGeom prst="rect">
+            <a:avLst/>
+          </a:prstGeom>
+          <a:noFill/>
+        </p:spPr>
+        <p:txBody>
+          <a:bodyPr wrap="none" lIns="0" tIns="0" rIns="0" bIns="0">
             <a:spAutoFit/>
           </a:bodyPr>
           <a:lstStyle/>
           <a:p>
             <a:pPr algn="l"/>
             <a:r>
-              <a:rPr sz="5400" b="1">
+              <a:rPr lang="en-US" sz="5400" b="1" dirty="0">
                 <a:solidFill>
                   <a:srgbClr val="FFFFFF"/>
                 </a:solidFill>
                 <a:latin typeface="Malgun Gothic"/>
               </a:rPr>
-              <a:t>₩209M</a:t>
-            </a:r>
+              <a:t>$360K</a:t>
+            </a:r>
+            <a:endParaRPr sz="5400" b="1" dirty="0">
+              <a:solidFill>
+                <a:srgbClr val="FFFFFF"/>
+              </a:solidFill>
+              <a:latin typeface="Malgun Gothic"/>
+            </a:endParaRPr>
           </a:p>
         </p:txBody>
       </p:sp>
@@ -3361,28 +3370,28 @@
         <p:spPr>
           <a:xfrm>
             <a:off x="685628" y="1742639"/>
-            <a:ext cx="5332666" cy="228542"/>
-          </a:xfrm>
-          <a:prstGeom prst="rect">
-            <a:avLst/>
-          </a:prstGeom>
-          <a:noFill/>
-        </p:spPr>
-        <p:txBody>
-          <a:bodyPr wrap="none" lIns="0" rIns="0" tIns="0" bIns="0">
+            <a:ext cx="7618095" cy="209497"/>
+          </a:xfrm>
+          <a:prstGeom prst="rect">
+            <a:avLst/>
+          </a:prstGeom>
+          <a:noFill/>
+        </p:spPr>
+        <p:txBody>
+          <a:bodyPr wrap="none" lIns="0" tIns="0" rIns="0" bIns="0">
             <a:spAutoFit/>
           </a:bodyPr>
           <a:lstStyle/>
           <a:p>
             <a:pPr algn="l"/>
             <a:r>
-              <a:rPr sz="1275" b="1">
-                <a:solidFill>
-                  <a:srgbClr val="FF2D55"/>
-                </a:solidFill>
-                <a:latin typeface="Malgun Gothic"/>
-              </a:rPr>
-              <a:t>▼ ₩154M vs. Last Month</a:t>
+              <a:rPr sz="975" b="0">
+                <a:solidFill>
+                  <a:srgbClr val="666666"/>
+                </a:solidFill>
+                <a:latin typeface="Malgun Gothic"/>
+              </a:rPr>
+              <a:t>Global 94% Contribution  ·  YoY -8% (Same BU Base)</a:t>
             </a:r>
           </a:p>
         </p:txBody>
@@ -3427,6 +3436,7 @@
           <a:lstStyle/>
           <a:p>
             <a:pPr algn="ctr"/>
+            <a:endParaRPr/>
           </a:p>
         </p:txBody>
       </p:sp>
@@ -3470,6 +3480,7 @@
           <a:lstStyle/>
           <a:p>
             <a:pPr algn="ctr"/>
+            <a:endParaRPr/>
           </a:p>
         </p:txBody>
       </p:sp>
@@ -3490,7 +3501,7 @@
           <a:noFill/>
         </p:spPr>
         <p:txBody>
-          <a:bodyPr wrap="none" lIns="0" rIns="0" tIns="0" bIns="0">
+          <a:bodyPr wrap="none" lIns="0" tIns="0" rIns="0" bIns="0">
             <a:spAutoFit/>
           </a:bodyPr>
           <a:lstStyle/>
@@ -3503,7 +3514,7 @@
                 </a:solidFill>
                 <a:latin typeface="Malgun Gothic"/>
               </a:rPr>
-              <a:t>BY ENTITY</a:t>
+              <a:t>MONTHLY REVENUE</a:t>
             </a:r>
           </a:p>
         </p:txBody>
@@ -3548,6 +3559,7 @@
           <a:lstStyle/>
           <a:p>
             <a:pPr algn="ctr"/>
+            <a:endParaRPr/>
           </a:p>
         </p:txBody>
       </p:sp>
@@ -3559,29 +3571,29 @@
         </p:nvSpPr>
         <p:spPr>
           <a:xfrm>
-            <a:off x="837990" y="2475880"/>
-            <a:ext cx="5027942" cy="228542"/>
-          </a:xfrm>
-          <a:prstGeom prst="rect">
-            <a:avLst/>
-          </a:prstGeom>
-          <a:noFill/>
-        </p:spPr>
-        <p:txBody>
-          <a:bodyPr wrap="none" lIns="0" rIns="0" tIns="0" bIns="0">
+            <a:off x="837990" y="2437790"/>
+            <a:ext cx="1428392" cy="171407"/>
+          </a:xfrm>
+          <a:prstGeom prst="rect">
+            <a:avLst/>
+          </a:prstGeom>
+          <a:noFill/>
+        </p:spPr>
+        <p:txBody>
+          <a:bodyPr wrap="none" lIns="0" tIns="0" rIns="0" bIns="0">
             <a:spAutoFit/>
           </a:bodyPr>
           <a:lstStyle/>
           <a:p>
             <a:pPr algn="l"/>
             <a:r>
-              <a:rPr sz="1200" b="1">
-                <a:solidFill>
-                  <a:srgbClr val="666666"/>
-                </a:solidFill>
-                <a:latin typeface="Malgun Gothic"/>
-              </a:rPr>
-              <a:t>Korea</a:t>
+              <a:rPr sz="825" b="1">
+                <a:solidFill>
+                  <a:srgbClr val="444444"/>
+                </a:solidFill>
+                <a:latin typeface="Malgun Gothic"/>
+              </a:rPr>
+              <a:t>BU</a:t>
             </a:r>
           </a:p>
         </p:txBody>
@@ -3594,42 +3606,112 @@
         </p:nvSpPr>
         <p:spPr>
           <a:xfrm>
-            <a:off x="837990" y="2742514"/>
-            <a:ext cx="5027942" cy="514221"/>
-          </a:xfrm>
-          <a:prstGeom prst="rect">
-            <a:avLst/>
-          </a:prstGeom>
-          <a:noFill/>
-        </p:spPr>
-        <p:txBody>
-          <a:bodyPr wrap="none" lIns="0" rIns="0" tIns="0" bIns="0">
-            <a:spAutoFit/>
-          </a:bodyPr>
-          <a:lstStyle/>
-          <a:p>
-            <a:pPr algn="l"/>
-            <a:r>
-              <a:rPr sz="3000" b="1">
-                <a:solidFill>
-                  <a:srgbClr val="FFFFFF"/>
-                </a:solidFill>
-                <a:latin typeface="Malgun Gothic"/>
-              </a:rPr>
-              <a:t>₩95M</a:t>
-            </a:r>
-          </a:p>
-        </p:txBody>
-      </p:sp>
-      <p:sp>
-        <p:nvSpPr>
-          <p:cNvPr id="16" name="Rectangle 15"/>
+            <a:off x="2380654" y="2437790"/>
+            <a:ext cx="952261" cy="171407"/>
+          </a:xfrm>
+          <a:prstGeom prst="rect">
+            <a:avLst/>
+          </a:prstGeom>
+          <a:noFill/>
+        </p:spPr>
+        <p:txBody>
+          <a:bodyPr wrap="none" lIns="0" tIns="0" rIns="0" bIns="0">
+            <a:spAutoFit/>
+          </a:bodyPr>
+          <a:lstStyle/>
+          <a:p>
+            <a:pPr algn="r"/>
+            <a:r>
+              <a:rPr sz="825" b="1">
+                <a:solidFill>
+                  <a:srgbClr val="444444"/>
+                </a:solidFill>
+                <a:latin typeface="Malgun Gothic"/>
+              </a:rPr>
+              <a:t>Jan</a:t>
+            </a:r>
+          </a:p>
+        </p:txBody>
+      </p:sp>
+      <p:sp>
+        <p:nvSpPr>
+          <p:cNvPr id="16" name="TextBox 15"/>
+          <p:cNvSpPr txBox="1"/>
+          <p:nvPr/>
+        </p:nvSpPr>
+        <p:spPr>
+          <a:xfrm>
+            <a:off x="3504323" y="2437790"/>
+            <a:ext cx="952261" cy="171407"/>
+          </a:xfrm>
+          <a:prstGeom prst="rect">
+            <a:avLst/>
+          </a:prstGeom>
+          <a:noFill/>
+        </p:spPr>
+        <p:txBody>
+          <a:bodyPr wrap="none" lIns="0" tIns="0" rIns="0" bIns="0">
+            <a:spAutoFit/>
+          </a:bodyPr>
+          <a:lstStyle/>
+          <a:p>
+            <a:pPr algn="r"/>
+            <a:r>
+              <a:rPr sz="825" b="1">
+                <a:solidFill>
+                  <a:srgbClr val="444444"/>
+                </a:solidFill>
+                <a:latin typeface="Malgun Gothic"/>
+              </a:rPr>
+              <a:t>Feb</a:t>
+            </a:r>
+          </a:p>
+        </p:txBody>
+      </p:sp>
+      <p:sp>
+        <p:nvSpPr>
+          <p:cNvPr id="17" name="TextBox 16"/>
+          <p:cNvSpPr txBox="1"/>
+          <p:nvPr/>
+        </p:nvSpPr>
+        <p:spPr>
+          <a:xfrm>
+            <a:off x="4627992" y="2437790"/>
+            <a:ext cx="1085578" cy="171407"/>
+          </a:xfrm>
+          <a:prstGeom prst="rect">
+            <a:avLst/>
+          </a:prstGeom>
+          <a:noFill/>
+        </p:spPr>
+        <p:txBody>
+          <a:bodyPr wrap="none" lIns="0" tIns="0" rIns="0" bIns="0">
+            <a:spAutoFit/>
+          </a:bodyPr>
+          <a:lstStyle/>
+          <a:p>
+            <a:pPr algn="r"/>
+            <a:r>
+              <a:rPr sz="825" b="1">
+                <a:solidFill>
+                  <a:srgbClr val="444444"/>
+                </a:solidFill>
+                <a:latin typeface="Malgun Gothic"/>
+              </a:rPr>
+              <a:t>Total</a:t>
+            </a:r>
+          </a:p>
+        </p:txBody>
+      </p:sp>
+      <p:sp>
+        <p:nvSpPr>
+          <p:cNvPr id="18" name="Rectangle 17"/>
           <p:cNvSpPr/>
           <p:nvPr/>
         </p:nvSpPr>
         <p:spPr>
           <a:xfrm>
-            <a:off x="837990" y="3694776"/>
+            <a:off x="837990" y="2666333"/>
             <a:ext cx="5027942" cy="9522"/>
           </a:xfrm>
           <a:prstGeom prst="rect">
@@ -3661,27 +3743,28 @@
           <a:lstStyle/>
           <a:p>
             <a:pPr algn="ctr"/>
-          </a:p>
-        </p:txBody>
-      </p:sp>
-      <p:sp>
-        <p:nvSpPr>
-          <p:cNvPr id="17" name="TextBox 16"/>
-          <p:cNvSpPr txBox="1"/>
-          <p:nvPr/>
-        </p:nvSpPr>
-        <p:spPr>
-          <a:xfrm>
-            <a:off x="837990" y="3790002"/>
-            <a:ext cx="5027942" cy="228542"/>
-          </a:xfrm>
-          <a:prstGeom prst="rect">
-            <a:avLst/>
-          </a:prstGeom>
-          <a:noFill/>
-        </p:spPr>
-        <p:txBody>
-          <a:bodyPr wrap="none" lIns="0" rIns="0" tIns="0" bIns="0">
+            <a:endParaRPr/>
+          </a:p>
+        </p:txBody>
+      </p:sp>
+      <p:sp>
+        <p:nvSpPr>
+          <p:cNvPr id="19" name="TextBox 18"/>
+          <p:cNvSpPr txBox="1"/>
+          <p:nvPr/>
+        </p:nvSpPr>
+        <p:spPr>
+          <a:xfrm>
+            <a:off x="837990" y="2780604"/>
+            <a:ext cx="1523619" cy="247588"/>
+          </a:xfrm>
+          <a:prstGeom prst="rect">
+            <a:avLst/>
+          </a:prstGeom>
+          <a:noFill/>
+        </p:spPr>
+        <p:txBody>
+          <a:bodyPr wrap="none" lIns="0" tIns="0" rIns="0" bIns="0">
             <a:spAutoFit/>
           </a:bodyPr>
           <a:lstStyle/>
@@ -3690,59 +3773,135 @@
             <a:r>
               <a:rPr sz="1200" b="1">
                 <a:solidFill>
+                  <a:srgbClr val="FFFFFF"/>
+                </a:solidFill>
+                <a:latin typeface="Malgun Gothic"/>
+              </a:rPr>
+              <a:t>KR Content</a:t>
+            </a:r>
+          </a:p>
+        </p:txBody>
+      </p:sp>
+      <p:sp>
+        <p:nvSpPr>
+          <p:cNvPr id="20" name="TextBox 19"/>
+          <p:cNvSpPr txBox="1"/>
+          <p:nvPr/>
+        </p:nvSpPr>
+        <p:spPr>
+          <a:xfrm>
+            <a:off x="2380654" y="2780604"/>
+            <a:ext cx="952261" cy="247588"/>
+          </a:xfrm>
+          <a:prstGeom prst="rect">
+            <a:avLst/>
+          </a:prstGeom>
+          <a:noFill/>
+        </p:spPr>
+        <p:txBody>
+          <a:bodyPr wrap="none" lIns="0" tIns="0" rIns="0" bIns="0">
+            <a:spAutoFit/>
+          </a:bodyPr>
+          <a:lstStyle/>
+          <a:p>
+            <a:pPr algn="r"/>
+            <a:r>
+              <a:rPr sz="1200" b="1">
+                <a:solidFill>
                   <a:srgbClr val="666666"/>
                 </a:solidFill>
                 <a:latin typeface="Malgun Gothic"/>
               </a:rPr>
-              <a:t>US</a:t>
-            </a:r>
-          </a:p>
-        </p:txBody>
-      </p:sp>
-      <p:sp>
-        <p:nvSpPr>
-          <p:cNvPr id="18" name="TextBox 17"/>
-          <p:cNvSpPr txBox="1"/>
-          <p:nvPr/>
-        </p:nvSpPr>
-        <p:spPr>
-          <a:xfrm>
-            <a:off x="837990" y="4056635"/>
-            <a:ext cx="5027942" cy="514221"/>
-          </a:xfrm>
-          <a:prstGeom prst="rect">
-            <a:avLst/>
-          </a:prstGeom>
-          <a:noFill/>
-        </p:spPr>
-        <p:txBody>
-          <a:bodyPr wrap="none" lIns="0" rIns="0" tIns="0" bIns="0">
-            <a:spAutoFit/>
-          </a:bodyPr>
-          <a:lstStyle/>
-          <a:p>
-            <a:pPr algn="l"/>
-            <a:r>
-              <a:rPr sz="3000" b="1">
+              <a:t>₩1.6M</a:t>
+            </a:r>
+          </a:p>
+        </p:txBody>
+      </p:sp>
+      <p:sp>
+        <p:nvSpPr>
+          <p:cNvPr id="21" name="TextBox 20"/>
+          <p:cNvSpPr txBox="1"/>
+          <p:nvPr/>
+        </p:nvSpPr>
+        <p:spPr>
+          <a:xfrm>
+            <a:off x="3504323" y="2780604"/>
+            <a:ext cx="952261" cy="247588"/>
+          </a:xfrm>
+          <a:prstGeom prst="rect">
+            <a:avLst/>
+          </a:prstGeom>
+          <a:noFill/>
+        </p:spPr>
+        <p:txBody>
+          <a:bodyPr wrap="none" lIns="0" tIns="0" rIns="0" bIns="0">
+            <a:spAutoFit/>
+          </a:bodyPr>
+          <a:lstStyle/>
+          <a:p>
+            <a:pPr algn="r"/>
+            <a:r>
+              <a:rPr sz="1200" b="1" dirty="0">
                 <a:solidFill>
                   <a:srgbClr val="FFFFFF"/>
                 </a:solidFill>
                 <a:latin typeface="Malgun Gothic"/>
               </a:rPr>
-              <a:t>$71K  ·  ₩103M</a:t>
-            </a:r>
-          </a:p>
-        </p:txBody>
-      </p:sp>
-      <p:sp>
-        <p:nvSpPr>
-          <p:cNvPr id="19" name="Rectangle 18"/>
+              <a:t>₩13.1M</a:t>
+            </a:r>
+          </a:p>
+        </p:txBody>
+      </p:sp>
+      <p:sp>
+        <p:nvSpPr>
+          <p:cNvPr id="22" name="TextBox 21"/>
+          <p:cNvSpPr txBox="1"/>
+          <p:nvPr/>
+        </p:nvSpPr>
+        <p:spPr>
+          <a:xfrm>
+            <a:off x="5344878" y="2780604"/>
+            <a:ext cx="368692" cy="184666"/>
+          </a:xfrm>
+          <a:prstGeom prst="rect">
+            <a:avLst/>
+          </a:prstGeom>
+          <a:noFill/>
+        </p:spPr>
+        <p:txBody>
+          <a:bodyPr wrap="none" lIns="0" tIns="0" rIns="0" bIns="0">
+            <a:spAutoFit/>
+          </a:bodyPr>
+          <a:lstStyle/>
+          <a:p>
+            <a:pPr algn="r"/>
+            <a:r>
+              <a:rPr lang="en-US" sz="1200" b="1" dirty="0">
+                <a:solidFill>
+                  <a:srgbClr val="E8FF47"/>
+                </a:solidFill>
+                <a:latin typeface="Malgun Gothic"/>
+              </a:rPr>
+              <a:t>$12K</a:t>
+            </a:r>
+            <a:endParaRPr sz="1200" b="1" dirty="0">
+              <a:solidFill>
+                <a:srgbClr val="E8FF47"/>
+              </a:solidFill>
+              <a:latin typeface="Malgun Gothic"/>
+            </a:endParaRPr>
+          </a:p>
+        </p:txBody>
+      </p:sp>
+      <p:sp>
+        <p:nvSpPr>
+          <p:cNvPr id="23" name="Rectangle 22"/>
           <p:cNvSpPr/>
           <p:nvPr/>
         </p:nvSpPr>
         <p:spPr>
           <a:xfrm>
-            <a:off x="837990" y="5008897"/>
+            <a:off x="837990" y="3628117"/>
             <a:ext cx="5027942" cy="9522"/>
           </a:xfrm>
           <a:prstGeom prst="rect">
@@ -3774,82 +3933,533 @@
           <a:lstStyle/>
           <a:p>
             <a:pPr algn="ctr"/>
-          </a:p>
-        </p:txBody>
-      </p:sp>
-      <p:sp>
-        <p:nvSpPr>
-          <p:cNvPr id="20" name="TextBox 19"/>
-          <p:cNvSpPr txBox="1"/>
-          <p:nvPr/>
-        </p:nvSpPr>
-        <p:spPr>
-          <a:xfrm>
-            <a:off x="837990" y="5104123"/>
-            <a:ext cx="5027942" cy="228542"/>
-          </a:xfrm>
-          <a:prstGeom prst="rect">
-            <a:avLst/>
-          </a:prstGeom>
-          <a:noFill/>
-        </p:spPr>
-        <p:txBody>
-          <a:bodyPr wrap="none" lIns="0" rIns="0" tIns="0" bIns="0">
+            <a:endParaRPr/>
+          </a:p>
+        </p:txBody>
+      </p:sp>
+      <p:sp>
+        <p:nvSpPr>
+          <p:cNvPr id="24" name="TextBox 23"/>
+          <p:cNvSpPr txBox="1"/>
+          <p:nvPr/>
+        </p:nvSpPr>
+        <p:spPr>
+          <a:xfrm>
+            <a:off x="837990" y="3685253"/>
+            <a:ext cx="1523619" cy="247588"/>
+          </a:xfrm>
+          <a:prstGeom prst="rect">
+            <a:avLst/>
+          </a:prstGeom>
+          <a:noFill/>
+        </p:spPr>
+        <p:txBody>
+          <a:bodyPr wrap="none" lIns="0" tIns="0" rIns="0" bIns="0">
             <a:spAutoFit/>
           </a:bodyPr>
           <a:lstStyle/>
           <a:p>
             <a:pPr algn="l"/>
             <a:r>
+              <a:rPr sz="1200" b="1" dirty="0">
+                <a:solidFill>
+                  <a:srgbClr val="FFFFFF"/>
+                </a:solidFill>
+                <a:latin typeface="Malgun Gothic"/>
+              </a:rPr>
+              <a:t>KR Planet</a:t>
+            </a:r>
+          </a:p>
+        </p:txBody>
+      </p:sp>
+      <p:sp>
+        <p:nvSpPr>
+          <p:cNvPr id="25" name="TextBox 24"/>
+          <p:cNvSpPr txBox="1"/>
+          <p:nvPr/>
+        </p:nvSpPr>
+        <p:spPr>
+          <a:xfrm>
+            <a:off x="2380654" y="3685253"/>
+            <a:ext cx="952261" cy="247588"/>
+          </a:xfrm>
+          <a:prstGeom prst="rect">
+            <a:avLst/>
+          </a:prstGeom>
+          <a:noFill/>
+        </p:spPr>
+        <p:txBody>
+          <a:bodyPr wrap="none" lIns="0" tIns="0" rIns="0" bIns="0">
+            <a:spAutoFit/>
+          </a:bodyPr>
+          <a:lstStyle/>
+          <a:p>
+            <a:pPr algn="r"/>
+            <a:r>
               <a:rPr sz="1200" b="1">
                 <a:solidFill>
                   <a:srgbClr val="666666"/>
                 </a:solidFill>
                 <a:latin typeface="Malgun Gothic"/>
               </a:rPr>
-              <a:t>Vietnam</a:t>
-            </a:r>
-          </a:p>
-        </p:txBody>
-      </p:sp>
-      <p:sp>
-        <p:nvSpPr>
-          <p:cNvPr id="21" name="TextBox 20"/>
-          <p:cNvSpPr txBox="1"/>
-          <p:nvPr/>
-        </p:nvSpPr>
-        <p:spPr>
-          <a:xfrm>
-            <a:off x="837990" y="5370756"/>
-            <a:ext cx="5027942" cy="514221"/>
-          </a:xfrm>
-          <a:prstGeom prst="rect">
-            <a:avLst/>
-          </a:prstGeom>
-          <a:noFill/>
-        </p:spPr>
-        <p:txBody>
-          <a:bodyPr wrap="none" lIns="0" rIns="0" tIns="0" bIns="0">
+              <a:t>₩6.5M</a:t>
+            </a:r>
+          </a:p>
+        </p:txBody>
+      </p:sp>
+      <p:sp>
+        <p:nvSpPr>
+          <p:cNvPr id="26" name="TextBox 25"/>
+          <p:cNvSpPr txBox="1"/>
+          <p:nvPr/>
+        </p:nvSpPr>
+        <p:spPr>
+          <a:xfrm>
+            <a:off x="3504323" y="3685253"/>
+            <a:ext cx="952261" cy="247588"/>
+          </a:xfrm>
+          <a:prstGeom prst="rect">
+            <a:avLst/>
+          </a:prstGeom>
+          <a:noFill/>
+        </p:spPr>
+        <p:txBody>
+          <a:bodyPr wrap="none" lIns="0" tIns="0" rIns="0" bIns="0">
+            <a:spAutoFit/>
+          </a:bodyPr>
+          <a:lstStyle/>
+          <a:p>
+            <a:pPr algn="r"/>
+            <a:r>
+              <a:rPr sz="1200" b="1">
+                <a:solidFill>
+                  <a:srgbClr val="FFFFFF"/>
+                </a:solidFill>
+                <a:latin typeface="Malgun Gothic"/>
+              </a:rPr>
+              <a:t>₩5.0M</a:t>
+            </a:r>
+          </a:p>
+        </p:txBody>
+      </p:sp>
+      <p:sp>
+        <p:nvSpPr>
+          <p:cNvPr id="27" name="TextBox 26"/>
+          <p:cNvSpPr txBox="1"/>
+          <p:nvPr/>
+        </p:nvSpPr>
+        <p:spPr>
+          <a:xfrm>
+            <a:off x="5304804" y="3685253"/>
+            <a:ext cx="408766" cy="184666"/>
+          </a:xfrm>
+          <a:prstGeom prst="rect">
+            <a:avLst/>
+          </a:prstGeom>
+          <a:noFill/>
+        </p:spPr>
+        <p:txBody>
+          <a:bodyPr wrap="none" lIns="0" tIns="0" rIns="0" bIns="0">
+            <a:spAutoFit/>
+          </a:bodyPr>
+          <a:lstStyle/>
+          <a:p>
+            <a:pPr algn="r"/>
+            <a:r>
+              <a:rPr lang="en-US" sz="1200" b="1" dirty="0">
+                <a:solidFill>
+                  <a:srgbClr val="E8FF47"/>
+                </a:solidFill>
+                <a:latin typeface="Malgun Gothic"/>
+              </a:rPr>
+              <a:t>$9.5K</a:t>
+            </a:r>
+            <a:endParaRPr sz="1200" b="1" dirty="0">
+              <a:solidFill>
+                <a:srgbClr val="E8FF47"/>
+              </a:solidFill>
+              <a:latin typeface="Malgun Gothic"/>
+            </a:endParaRPr>
+          </a:p>
+        </p:txBody>
+      </p:sp>
+      <p:sp>
+        <p:nvSpPr>
+          <p:cNvPr id="28" name="Rectangle 27"/>
+          <p:cNvSpPr/>
+          <p:nvPr/>
+        </p:nvSpPr>
+        <p:spPr>
+          <a:xfrm>
+            <a:off x="837990" y="4532766"/>
+            <a:ext cx="5027942" cy="9522"/>
+          </a:xfrm>
+          <a:prstGeom prst="rect">
+            <a:avLst/>
+          </a:prstGeom>
+          <a:solidFill>
+            <a:srgbClr val="282828"/>
+          </a:solidFill>
+          <a:ln>
+            <a:noFill/>
+          </a:ln>
+        </p:spPr>
+        <p:style>
+          <a:lnRef idx="1">
+            <a:schemeClr val="accent1"/>
+          </a:lnRef>
+          <a:fillRef idx="3">
+            <a:schemeClr val="accent1"/>
+          </a:fillRef>
+          <a:effectRef idx="2">
+            <a:schemeClr val="accent1"/>
+          </a:effectRef>
+          <a:fontRef idx="minor">
+            <a:schemeClr val="lt1"/>
+          </a:fontRef>
+        </p:style>
+        <p:txBody>
+          <a:bodyPr rtlCol="0" anchor="ctr"/>
+          <a:lstStyle/>
+          <a:p>
+            <a:pPr algn="ctr"/>
+            <a:endParaRPr/>
+          </a:p>
+        </p:txBody>
+      </p:sp>
+      <p:sp>
+        <p:nvSpPr>
+          <p:cNvPr id="29" name="TextBox 28"/>
+          <p:cNvSpPr txBox="1"/>
+          <p:nvPr/>
+        </p:nvSpPr>
+        <p:spPr>
+          <a:xfrm>
+            <a:off x="837990" y="4589902"/>
+            <a:ext cx="1523619" cy="247588"/>
+          </a:xfrm>
+          <a:prstGeom prst="rect">
+            <a:avLst/>
+          </a:prstGeom>
+          <a:noFill/>
+        </p:spPr>
+        <p:txBody>
+          <a:bodyPr wrap="none" lIns="0" tIns="0" rIns="0" bIns="0">
             <a:spAutoFit/>
           </a:bodyPr>
           <a:lstStyle/>
           <a:p>
             <a:pPr algn="l"/>
             <a:r>
-              <a:rPr sz="3000" b="1">
+              <a:rPr sz="1200" b="1">
                 <a:solidFill>
                   <a:srgbClr val="FFFFFF"/>
                 </a:solidFill>
                 <a:latin typeface="Malgun Gothic"/>
               </a:rPr>
-              <a:t>₩12M</a:t>
-            </a:r>
-          </a:p>
-        </p:txBody>
-      </p:sp>
-      <p:sp>
-        <p:nvSpPr>
-          <p:cNvPr id="22" name="Rectangle 21"/>
+              <a:t>GL Global</a:t>
+            </a:r>
+          </a:p>
+        </p:txBody>
+      </p:sp>
+      <p:sp>
+        <p:nvSpPr>
+          <p:cNvPr id="30" name="TextBox 29"/>
+          <p:cNvSpPr txBox="1"/>
+          <p:nvPr/>
+        </p:nvSpPr>
+        <p:spPr>
+          <a:xfrm>
+            <a:off x="2380654" y="4589902"/>
+            <a:ext cx="952261" cy="247588"/>
+          </a:xfrm>
+          <a:prstGeom prst="rect">
+            <a:avLst/>
+          </a:prstGeom>
+          <a:noFill/>
+        </p:spPr>
+        <p:txBody>
+          <a:bodyPr wrap="none" lIns="0" tIns="0" rIns="0" bIns="0">
+            <a:spAutoFit/>
+          </a:bodyPr>
+          <a:lstStyle/>
+          <a:p>
+            <a:pPr algn="r"/>
+            <a:r>
+              <a:rPr sz="1200" b="1">
+                <a:solidFill>
+                  <a:srgbClr val="666666"/>
+                </a:solidFill>
+                <a:latin typeface="Malgun Gothic"/>
+              </a:rPr>
+              <a:t>₩320.7M</a:t>
+            </a:r>
+          </a:p>
+        </p:txBody>
+      </p:sp>
+      <p:sp>
+        <p:nvSpPr>
+          <p:cNvPr id="31" name="TextBox 30"/>
+          <p:cNvSpPr txBox="1"/>
+          <p:nvPr/>
+        </p:nvSpPr>
+        <p:spPr>
+          <a:xfrm>
+            <a:off x="3504323" y="4589902"/>
+            <a:ext cx="952261" cy="247588"/>
+          </a:xfrm>
+          <a:prstGeom prst="rect">
+            <a:avLst/>
+          </a:prstGeom>
+          <a:noFill/>
+        </p:spPr>
+        <p:txBody>
+          <a:bodyPr wrap="none" lIns="0" tIns="0" rIns="0" bIns="0">
+            <a:spAutoFit/>
+          </a:bodyPr>
+          <a:lstStyle/>
+          <a:p>
+            <a:pPr algn="r"/>
+            <a:r>
+              <a:rPr sz="1200" b="1">
+                <a:solidFill>
+                  <a:srgbClr val="FFFFFF"/>
+                </a:solidFill>
+                <a:latin typeface="Malgun Gothic"/>
+              </a:rPr>
+              <a:t>₩85.2M</a:t>
+            </a:r>
+          </a:p>
+        </p:txBody>
+      </p:sp>
+      <p:sp>
+        <p:nvSpPr>
+          <p:cNvPr id="32" name="TextBox 31"/>
+          <p:cNvSpPr txBox="1"/>
+          <p:nvPr/>
+        </p:nvSpPr>
+        <p:spPr>
+          <a:xfrm>
+            <a:off x="5255111" y="4589902"/>
+            <a:ext cx="458459" cy="184666"/>
+          </a:xfrm>
+          <a:prstGeom prst="rect">
+            <a:avLst/>
+          </a:prstGeom>
+          <a:noFill/>
+        </p:spPr>
+        <p:txBody>
+          <a:bodyPr wrap="none" lIns="0" tIns="0" rIns="0" bIns="0">
+            <a:spAutoFit/>
+          </a:bodyPr>
+          <a:lstStyle/>
+          <a:p>
+            <a:pPr algn="r"/>
+            <a:r>
+              <a:rPr lang="en-US" sz="1200" b="1" dirty="0">
+                <a:solidFill>
+                  <a:srgbClr val="E8FF47"/>
+                </a:solidFill>
+                <a:latin typeface="Malgun Gothic"/>
+              </a:rPr>
+              <a:t>$338K</a:t>
+            </a:r>
+            <a:endParaRPr sz="1200" b="1" dirty="0">
+              <a:solidFill>
+                <a:srgbClr val="E8FF47"/>
+              </a:solidFill>
+              <a:latin typeface="Malgun Gothic"/>
+            </a:endParaRPr>
+          </a:p>
+        </p:txBody>
+      </p:sp>
+      <p:sp>
+        <p:nvSpPr>
+          <p:cNvPr id="33" name="Rectangle 32"/>
+          <p:cNvSpPr/>
+          <p:nvPr/>
+        </p:nvSpPr>
+        <p:spPr>
+          <a:xfrm>
+            <a:off x="837990" y="5437415"/>
+            <a:ext cx="5027942" cy="9522"/>
+          </a:xfrm>
+          <a:prstGeom prst="rect">
+            <a:avLst/>
+          </a:prstGeom>
+          <a:solidFill>
+            <a:srgbClr val="2A2A2A"/>
+          </a:solidFill>
+          <a:ln>
+            <a:noFill/>
+          </a:ln>
+        </p:spPr>
+        <p:style>
+          <a:lnRef idx="1">
+            <a:schemeClr val="accent1"/>
+          </a:lnRef>
+          <a:fillRef idx="3">
+            <a:schemeClr val="accent1"/>
+          </a:fillRef>
+          <a:effectRef idx="2">
+            <a:schemeClr val="accent1"/>
+          </a:effectRef>
+          <a:fontRef idx="minor">
+            <a:schemeClr val="lt1"/>
+          </a:fontRef>
+        </p:style>
+        <p:txBody>
+          <a:bodyPr rtlCol="0" anchor="ctr"/>
+          <a:lstStyle/>
+          <a:p>
+            <a:pPr algn="ctr"/>
+            <a:endParaRPr/>
+          </a:p>
+        </p:txBody>
+      </p:sp>
+      <p:sp>
+        <p:nvSpPr>
+          <p:cNvPr id="34" name="TextBox 33"/>
+          <p:cNvSpPr txBox="1"/>
+          <p:nvPr/>
+        </p:nvSpPr>
+        <p:spPr>
+          <a:xfrm>
+            <a:off x="837990" y="5513596"/>
+            <a:ext cx="1523619" cy="266633"/>
+          </a:xfrm>
+          <a:prstGeom prst="rect">
+            <a:avLst/>
+          </a:prstGeom>
+          <a:noFill/>
+        </p:spPr>
+        <p:txBody>
+          <a:bodyPr wrap="none" lIns="0" tIns="0" rIns="0" bIns="0">
+            <a:spAutoFit/>
+          </a:bodyPr>
+          <a:lstStyle/>
+          <a:p>
+            <a:pPr algn="l"/>
+            <a:r>
+              <a:rPr sz="1350" b="1">
+                <a:solidFill>
+                  <a:srgbClr val="FFFFFF"/>
+                </a:solidFill>
+                <a:latin typeface="Malgun Gothic"/>
+              </a:rPr>
+              <a:t>Total</a:t>
+            </a:r>
+          </a:p>
+        </p:txBody>
+      </p:sp>
+      <p:sp>
+        <p:nvSpPr>
+          <p:cNvPr id="35" name="TextBox 34"/>
+          <p:cNvSpPr txBox="1"/>
+          <p:nvPr/>
+        </p:nvSpPr>
+        <p:spPr>
+          <a:xfrm>
+            <a:off x="2380654" y="5513596"/>
+            <a:ext cx="952261" cy="266633"/>
+          </a:xfrm>
+          <a:prstGeom prst="rect">
+            <a:avLst/>
+          </a:prstGeom>
+          <a:noFill/>
+        </p:spPr>
+        <p:txBody>
+          <a:bodyPr wrap="none" lIns="0" tIns="0" rIns="0" bIns="0">
+            <a:spAutoFit/>
+          </a:bodyPr>
+          <a:lstStyle/>
+          <a:p>
+            <a:pPr algn="r"/>
+            <a:r>
+              <a:rPr sz="1350" b="1">
+                <a:solidFill>
+                  <a:srgbClr val="FFFFFF"/>
+                </a:solidFill>
+                <a:latin typeface="Malgun Gothic"/>
+              </a:rPr>
+              <a:t>₩328.9M</a:t>
+            </a:r>
+          </a:p>
+        </p:txBody>
+      </p:sp>
+      <p:sp>
+        <p:nvSpPr>
+          <p:cNvPr id="36" name="TextBox 35"/>
+          <p:cNvSpPr txBox="1"/>
+          <p:nvPr/>
+        </p:nvSpPr>
+        <p:spPr>
+          <a:xfrm>
+            <a:off x="3504323" y="5513596"/>
+            <a:ext cx="952261" cy="266633"/>
+          </a:xfrm>
+          <a:prstGeom prst="rect">
+            <a:avLst/>
+          </a:prstGeom>
+          <a:noFill/>
+        </p:spPr>
+        <p:txBody>
+          <a:bodyPr wrap="none" lIns="0" tIns="0" rIns="0" bIns="0">
+            <a:spAutoFit/>
+          </a:bodyPr>
+          <a:lstStyle/>
+          <a:p>
+            <a:pPr algn="r"/>
+            <a:r>
+              <a:rPr sz="1350" b="1">
+                <a:solidFill>
+                  <a:srgbClr val="FFFFFF"/>
+                </a:solidFill>
+                <a:latin typeface="Malgun Gothic"/>
+              </a:rPr>
+              <a:t>₩103.3M</a:t>
+            </a:r>
+          </a:p>
+        </p:txBody>
+      </p:sp>
+      <p:sp>
+        <p:nvSpPr>
+          <p:cNvPr id="37" name="TextBox 36"/>
+          <p:cNvSpPr txBox="1"/>
+          <p:nvPr/>
+        </p:nvSpPr>
+        <p:spPr>
+          <a:xfrm>
+            <a:off x="4627992" y="5513596"/>
+            <a:ext cx="1085578" cy="266633"/>
+          </a:xfrm>
+          <a:prstGeom prst="rect">
+            <a:avLst/>
+          </a:prstGeom>
+          <a:noFill/>
+        </p:spPr>
+        <p:txBody>
+          <a:bodyPr wrap="none" lIns="0" tIns="0" rIns="0" bIns="0">
+            <a:spAutoFit/>
+          </a:bodyPr>
+          <a:lstStyle/>
+          <a:p>
+            <a:pPr algn="r"/>
+            <a:r>
+              <a:rPr sz="1350" b="1">
+                <a:solidFill>
+                  <a:srgbClr val="E8FF47"/>
+                </a:solidFill>
+                <a:latin typeface="Malgun Gothic"/>
+              </a:rPr>
+              <a:t>₩432.2M</a:t>
+            </a:r>
+          </a:p>
+        </p:txBody>
+      </p:sp>
+      <p:sp>
+        <p:nvSpPr>
+          <p:cNvPr id="38" name="Rectangle 37"/>
           <p:cNvSpPr/>
           <p:nvPr/>
         </p:nvSpPr>
@@ -3887,12 +4497,13 @@
           <a:lstStyle/>
           <a:p>
             <a:pPr algn="ctr"/>
-          </a:p>
-        </p:txBody>
-      </p:sp>
-      <p:sp>
-        <p:nvSpPr>
-          <p:cNvPr id="23" name="TextBox 22"/>
+            <a:endParaRPr/>
+          </a:p>
+        </p:txBody>
+      </p:sp>
+      <p:sp>
+        <p:nvSpPr>
+          <p:cNvPr id="39" name="TextBox 38"/>
           <p:cNvSpPr txBox="1"/>
           <p:nvPr/>
         </p:nvSpPr>
@@ -3907,7 +4518,7 @@
           <a:noFill/>
         </p:spPr>
         <p:txBody>
-          <a:bodyPr wrap="none" lIns="0" rIns="0" tIns="0" bIns="0">
+          <a:bodyPr wrap="none" lIns="0" tIns="0" rIns="0" bIns="0">
             <a:spAutoFit/>
           </a:bodyPr>
           <a:lstStyle/>
@@ -3920,14 +4531,14 @@
                 </a:solidFill>
                 <a:latin typeface="Malgun Gothic"/>
               </a:rPr>
-              <a:t>NET CHANGE  JAN → FEB</a:t>
-            </a:r>
-          </a:p>
-        </p:txBody>
-      </p:sp>
-      <p:sp>
-        <p:nvSpPr>
-          <p:cNvPr id="24" name="Rectangle 23"/>
+              <a:t>YOY  2025 vs 2026 (Same BU)</a:t>
+            </a:r>
+          </a:p>
+        </p:txBody>
+      </p:sp>
+      <p:sp>
+        <p:nvSpPr>
+          <p:cNvPr id="40" name="Rectangle 39"/>
           <p:cNvSpPr/>
           <p:nvPr/>
         </p:nvSpPr>
@@ -3965,88 +4576,139 @@
           <a:lstStyle/>
           <a:p>
             <a:pPr algn="ctr"/>
-          </a:p>
-        </p:txBody>
-      </p:sp>
-      <p:sp>
-        <p:nvSpPr>
-          <p:cNvPr id="25" name="TextBox 24"/>
-          <p:cNvSpPr txBox="1"/>
-          <p:nvPr/>
-        </p:nvSpPr>
-        <p:spPr>
-          <a:xfrm>
-            <a:off x="6323018" y="2533016"/>
-            <a:ext cx="2285428" cy="228542"/>
-          </a:xfrm>
-          <a:prstGeom prst="rect">
-            <a:avLst/>
-          </a:prstGeom>
-          <a:noFill/>
-        </p:spPr>
-        <p:txBody>
-          <a:bodyPr wrap="none" lIns="0" rIns="0" tIns="0" bIns="0">
+            <a:endParaRPr/>
+          </a:p>
+        </p:txBody>
+      </p:sp>
+      <p:sp>
+        <p:nvSpPr>
+          <p:cNvPr id="41" name="TextBox 40"/>
+          <p:cNvSpPr txBox="1"/>
+          <p:nvPr/>
+        </p:nvSpPr>
+        <p:spPr>
+          <a:xfrm>
+            <a:off x="6303973" y="4565071"/>
+            <a:ext cx="2475880" cy="228542"/>
+          </a:xfrm>
+          <a:prstGeom prst="rect">
+            <a:avLst/>
+          </a:prstGeom>
+          <a:noFill/>
+        </p:spPr>
+        <p:txBody>
+          <a:bodyPr wrap="none" lIns="0" tIns="0" rIns="0" bIns="0">
             <a:spAutoFit/>
           </a:bodyPr>
           <a:lstStyle/>
           <a:p>
             <a:pPr algn="l"/>
             <a:r>
-              <a:rPr sz="1200" b="1">
-                <a:solidFill>
-                  <a:srgbClr val="666666"/>
-                </a:solidFill>
-                <a:latin typeface="Malgun Gothic"/>
-              </a:rPr>
-              <a:t>Korea</a:t>
-            </a:r>
-          </a:p>
-        </p:txBody>
-      </p:sp>
-      <p:sp>
-        <p:nvSpPr>
-          <p:cNvPr id="26" name="TextBox 25"/>
-          <p:cNvSpPr txBox="1"/>
-          <p:nvPr/>
-        </p:nvSpPr>
-        <p:spPr>
-          <a:xfrm>
-            <a:off x="9027442" y="2475880"/>
-            <a:ext cx="2323518" cy="418995"/>
-          </a:xfrm>
-          <a:prstGeom prst="rect">
-            <a:avLst/>
-          </a:prstGeom>
-          <a:noFill/>
-        </p:spPr>
-        <p:txBody>
-          <a:bodyPr wrap="none" lIns="0" rIns="0" tIns="0" bIns="0">
+              <a:rPr sz="1200" b="1" dirty="0">
+                <a:solidFill>
+                  <a:srgbClr val="FFFFFF"/>
+                </a:solidFill>
+                <a:latin typeface="Malgun Gothic"/>
+              </a:rPr>
+              <a:t>GL Global</a:t>
+            </a:r>
+          </a:p>
+        </p:txBody>
+      </p:sp>
+      <p:sp>
+        <p:nvSpPr>
+          <p:cNvPr id="42" name="TextBox 41"/>
+          <p:cNvSpPr txBox="1"/>
+          <p:nvPr/>
+        </p:nvSpPr>
+        <p:spPr>
+          <a:xfrm>
+            <a:off x="6303973" y="4812659"/>
+            <a:ext cx="940963" cy="184666"/>
+          </a:xfrm>
+          <a:prstGeom prst="rect">
+            <a:avLst/>
+          </a:prstGeom>
+          <a:noFill/>
+        </p:spPr>
+        <p:txBody>
+          <a:bodyPr wrap="none" lIns="0" tIns="0" rIns="0" bIns="0">
+            <a:spAutoFit/>
+          </a:bodyPr>
+          <a:lstStyle/>
+          <a:p>
+            <a:pPr algn="l"/>
+            <a:r>
+              <a:rPr sz="1200" b="0" dirty="0">
+                <a:solidFill>
+                  <a:srgbClr val="444444"/>
+                </a:solidFill>
+                <a:latin typeface="Malgun Gothic"/>
+              </a:rPr>
+              <a:t>2025:  </a:t>
+            </a:r>
+            <a:r>
+              <a:rPr lang="en-US" sz="1200" b="1" dirty="0">
+                <a:solidFill>
+                  <a:srgbClr val="E8FF47"/>
+                </a:solidFill>
+                <a:latin typeface="Malgun Gothic"/>
+              </a:rPr>
+              <a:t>$266K</a:t>
+            </a:r>
+            <a:endParaRPr sz="1200" b="1" dirty="0">
+              <a:solidFill>
+                <a:srgbClr val="E8FF47"/>
+              </a:solidFill>
+              <a:latin typeface="Malgun Gothic"/>
+            </a:endParaRPr>
+          </a:p>
+        </p:txBody>
+      </p:sp>
+      <p:sp>
+        <p:nvSpPr>
+          <p:cNvPr id="43" name="TextBox 42"/>
+          <p:cNvSpPr txBox="1"/>
+          <p:nvPr/>
+        </p:nvSpPr>
+        <p:spPr>
+          <a:xfrm>
+            <a:off x="9198849" y="4488890"/>
+            <a:ext cx="2133066" cy="552311"/>
+          </a:xfrm>
+          <a:prstGeom prst="rect">
+            <a:avLst/>
+          </a:prstGeom>
+          <a:noFill/>
+        </p:spPr>
+        <p:txBody>
+          <a:bodyPr wrap="none" lIns="0" tIns="0" rIns="0" bIns="0">
             <a:spAutoFit/>
           </a:bodyPr>
           <a:lstStyle/>
           <a:p>
             <a:pPr algn="r"/>
             <a:r>
-              <a:rPr sz="2400" b="1">
-                <a:solidFill>
-                  <a:srgbClr val="FF2D55"/>
-                </a:solidFill>
-                <a:latin typeface="Malgun Gothic"/>
-              </a:rPr>
-              <a:t>▼ ₩47M</a:t>
-            </a:r>
-          </a:p>
-        </p:txBody>
-      </p:sp>
-      <p:sp>
-        <p:nvSpPr>
-          <p:cNvPr id="27" name="Rectangle 26"/>
+              <a:rPr sz="3300" b="1">
+                <a:solidFill>
+                  <a:srgbClr val="0AFF6C"/>
+                </a:solidFill>
+                <a:latin typeface="Malgun Gothic"/>
+              </a:rPr>
+              <a:t>+27%</a:t>
+            </a:r>
+          </a:p>
+        </p:txBody>
+      </p:sp>
+      <p:sp>
+        <p:nvSpPr>
+          <p:cNvPr id="44" name="Rectangle 43"/>
           <p:cNvSpPr/>
           <p:nvPr/>
         </p:nvSpPr>
         <p:spPr>
           <a:xfrm>
-            <a:off x="6323018" y="3694776"/>
+            <a:off x="6323018" y="3371007"/>
             <a:ext cx="5027942" cy="9522"/>
           </a:xfrm>
           <a:prstGeom prst="rect">
@@ -4078,88 +4740,139 @@
           <a:lstStyle/>
           <a:p>
             <a:pPr algn="ctr"/>
-          </a:p>
-        </p:txBody>
-      </p:sp>
-      <p:sp>
-        <p:nvSpPr>
-          <p:cNvPr id="28" name="TextBox 27"/>
-          <p:cNvSpPr txBox="1"/>
-          <p:nvPr/>
-        </p:nvSpPr>
-        <p:spPr>
-          <a:xfrm>
-            <a:off x="6323018" y="3847137"/>
-            <a:ext cx="2285428" cy="228542"/>
-          </a:xfrm>
-          <a:prstGeom prst="rect">
-            <a:avLst/>
-          </a:prstGeom>
-          <a:noFill/>
-        </p:spPr>
-        <p:txBody>
-          <a:bodyPr wrap="none" lIns="0" rIns="0" tIns="0" bIns="0">
+            <a:endParaRPr/>
+          </a:p>
+        </p:txBody>
+      </p:sp>
+      <p:sp>
+        <p:nvSpPr>
+          <p:cNvPr id="45" name="TextBox 44"/>
+          <p:cNvSpPr txBox="1"/>
+          <p:nvPr/>
+        </p:nvSpPr>
+        <p:spPr>
+          <a:xfrm>
+            <a:off x="6303973" y="2652175"/>
+            <a:ext cx="2475880" cy="228542"/>
+          </a:xfrm>
+          <a:prstGeom prst="rect">
+            <a:avLst/>
+          </a:prstGeom>
+          <a:noFill/>
+        </p:spPr>
+        <p:txBody>
+          <a:bodyPr wrap="none" lIns="0" tIns="0" rIns="0" bIns="0">
             <a:spAutoFit/>
           </a:bodyPr>
           <a:lstStyle/>
           <a:p>
             <a:pPr algn="l"/>
             <a:r>
-              <a:rPr sz="1200" b="1">
-                <a:solidFill>
-                  <a:srgbClr val="666666"/>
-                </a:solidFill>
-                <a:latin typeface="Malgun Gothic"/>
-              </a:rPr>
-              <a:t>US</a:t>
-            </a:r>
-          </a:p>
-        </p:txBody>
-      </p:sp>
-      <p:sp>
-        <p:nvSpPr>
-          <p:cNvPr id="29" name="TextBox 28"/>
-          <p:cNvSpPr txBox="1"/>
-          <p:nvPr/>
-        </p:nvSpPr>
-        <p:spPr>
-          <a:xfrm>
-            <a:off x="9027442" y="3790002"/>
-            <a:ext cx="2323518" cy="418995"/>
-          </a:xfrm>
-          <a:prstGeom prst="rect">
-            <a:avLst/>
-          </a:prstGeom>
-          <a:noFill/>
-        </p:spPr>
-        <p:txBody>
-          <a:bodyPr wrap="none" lIns="0" rIns="0" tIns="0" bIns="0">
+              <a:rPr sz="1200" b="1" dirty="0">
+                <a:solidFill>
+                  <a:srgbClr val="FFFFFF"/>
+                </a:solidFill>
+                <a:latin typeface="Malgun Gothic"/>
+              </a:rPr>
+              <a:t>KR Content</a:t>
+            </a:r>
+          </a:p>
+        </p:txBody>
+      </p:sp>
+      <p:sp>
+        <p:nvSpPr>
+          <p:cNvPr id="46" name="TextBox 45"/>
+          <p:cNvSpPr txBox="1"/>
+          <p:nvPr/>
+        </p:nvSpPr>
+        <p:spPr>
+          <a:xfrm>
+            <a:off x="6303973" y="2899763"/>
+            <a:ext cx="876843" cy="184666"/>
+          </a:xfrm>
+          <a:prstGeom prst="rect">
+            <a:avLst/>
+          </a:prstGeom>
+          <a:noFill/>
+        </p:spPr>
+        <p:txBody>
+          <a:bodyPr wrap="none" lIns="0" tIns="0" rIns="0" bIns="0">
+            <a:spAutoFit/>
+          </a:bodyPr>
+          <a:lstStyle/>
+          <a:p>
+            <a:pPr algn="l"/>
+            <a:r>
+              <a:rPr sz="1200" b="0" dirty="0">
+                <a:solidFill>
+                  <a:srgbClr val="444444"/>
+                </a:solidFill>
+                <a:latin typeface="Malgun Gothic"/>
+              </a:rPr>
+              <a:t>2025:  </a:t>
+            </a:r>
+            <a:r>
+              <a:rPr lang="en-US" sz="1200" b="1" dirty="0">
+                <a:solidFill>
+                  <a:srgbClr val="E8FF47"/>
+                </a:solidFill>
+                <a:latin typeface="Malgun Gothic"/>
+              </a:rPr>
+              <a:t>$52.5</a:t>
+            </a:r>
+            <a:endParaRPr sz="1200" b="1" dirty="0">
+              <a:solidFill>
+                <a:srgbClr val="E8FF47"/>
+              </a:solidFill>
+              <a:latin typeface="Malgun Gothic"/>
+            </a:endParaRPr>
+          </a:p>
+        </p:txBody>
+      </p:sp>
+      <p:sp>
+        <p:nvSpPr>
+          <p:cNvPr id="47" name="TextBox 46"/>
+          <p:cNvSpPr txBox="1"/>
+          <p:nvPr/>
+        </p:nvSpPr>
+        <p:spPr>
+          <a:xfrm>
+            <a:off x="9198849" y="2575994"/>
+            <a:ext cx="2133066" cy="552311"/>
+          </a:xfrm>
+          <a:prstGeom prst="rect">
+            <a:avLst/>
+          </a:prstGeom>
+          <a:noFill/>
+        </p:spPr>
+        <p:txBody>
+          <a:bodyPr wrap="none" lIns="0" tIns="0" rIns="0" bIns="0">
             <a:spAutoFit/>
           </a:bodyPr>
           <a:lstStyle/>
           <a:p>
             <a:pPr algn="r"/>
             <a:r>
-              <a:rPr sz="2400" b="1">
+              <a:rPr sz="3300" b="1">
                 <a:solidFill>
                   <a:srgbClr val="FF2D55"/>
                 </a:solidFill>
                 <a:latin typeface="Malgun Gothic"/>
               </a:rPr>
-              <a:t>▼ ₩94M</a:t>
-            </a:r>
-          </a:p>
-        </p:txBody>
-      </p:sp>
-      <p:sp>
-        <p:nvSpPr>
-          <p:cNvPr id="30" name="Rectangle 29"/>
+              <a:t>-77%</a:t>
+            </a:r>
+          </a:p>
+        </p:txBody>
+      </p:sp>
+      <p:sp>
+        <p:nvSpPr>
+          <p:cNvPr id="48" name="Rectangle 47"/>
           <p:cNvSpPr/>
           <p:nvPr/>
         </p:nvSpPr>
         <p:spPr>
           <a:xfrm>
-            <a:off x="6323018" y="5008897"/>
+            <a:off x="6323018" y="4361359"/>
             <a:ext cx="5027942" cy="9522"/>
           </a:xfrm>
           <a:prstGeom prst="rect">
@@ -4191,88 +4904,139 @@
           <a:lstStyle/>
           <a:p>
             <a:pPr algn="ctr"/>
-          </a:p>
-        </p:txBody>
-      </p:sp>
-      <p:sp>
-        <p:nvSpPr>
-          <p:cNvPr id="31" name="TextBox 30"/>
-          <p:cNvSpPr txBox="1"/>
-          <p:nvPr/>
-        </p:nvSpPr>
-        <p:spPr>
-          <a:xfrm>
-            <a:off x="6323018" y="5161259"/>
-            <a:ext cx="2285428" cy="228542"/>
-          </a:xfrm>
-          <a:prstGeom prst="rect">
-            <a:avLst/>
-          </a:prstGeom>
-          <a:noFill/>
-        </p:spPr>
-        <p:txBody>
-          <a:bodyPr wrap="none" lIns="0" rIns="0" tIns="0" bIns="0">
+            <a:endParaRPr/>
+          </a:p>
+        </p:txBody>
+      </p:sp>
+      <p:sp>
+        <p:nvSpPr>
+          <p:cNvPr id="49" name="TextBox 48"/>
+          <p:cNvSpPr txBox="1"/>
+          <p:nvPr/>
+        </p:nvSpPr>
+        <p:spPr>
+          <a:xfrm>
+            <a:off x="6303973" y="3610352"/>
+            <a:ext cx="2475880" cy="228542"/>
+          </a:xfrm>
+          <a:prstGeom prst="rect">
+            <a:avLst/>
+          </a:prstGeom>
+          <a:noFill/>
+        </p:spPr>
+        <p:txBody>
+          <a:bodyPr wrap="none" lIns="0" tIns="0" rIns="0" bIns="0">
             <a:spAutoFit/>
           </a:bodyPr>
           <a:lstStyle/>
           <a:p>
             <a:pPr algn="l"/>
             <a:r>
-              <a:rPr sz="1200" b="1">
-                <a:solidFill>
-                  <a:srgbClr val="666666"/>
-                </a:solidFill>
-                <a:latin typeface="Malgun Gothic"/>
-              </a:rPr>
-              <a:t>Vietnam</a:t>
-            </a:r>
-          </a:p>
-        </p:txBody>
-      </p:sp>
-      <p:sp>
-        <p:nvSpPr>
-          <p:cNvPr id="32" name="TextBox 31"/>
-          <p:cNvSpPr txBox="1"/>
-          <p:nvPr/>
-        </p:nvSpPr>
-        <p:spPr>
-          <a:xfrm>
-            <a:off x="9027442" y="5104123"/>
-            <a:ext cx="2323518" cy="418995"/>
-          </a:xfrm>
-          <a:prstGeom prst="rect">
-            <a:avLst/>
-          </a:prstGeom>
-          <a:noFill/>
-        </p:spPr>
-        <p:txBody>
-          <a:bodyPr wrap="none" lIns="0" rIns="0" tIns="0" bIns="0">
+              <a:rPr sz="1200" b="1" dirty="0">
+                <a:solidFill>
+                  <a:srgbClr val="FFFFFF"/>
+                </a:solidFill>
+                <a:latin typeface="Malgun Gothic"/>
+              </a:rPr>
+              <a:t>KR Planet</a:t>
+            </a:r>
+          </a:p>
+        </p:txBody>
+      </p:sp>
+      <p:sp>
+        <p:nvSpPr>
+          <p:cNvPr id="50" name="TextBox 49"/>
+          <p:cNvSpPr txBox="1"/>
+          <p:nvPr/>
+        </p:nvSpPr>
+        <p:spPr>
+          <a:xfrm>
+            <a:off x="6303973" y="3857940"/>
+            <a:ext cx="981038" cy="184666"/>
+          </a:xfrm>
+          <a:prstGeom prst="rect">
+            <a:avLst/>
+          </a:prstGeom>
+          <a:noFill/>
+        </p:spPr>
+        <p:txBody>
+          <a:bodyPr wrap="none" lIns="0" tIns="0" rIns="0" bIns="0">
+            <a:spAutoFit/>
+          </a:bodyPr>
+          <a:lstStyle/>
+          <a:p>
+            <a:pPr algn="l"/>
+            <a:r>
+              <a:rPr sz="1200" b="0" dirty="0">
+                <a:solidFill>
+                  <a:srgbClr val="444444"/>
+                </a:solidFill>
+                <a:latin typeface="Malgun Gothic"/>
+              </a:rPr>
+              <a:t>2025:  </a:t>
+            </a:r>
+            <a:r>
+              <a:rPr lang="en-US" sz="1200" b="1" dirty="0">
+                <a:solidFill>
+                  <a:srgbClr val="E8FF47"/>
+                </a:solidFill>
+                <a:latin typeface="Malgun Gothic"/>
+              </a:rPr>
+              <a:t>$72.5K</a:t>
+            </a:r>
+            <a:endParaRPr sz="1200" b="1" dirty="0">
+              <a:solidFill>
+                <a:srgbClr val="E8FF47"/>
+              </a:solidFill>
+              <a:latin typeface="Malgun Gothic"/>
+            </a:endParaRPr>
+          </a:p>
+        </p:txBody>
+      </p:sp>
+      <p:sp>
+        <p:nvSpPr>
+          <p:cNvPr id="51" name="TextBox 50"/>
+          <p:cNvSpPr txBox="1"/>
+          <p:nvPr/>
+        </p:nvSpPr>
+        <p:spPr>
+          <a:xfrm>
+            <a:off x="9198849" y="3534171"/>
+            <a:ext cx="2133066" cy="552311"/>
+          </a:xfrm>
+          <a:prstGeom prst="rect">
+            <a:avLst/>
+          </a:prstGeom>
+          <a:noFill/>
+        </p:spPr>
+        <p:txBody>
+          <a:bodyPr wrap="none" lIns="0" tIns="0" rIns="0" bIns="0">
             <a:spAutoFit/>
           </a:bodyPr>
           <a:lstStyle/>
           <a:p>
             <a:pPr algn="r"/>
             <a:r>
-              <a:rPr sz="2400" b="1">
+              <a:rPr sz="3300" b="1">
                 <a:solidFill>
                   <a:srgbClr val="FF2D55"/>
                 </a:solidFill>
                 <a:latin typeface="Malgun Gothic"/>
               </a:rPr>
-              <a:t>▼ ₩13M</a:t>
-            </a:r>
-          </a:p>
-        </p:txBody>
-      </p:sp>
-      <p:sp>
-        <p:nvSpPr>
-          <p:cNvPr id="33" name="Rectangle 32"/>
+              <a:t>-87%</a:t>
+            </a:r>
+          </a:p>
+        </p:txBody>
+      </p:sp>
+      <p:sp>
+        <p:nvSpPr>
+          <p:cNvPr id="52" name="Rectangle 51"/>
           <p:cNvSpPr/>
           <p:nvPr/>
         </p:nvSpPr>
         <p:spPr>
           <a:xfrm>
-            <a:off x="6323018" y="6323018"/>
+            <a:off x="6323018" y="5351711"/>
             <a:ext cx="5027942" cy="9522"/>
           </a:xfrm>
           <a:prstGeom prst="rect">
@@ -4304,75 +5068,76 @@
           <a:lstStyle/>
           <a:p>
             <a:pPr algn="ctr"/>
-          </a:p>
-        </p:txBody>
-      </p:sp>
-      <p:sp>
-        <p:nvSpPr>
-          <p:cNvPr id="34" name="TextBox 33"/>
-          <p:cNvSpPr txBox="1"/>
-          <p:nvPr/>
-        </p:nvSpPr>
-        <p:spPr>
-          <a:xfrm>
-            <a:off x="6323018" y="6418245"/>
-            <a:ext cx="1904523" cy="285678"/>
-          </a:xfrm>
-          <a:prstGeom prst="rect">
-            <a:avLst/>
-          </a:prstGeom>
-          <a:noFill/>
-        </p:spPr>
-        <p:txBody>
-          <a:bodyPr wrap="none" lIns="0" rIns="0" tIns="0" bIns="0">
+            <a:endParaRPr/>
+          </a:p>
+        </p:txBody>
+      </p:sp>
+      <p:sp>
+        <p:nvSpPr>
+          <p:cNvPr id="53" name="TextBox 52"/>
+          <p:cNvSpPr txBox="1"/>
+          <p:nvPr/>
+        </p:nvSpPr>
+        <p:spPr>
+          <a:xfrm>
+            <a:off x="6323018" y="5446937"/>
+            <a:ext cx="2856785" cy="285678"/>
+          </a:xfrm>
+          <a:prstGeom prst="rect">
+            <a:avLst/>
+          </a:prstGeom>
+          <a:noFill/>
+        </p:spPr>
+        <p:txBody>
+          <a:bodyPr wrap="none" lIns="0" tIns="0" rIns="0" bIns="0">
             <a:spAutoFit/>
           </a:bodyPr>
           <a:lstStyle/>
           <a:p>
             <a:pPr algn="l"/>
             <a:r>
-              <a:rPr sz="1500" b="1">
+              <a:rPr sz="1500" b="1" dirty="0">
                 <a:solidFill>
                   <a:srgbClr val="FFFFFF"/>
                 </a:solidFill>
                 <a:latin typeface="Malgun Gothic"/>
               </a:rPr>
-              <a:t>Total</a:t>
-            </a:r>
-          </a:p>
-        </p:txBody>
-      </p:sp>
-      <p:sp>
-        <p:nvSpPr>
-          <p:cNvPr id="35" name="TextBox 34"/>
-          <p:cNvSpPr txBox="1"/>
-          <p:nvPr/>
-        </p:nvSpPr>
-        <p:spPr>
-          <a:xfrm>
-            <a:off x="9217894" y="6380154"/>
-            <a:ext cx="2133066" cy="361859"/>
-          </a:xfrm>
-          <a:prstGeom prst="rect">
-            <a:avLst/>
-          </a:prstGeom>
-          <a:noFill/>
-        </p:spPr>
-        <p:txBody>
-          <a:bodyPr wrap="none" lIns="0" rIns="0" tIns="0" bIns="0">
+              <a:t>Overall (Same BU)</a:t>
+            </a:r>
+          </a:p>
+        </p:txBody>
+      </p:sp>
+      <p:sp>
+        <p:nvSpPr>
+          <p:cNvPr id="54" name="TextBox 53"/>
+          <p:cNvSpPr txBox="1"/>
+          <p:nvPr/>
+        </p:nvSpPr>
+        <p:spPr>
+          <a:xfrm>
+            <a:off x="9217894" y="5370756"/>
+            <a:ext cx="2133066" cy="571357"/>
+          </a:xfrm>
+          <a:prstGeom prst="rect">
+            <a:avLst/>
+          </a:prstGeom>
+          <a:noFill/>
+        </p:spPr>
+        <p:txBody>
+          <a:bodyPr wrap="none" lIns="0" tIns="0" rIns="0" bIns="0">
             <a:spAutoFit/>
           </a:bodyPr>
           <a:lstStyle/>
           <a:p>
             <a:pPr algn="r"/>
             <a:r>
-              <a:rPr sz="2100" b="1">
+              <a:rPr sz="3450" b="1">
                 <a:solidFill>
                   <a:srgbClr val="FF2D55"/>
                 </a:solidFill>
                 <a:latin typeface="Malgun Gothic"/>
               </a:rPr>
-              <a:t>▼ ₩154M</a:t>
+              <a:t>-8%</a:t>
             </a:r>
           </a:p>
         </p:txBody>
@@ -4386,7 +5151,7 @@
 </file>
 
 <file path=ppt/slides/slide2.xml><?xml version="1.0" encoding="utf-8"?>
-<p:sld xmlns:a="http://schemas.openxmlformats.org/drawingml/2006/main" xmlns:p="http://schemas.openxmlformats.org/presentationml/2006/main" xmlns:r="http://schemas.openxmlformats.org/officeDocument/2006/relationships">
+<p:sld xmlns:a="http://schemas.openxmlformats.org/drawingml/2006/main" xmlns:r="http://schemas.openxmlformats.org/officeDocument/2006/relationships" xmlns:p="http://schemas.openxmlformats.org/presentationml/2006/main">
   <p:cSld>
     <p:bg>
       <p:bgPr>
@@ -4402,7 +5167,14 @@
         <p:cNvGrpSpPr/>
         <p:nvPr/>
       </p:nvGrpSpPr>
-      <p:grpSpPr/>
+      <p:grpSpPr>
+        <a:xfrm>
+          <a:off x="0" y="0"/>
+          <a:ext cx="0" cy="0"/>
+          <a:chOff x="0" y="0"/>
+          <a:chExt cx="0" cy="0"/>
+        </a:xfrm>
+      </p:grpSpPr>
       <p:sp>
         <p:nvSpPr>
           <p:cNvPr id="2" name="TextBox 1"/>
@@ -4420,7 +5192,7 @@
           <a:noFill/>
         </p:spPr>
         <p:txBody>
-          <a:bodyPr wrap="none" lIns="0" rIns="0" tIns="0" bIns="0">
+          <a:bodyPr wrap="none" lIns="0" tIns="0" rIns="0" bIns="0">
             <a:spAutoFit/>
           </a:bodyPr>
           <a:lstStyle/>
@@ -4455,7 +5227,7 @@
           <a:noFill/>
         </p:spPr>
         <p:txBody>
-          <a:bodyPr wrap="none" lIns="0" rIns="0" tIns="0" bIns="0">
+          <a:bodyPr wrap="none" lIns="0" tIns="0" rIns="0" bIns="0">
             <a:spAutoFit/>
           </a:bodyPr>
           <a:lstStyle/>
@@ -4468,7 +5240,7 @@
                 </a:solidFill>
                 <a:latin typeface="Malgun Gothic"/>
               </a:rPr>
-              <a:t>Revenue</a:t>
+              <a:t>Cash Position</a:t>
             </a:r>
           </a:p>
         </p:txBody>
@@ -4513,6 +5285,7 @@
           <a:lstStyle/>
           <a:p>
             <a:pPr algn="ctr"/>
+            <a:endParaRPr/>
           </a:p>
         </p:txBody>
       </p:sp>
@@ -4533,7 +5306,7 @@
           <a:noFill/>
         </p:spPr>
         <p:txBody>
-          <a:bodyPr wrap="none" lIns="0" rIns="0" tIns="0" bIns="0">
+          <a:bodyPr wrap="none" lIns="0" tIns="0" rIns="0" bIns="0">
             <a:spAutoFit/>
           </a:bodyPr>
           <a:lstStyle/>
@@ -4568,7 +5341,7 @@
           <a:noFill/>
         </p:spPr>
         <p:txBody>
-          <a:bodyPr wrap="none" lIns="0" rIns="0" tIns="0" bIns="0">
+          <a:bodyPr wrap="none" lIns="0" tIns="0" rIns="0" bIns="0">
             <a:spAutoFit/>
           </a:bodyPr>
           <a:lstStyle/>
@@ -4581,7 +5354,7 @@
                 </a:solidFill>
                 <a:latin typeface="Malgun Gothic"/>
               </a:rPr>
-              <a:t>02 / 04</a:t>
+              <a:t>01 / 04</a:t>
             </a:r>
           </a:p>
         </p:txBody>
@@ -4603,7 +5376,7 @@
           <a:noFill/>
         </p:spPr>
         <p:txBody>
-          <a:bodyPr wrap="none" lIns="0" rIns="0" tIns="0" bIns="0">
+          <a:bodyPr wrap="none" lIns="0" tIns="0" rIns="0" bIns="0">
             <a:spAutoFit/>
           </a:bodyPr>
           <a:lstStyle/>
@@ -4616,7 +5389,7 @@
                 </a:solidFill>
                 <a:latin typeface="Malgun Gothic"/>
               </a:rPr>
-              <a:t>Jan–Feb Cumulative Revenue</a:t>
+              <a:t>Consolidated Cash Balance</a:t>
             </a:r>
           </a:p>
         </p:txBody>
@@ -4630,29 +5403,35 @@
         <p:spPr>
           <a:xfrm>
             <a:off x="685628" y="952261"/>
-            <a:ext cx="4761309" cy="761809"/>
-          </a:xfrm>
-          <a:prstGeom prst="rect">
-            <a:avLst/>
-          </a:prstGeom>
-          <a:noFill/>
-        </p:spPr>
-        <p:txBody>
-          <a:bodyPr wrap="none" lIns="0" rIns="0" tIns="0" bIns="0">
+            <a:ext cx="2050241" cy="830997"/>
+          </a:xfrm>
+          <a:prstGeom prst="rect">
+            <a:avLst/>
+          </a:prstGeom>
+          <a:noFill/>
+        </p:spPr>
+        <p:txBody>
+          <a:bodyPr wrap="none" lIns="0" tIns="0" rIns="0" bIns="0">
             <a:spAutoFit/>
           </a:bodyPr>
           <a:lstStyle/>
           <a:p>
             <a:pPr algn="l"/>
             <a:r>
-              <a:rPr sz="5400" b="1">
+              <a:rPr lang="en-US" sz="5400" b="1" dirty="0">
                 <a:solidFill>
                   <a:srgbClr val="FFFFFF"/>
                 </a:solidFill>
                 <a:latin typeface="Malgun Gothic"/>
               </a:rPr>
-              <a:t>₩432M</a:t>
-            </a:r>
+              <a:t>$174K</a:t>
+            </a:r>
+            <a:endParaRPr sz="5400" b="1" dirty="0">
+              <a:solidFill>
+                <a:srgbClr val="FFFFFF"/>
+              </a:solidFill>
+              <a:latin typeface="Malgun Gothic"/>
+            </a:endParaRPr>
           </a:p>
         </p:txBody>
       </p:sp>
@@ -4665,28 +5444,46 @@
         <p:spPr>
           <a:xfrm>
             <a:off x="685628" y="1742639"/>
-            <a:ext cx="7618095" cy="209497"/>
-          </a:xfrm>
-          <a:prstGeom prst="rect">
-            <a:avLst/>
-          </a:prstGeom>
-          <a:noFill/>
-        </p:spPr>
-        <p:txBody>
-          <a:bodyPr wrap="none" lIns="0" rIns="0" tIns="0" bIns="0">
+            <a:ext cx="1913985" cy="196208"/>
+          </a:xfrm>
+          <a:prstGeom prst="rect">
+            <a:avLst/>
+          </a:prstGeom>
+          <a:noFill/>
+        </p:spPr>
+        <p:txBody>
+          <a:bodyPr wrap="none" lIns="0" tIns="0" rIns="0" bIns="0">
             <a:spAutoFit/>
           </a:bodyPr>
           <a:lstStyle/>
           <a:p>
             <a:pPr algn="l"/>
             <a:r>
-              <a:rPr sz="975" b="0">
-                <a:solidFill>
-                  <a:srgbClr val="666666"/>
-                </a:solidFill>
-                <a:latin typeface="Malgun Gothic"/>
-              </a:rPr>
-              <a:t>Global 94% Contribution  ·  YoY -8% (Same BU Base)</a:t>
+              <a:rPr sz="1275" b="1" dirty="0">
+                <a:solidFill>
+                  <a:srgbClr val="FF2D55"/>
+                </a:solidFill>
+                <a:latin typeface="Malgun Gothic"/>
+              </a:rPr>
+              <a:t>▼ </a:t>
+            </a:r>
+            <a:r>
+              <a:rPr lang="en-US" sz="1275" b="1" dirty="0">
+                <a:solidFill>
+                  <a:srgbClr val="FF2D55"/>
+                </a:solidFill>
+                <a:latin typeface="Malgun Gothic"/>
+              </a:rPr>
+              <a:t>$125K </a:t>
+            </a:r>
+            <a:r>
+              <a:rPr sz="1275" b="1" dirty="0">
+                <a:solidFill>
+                  <a:srgbClr val="FF2D55"/>
+                </a:solidFill>
+                <a:latin typeface="Malgun Gothic"/>
+              </a:rPr>
+              <a:t>vs. Last Month</a:t>
             </a:r>
           </a:p>
         </p:txBody>
@@ -4731,6 +5528,7 @@
           <a:lstStyle/>
           <a:p>
             <a:pPr algn="ctr"/>
+            <a:endParaRPr/>
           </a:p>
         </p:txBody>
       </p:sp>
@@ -4774,6 +5572,7 @@
           <a:lstStyle/>
           <a:p>
             <a:pPr algn="ctr"/>
+            <a:endParaRPr/>
           </a:p>
         </p:txBody>
       </p:sp>
@@ -4794,7 +5593,7 @@
           <a:noFill/>
         </p:spPr>
         <p:txBody>
-          <a:bodyPr wrap="none" lIns="0" rIns="0" tIns="0" bIns="0">
+          <a:bodyPr wrap="none" lIns="0" tIns="0" rIns="0" bIns="0">
             <a:spAutoFit/>
           </a:bodyPr>
           <a:lstStyle/>
@@ -4807,7 +5606,7 @@
                 </a:solidFill>
                 <a:latin typeface="Malgun Gothic"/>
               </a:rPr>
-              <a:t>MONTHLY REVENUE</a:t>
+              <a:t>BY ENTITY</a:t>
             </a:r>
           </a:p>
         </p:txBody>
@@ -4852,6 +5651,7 @@
           <a:lstStyle/>
           <a:p>
             <a:pPr algn="ctr"/>
+            <a:endParaRPr/>
           </a:p>
         </p:txBody>
       </p:sp>
@@ -4863,29 +5663,29 @@
         </p:nvSpPr>
         <p:spPr>
           <a:xfrm>
-            <a:off x="837990" y="2437790"/>
-            <a:ext cx="1428392" cy="171407"/>
-          </a:xfrm>
-          <a:prstGeom prst="rect">
-            <a:avLst/>
-          </a:prstGeom>
-          <a:noFill/>
-        </p:spPr>
-        <p:txBody>
-          <a:bodyPr wrap="none" lIns="0" rIns="0" tIns="0" bIns="0">
+            <a:off x="837990" y="2475880"/>
+            <a:ext cx="5027942" cy="228542"/>
+          </a:xfrm>
+          <a:prstGeom prst="rect">
+            <a:avLst/>
+          </a:prstGeom>
+          <a:noFill/>
+        </p:spPr>
+        <p:txBody>
+          <a:bodyPr wrap="none" lIns="0" tIns="0" rIns="0" bIns="0">
             <a:spAutoFit/>
           </a:bodyPr>
           <a:lstStyle/>
           <a:p>
             <a:pPr algn="l"/>
             <a:r>
-              <a:rPr sz="825" b="1">
-                <a:solidFill>
-                  <a:srgbClr val="444444"/>
-                </a:solidFill>
-                <a:latin typeface="Malgun Gothic"/>
-              </a:rPr>
-              <a:t>BU</a:t>
+              <a:rPr sz="1200" b="1">
+                <a:solidFill>
+                  <a:srgbClr val="666666"/>
+                </a:solidFill>
+                <a:latin typeface="Malgun Gothic"/>
+              </a:rPr>
+              <a:t>Korea</a:t>
             </a:r>
           </a:p>
         </p:txBody>
@@ -4898,112 +5698,42 @@
         </p:nvSpPr>
         <p:spPr>
           <a:xfrm>
-            <a:off x="2380654" y="2437790"/>
-            <a:ext cx="952261" cy="171407"/>
-          </a:xfrm>
-          <a:prstGeom prst="rect">
-            <a:avLst/>
-          </a:prstGeom>
-          <a:noFill/>
-        </p:spPr>
-        <p:txBody>
-          <a:bodyPr wrap="none" lIns="0" rIns="0" tIns="0" bIns="0">
-            <a:spAutoFit/>
-          </a:bodyPr>
-          <a:lstStyle/>
-          <a:p>
-            <a:pPr algn="r"/>
-            <a:r>
-              <a:rPr sz="825" b="1">
-                <a:solidFill>
-                  <a:srgbClr val="444444"/>
-                </a:solidFill>
-                <a:latin typeface="Malgun Gothic"/>
-              </a:rPr>
-              <a:t>Jan</a:t>
-            </a:r>
-          </a:p>
-        </p:txBody>
-      </p:sp>
-      <p:sp>
-        <p:nvSpPr>
-          <p:cNvPr id="16" name="TextBox 15"/>
-          <p:cNvSpPr txBox="1"/>
-          <p:nvPr/>
-        </p:nvSpPr>
-        <p:spPr>
-          <a:xfrm>
-            <a:off x="3504323" y="2437790"/>
-            <a:ext cx="952261" cy="171407"/>
-          </a:xfrm>
-          <a:prstGeom prst="rect">
-            <a:avLst/>
-          </a:prstGeom>
-          <a:noFill/>
-        </p:spPr>
-        <p:txBody>
-          <a:bodyPr wrap="none" lIns="0" rIns="0" tIns="0" bIns="0">
-            <a:spAutoFit/>
-          </a:bodyPr>
-          <a:lstStyle/>
-          <a:p>
-            <a:pPr algn="r"/>
-            <a:r>
-              <a:rPr sz="825" b="1">
-                <a:solidFill>
-                  <a:srgbClr val="444444"/>
-                </a:solidFill>
-                <a:latin typeface="Malgun Gothic"/>
-              </a:rPr>
-              <a:t>Feb</a:t>
-            </a:r>
-          </a:p>
-        </p:txBody>
-      </p:sp>
-      <p:sp>
-        <p:nvSpPr>
-          <p:cNvPr id="17" name="TextBox 16"/>
-          <p:cNvSpPr txBox="1"/>
-          <p:nvPr/>
-        </p:nvSpPr>
-        <p:spPr>
-          <a:xfrm>
-            <a:off x="4627992" y="2437790"/>
-            <a:ext cx="1085578" cy="171407"/>
-          </a:xfrm>
-          <a:prstGeom prst="rect">
-            <a:avLst/>
-          </a:prstGeom>
-          <a:noFill/>
-        </p:spPr>
-        <p:txBody>
-          <a:bodyPr wrap="none" lIns="0" rIns="0" tIns="0" bIns="0">
-            <a:spAutoFit/>
-          </a:bodyPr>
-          <a:lstStyle/>
-          <a:p>
-            <a:pPr algn="r"/>
-            <a:r>
-              <a:rPr sz="825" b="1">
-                <a:solidFill>
-                  <a:srgbClr val="444444"/>
-                </a:solidFill>
-                <a:latin typeface="Malgun Gothic"/>
-              </a:rPr>
-              <a:t>Total</a:t>
-            </a:r>
-          </a:p>
-        </p:txBody>
-      </p:sp>
-      <p:sp>
-        <p:nvSpPr>
-          <p:cNvPr id="18" name="Rectangle 17"/>
+            <a:off x="837990" y="2742514"/>
+            <a:ext cx="5027942" cy="514221"/>
+          </a:xfrm>
+          <a:prstGeom prst="rect">
+            <a:avLst/>
+          </a:prstGeom>
+          <a:noFill/>
+        </p:spPr>
+        <p:txBody>
+          <a:bodyPr wrap="none" lIns="0" tIns="0" rIns="0" bIns="0">
+            <a:spAutoFit/>
+          </a:bodyPr>
+          <a:lstStyle/>
+          <a:p>
+            <a:pPr algn="l"/>
+            <a:r>
+              <a:rPr sz="3000" b="1" dirty="0">
+                <a:solidFill>
+                  <a:srgbClr val="FFFFFF"/>
+                </a:solidFill>
+                <a:latin typeface="Malgun Gothic"/>
+              </a:rPr>
+              <a:t>₩95M</a:t>
+            </a:r>
+          </a:p>
+        </p:txBody>
+      </p:sp>
+      <p:sp>
+        <p:nvSpPr>
+          <p:cNvPr id="16" name="Rectangle 15"/>
           <p:cNvSpPr/>
           <p:nvPr/>
         </p:nvSpPr>
         <p:spPr>
           <a:xfrm>
-            <a:off x="837990" y="2666333"/>
+            <a:off x="837990" y="3694776"/>
             <a:ext cx="5027942" cy="9522"/>
           </a:xfrm>
           <a:prstGeom prst="rect">
@@ -5035,27 +5765,28 @@
           <a:lstStyle/>
           <a:p>
             <a:pPr algn="ctr"/>
-          </a:p>
-        </p:txBody>
-      </p:sp>
-      <p:sp>
-        <p:nvSpPr>
-          <p:cNvPr id="19" name="TextBox 18"/>
-          <p:cNvSpPr txBox="1"/>
-          <p:nvPr/>
-        </p:nvSpPr>
-        <p:spPr>
-          <a:xfrm>
-            <a:off x="837990" y="2780604"/>
-            <a:ext cx="1523619" cy="247588"/>
-          </a:xfrm>
-          <a:prstGeom prst="rect">
-            <a:avLst/>
-          </a:prstGeom>
-          <a:noFill/>
-        </p:spPr>
-        <p:txBody>
-          <a:bodyPr wrap="none" lIns="0" rIns="0" tIns="0" bIns="0">
+            <a:endParaRPr/>
+          </a:p>
+        </p:txBody>
+      </p:sp>
+      <p:sp>
+        <p:nvSpPr>
+          <p:cNvPr id="17" name="TextBox 16"/>
+          <p:cNvSpPr txBox="1"/>
+          <p:nvPr/>
+        </p:nvSpPr>
+        <p:spPr>
+          <a:xfrm>
+            <a:off x="837990" y="3790002"/>
+            <a:ext cx="5027942" cy="228542"/>
+          </a:xfrm>
+          <a:prstGeom prst="rect">
+            <a:avLst/>
+          </a:prstGeom>
+          <a:noFill/>
+        </p:spPr>
+        <p:txBody>
+          <a:bodyPr wrap="none" lIns="0" tIns="0" rIns="0" bIns="0">
             <a:spAutoFit/>
           </a:bodyPr>
           <a:lstStyle/>
@@ -5064,129 +5795,59 @@
             <a:r>
               <a:rPr sz="1200" b="1">
                 <a:solidFill>
+                  <a:srgbClr val="666666"/>
+                </a:solidFill>
+                <a:latin typeface="Malgun Gothic"/>
+              </a:rPr>
+              <a:t>US</a:t>
+            </a:r>
+          </a:p>
+        </p:txBody>
+      </p:sp>
+      <p:sp>
+        <p:nvSpPr>
+          <p:cNvPr id="18" name="TextBox 17"/>
+          <p:cNvSpPr txBox="1"/>
+          <p:nvPr/>
+        </p:nvSpPr>
+        <p:spPr>
+          <a:xfrm>
+            <a:off x="837990" y="4056635"/>
+            <a:ext cx="5027942" cy="514221"/>
+          </a:xfrm>
+          <a:prstGeom prst="rect">
+            <a:avLst/>
+          </a:prstGeom>
+          <a:noFill/>
+        </p:spPr>
+        <p:txBody>
+          <a:bodyPr wrap="none" lIns="0" tIns="0" rIns="0" bIns="0">
+            <a:spAutoFit/>
+          </a:bodyPr>
+          <a:lstStyle/>
+          <a:p>
+            <a:pPr algn="l"/>
+            <a:r>
+              <a:rPr sz="3000" b="1">
+                <a:solidFill>
                   <a:srgbClr val="FFFFFF"/>
                 </a:solidFill>
                 <a:latin typeface="Malgun Gothic"/>
               </a:rPr>
-              <a:t>KR Content</a:t>
-            </a:r>
-          </a:p>
-        </p:txBody>
-      </p:sp>
-      <p:sp>
-        <p:nvSpPr>
-          <p:cNvPr id="20" name="TextBox 19"/>
-          <p:cNvSpPr txBox="1"/>
-          <p:nvPr/>
-        </p:nvSpPr>
-        <p:spPr>
-          <a:xfrm>
-            <a:off x="2380654" y="2780604"/>
-            <a:ext cx="952261" cy="247588"/>
-          </a:xfrm>
-          <a:prstGeom prst="rect">
-            <a:avLst/>
-          </a:prstGeom>
-          <a:noFill/>
-        </p:spPr>
-        <p:txBody>
-          <a:bodyPr wrap="none" lIns="0" rIns="0" tIns="0" bIns="0">
-            <a:spAutoFit/>
-          </a:bodyPr>
-          <a:lstStyle/>
-          <a:p>
-            <a:pPr algn="r"/>
-            <a:r>
-              <a:rPr sz="1200" b="1">
-                <a:solidFill>
-                  <a:srgbClr val="666666"/>
-                </a:solidFill>
-                <a:latin typeface="Malgun Gothic"/>
-              </a:rPr>
-              <a:t>₩1.6M</a:t>
-            </a:r>
-          </a:p>
-        </p:txBody>
-      </p:sp>
-      <p:sp>
-        <p:nvSpPr>
-          <p:cNvPr id="21" name="TextBox 20"/>
-          <p:cNvSpPr txBox="1"/>
-          <p:nvPr/>
-        </p:nvSpPr>
-        <p:spPr>
-          <a:xfrm>
-            <a:off x="3504323" y="2780604"/>
-            <a:ext cx="952261" cy="247588"/>
-          </a:xfrm>
-          <a:prstGeom prst="rect">
-            <a:avLst/>
-          </a:prstGeom>
-          <a:noFill/>
-        </p:spPr>
-        <p:txBody>
-          <a:bodyPr wrap="none" lIns="0" rIns="0" tIns="0" bIns="0">
-            <a:spAutoFit/>
-          </a:bodyPr>
-          <a:lstStyle/>
-          <a:p>
-            <a:pPr algn="r"/>
-            <a:r>
-              <a:rPr sz="1200" b="1">
-                <a:solidFill>
-                  <a:srgbClr val="FFFFFF"/>
-                </a:solidFill>
-                <a:latin typeface="Malgun Gothic"/>
-              </a:rPr>
-              <a:t>₩13.1M</a:t>
-            </a:r>
-          </a:p>
-        </p:txBody>
-      </p:sp>
-      <p:sp>
-        <p:nvSpPr>
-          <p:cNvPr id="22" name="TextBox 21"/>
-          <p:cNvSpPr txBox="1"/>
-          <p:nvPr/>
-        </p:nvSpPr>
-        <p:spPr>
-          <a:xfrm>
-            <a:off x="4627992" y="2780604"/>
-            <a:ext cx="1085578" cy="247588"/>
-          </a:xfrm>
-          <a:prstGeom prst="rect">
-            <a:avLst/>
-          </a:prstGeom>
-          <a:noFill/>
-        </p:spPr>
-        <p:txBody>
-          <a:bodyPr wrap="none" lIns="0" rIns="0" tIns="0" bIns="0">
-            <a:spAutoFit/>
-          </a:bodyPr>
-          <a:lstStyle/>
-          <a:p>
-            <a:pPr algn="r"/>
-            <a:r>
-              <a:rPr sz="1200" b="1">
-                <a:solidFill>
-                  <a:srgbClr val="E8FF47"/>
-                </a:solidFill>
-                <a:latin typeface="Malgun Gothic"/>
-              </a:rPr>
-              <a:t>₩14.7M</a:t>
-            </a:r>
-          </a:p>
-        </p:txBody>
-      </p:sp>
-      <p:sp>
-        <p:nvSpPr>
-          <p:cNvPr id="23" name="Rectangle 22"/>
+              <a:t>$71K  ·  ₩103M</a:t>
+            </a:r>
+          </a:p>
+        </p:txBody>
+      </p:sp>
+      <p:sp>
+        <p:nvSpPr>
+          <p:cNvPr id="19" name="Rectangle 18"/>
           <p:cNvSpPr/>
           <p:nvPr/>
         </p:nvSpPr>
         <p:spPr>
           <a:xfrm>
-            <a:off x="837990" y="3628117"/>
+            <a:off x="837990" y="5008897"/>
             <a:ext cx="5027942" cy="9522"/>
           </a:xfrm>
           <a:prstGeom prst="rect">
@@ -5218,27 +5879,28 @@
           <a:lstStyle/>
           <a:p>
             <a:pPr algn="ctr"/>
-          </a:p>
-        </p:txBody>
-      </p:sp>
-      <p:sp>
-        <p:nvSpPr>
-          <p:cNvPr id="24" name="TextBox 23"/>
-          <p:cNvSpPr txBox="1"/>
-          <p:nvPr/>
-        </p:nvSpPr>
-        <p:spPr>
-          <a:xfrm>
-            <a:off x="837990" y="3685253"/>
-            <a:ext cx="1523619" cy="247588"/>
-          </a:xfrm>
-          <a:prstGeom prst="rect">
-            <a:avLst/>
-          </a:prstGeom>
-          <a:noFill/>
-        </p:spPr>
-        <p:txBody>
-          <a:bodyPr wrap="none" lIns="0" rIns="0" tIns="0" bIns="0">
+            <a:endParaRPr/>
+          </a:p>
+        </p:txBody>
+      </p:sp>
+      <p:sp>
+        <p:nvSpPr>
+          <p:cNvPr id="20" name="TextBox 19"/>
+          <p:cNvSpPr txBox="1"/>
+          <p:nvPr/>
+        </p:nvSpPr>
+        <p:spPr>
+          <a:xfrm>
+            <a:off x="837990" y="5104123"/>
+            <a:ext cx="5027942" cy="228542"/>
+          </a:xfrm>
+          <a:prstGeom prst="rect">
+            <a:avLst/>
+          </a:prstGeom>
+          <a:noFill/>
+        </p:spPr>
+        <p:txBody>
+          <a:bodyPr wrap="none" lIns="0" tIns="0" rIns="0" bIns="0">
             <a:spAutoFit/>
           </a:bodyPr>
           <a:lstStyle/>
@@ -5247,130 +5909,139 @@
             <a:r>
               <a:rPr sz="1200" b="1">
                 <a:solidFill>
+                  <a:srgbClr val="666666"/>
+                </a:solidFill>
+                <a:latin typeface="Malgun Gothic"/>
+              </a:rPr>
+              <a:t>Vietnam</a:t>
+            </a:r>
+          </a:p>
+        </p:txBody>
+      </p:sp>
+      <p:sp>
+        <p:nvSpPr>
+          <p:cNvPr id="21" name="TextBox 20"/>
+          <p:cNvSpPr txBox="1"/>
+          <p:nvPr/>
+        </p:nvSpPr>
+        <p:spPr>
+          <a:xfrm>
+            <a:off x="837990" y="5370756"/>
+            <a:ext cx="5027942" cy="514221"/>
+          </a:xfrm>
+          <a:prstGeom prst="rect">
+            <a:avLst/>
+          </a:prstGeom>
+          <a:noFill/>
+        </p:spPr>
+        <p:txBody>
+          <a:bodyPr wrap="none" lIns="0" tIns="0" rIns="0" bIns="0">
+            <a:spAutoFit/>
+          </a:bodyPr>
+          <a:lstStyle/>
+          <a:p>
+            <a:pPr algn="l"/>
+            <a:r>
+              <a:rPr sz="3000" b="1">
+                <a:solidFill>
                   <a:srgbClr val="FFFFFF"/>
                 </a:solidFill>
                 <a:latin typeface="Malgun Gothic"/>
               </a:rPr>
-              <a:t>KR Planet</a:t>
-            </a:r>
-          </a:p>
-        </p:txBody>
-      </p:sp>
-      <p:sp>
-        <p:nvSpPr>
-          <p:cNvPr id="25" name="TextBox 24"/>
-          <p:cNvSpPr txBox="1"/>
-          <p:nvPr/>
-        </p:nvSpPr>
-        <p:spPr>
-          <a:xfrm>
-            <a:off x="2380654" y="3685253"/>
-            <a:ext cx="952261" cy="247588"/>
-          </a:xfrm>
-          <a:prstGeom prst="rect">
-            <a:avLst/>
-          </a:prstGeom>
-          <a:noFill/>
-        </p:spPr>
-        <p:txBody>
-          <a:bodyPr wrap="none" lIns="0" rIns="0" tIns="0" bIns="0">
-            <a:spAutoFit/>
-          </a:bodyPr>
-          <a:lstStyle/>
-          <a:p>
-            <a:pPr algn="r"/>
-            <a:r>
-              <a:rPr sz="1200" b="1">
-                <a:solidFill>
-                  <a:srgbClr val="666666"/>
-                </a:solidFill>
-                <a:latin typeface="Malgun Gothic"/>
-              </a:rPr>
-              <a:t>₩6.5M</a:t>
-            </a:r>
-          </a:p>
-        </p:txBody>
-      </p:sp>
-      <p:sp>
-        <p:nvSpPr>
-          <p:cNvPr id="26" name="TextBox 25"/>
-          <p:cNvSpPr txBox="1"/>
-          <p:nvPr/>
-        </p:nvSpPr>
-        <p:spPr>
-          <a:xfrm>
-            <a:off x="3504323" y="3685253"/>
-            <a:ext cx="952261" cy="247588"/>
-          </a:xfrm>
-          <a:prstGeom prst="rect">
-            <a:avLst/>
-          </a:prstGeom>
-          <a:noFill/>
-        </p:spPr>
-        <p:txBody>
-          <a:bodyPr wrap="none" lIns="0" rIns="0" tIns="0" bIns="0">
-            <a:spAutoFit/>
-          </a:bodyPr>
-          <a:lstStyle/>
-          <a:p>
-            <a:pPr algn="r"/>
-            <a:r>
-              <a:rPr sz="1200" b="1">
-                <a:solidFill>
-                  <a:srgbClr val="FFFFFF"/>
-                </a:solidFill>
-                <a:latin typeface="Malgun Gothic"/>
-              </a:rPr>
-              <a:t>₩5.0M</a:t>
-            </a:r>
-          </a:p>
-        </p:txBody>
-      </p:sp>
-      <p:sp>
-        <p:nvSpPr>
-          <p:cNvPr id="27" name="TextBox 26"/>
-          <p:cNvSpPr txBox="1"/>
-          <p:nvPr/>
-        </p:nvSpPr>
-        <p:spPr>
-          <a:xfrm>
-            <a:off x="4627992" y="3685253"/>
-            <a:ext cx="1085578" cy="247588"/>
-          </a:xfrm>
-          <a:prstGeom prst="rect">
-            <a:avLst/>
-          </a:prstGeom>
-          <a:noFill/>
-        </p:spPr>
-        <p:txBody>
-          <a:bodyPr wrap="none" lIns="0" rIns="0" tIns="0" bIns="0">
-            <a:spAutoFit/>
-          </a:bodyPr>
-          <a:lstStyle/>
-          <a:p>
-            <a:pPr algn="r"/>
-            <a:r>
-              <a:rPr sz="1200" b="1">
-                <a:solidFill>
-                  <a:srgbClr val="E8FF47"/>
-                </a:solidFill>
-                <a:latin typeface="Malgun Gothic"/>
-              </a:rPr>
-              <a:t>₩11.5M</a:t>
-            </a:r>
-          </a:p>
-        </p:txBody>
-      </p:sp>
-      <p:sp>
-        <p:nvSpPr>
-          <p:cNvPr id="28" name="Rectangle 27"/>
+              <a:t>₩12M</a:t>
+            </a:r>
+          </a:p>
+        </p:txBody>
+      </p:sp>
+      <p:sp>
+        <p:nvSpPr>
+          <p:cNvPr id="22" name="Rectangle 21"/>
           <p:cNvSpPr/>
           <p:nvPr/>
         </p:nvSpPr>
         <p:spPr>
           <a:xfrm>
-            <a:off x="837990" y="4532766"/>
-            <a:ext cx="5027942" cy="9522"/>
+            <a:off x="6170656" y="1999749"/>
+            <a:ext cx="5332666" cy="4342314"/>
+          </a:xfrm>
+          <a:prstGeom prst="rect">
+            <a:avLst/>
+          </a:prstGeom>
+          <a:solidFill>
+            <a:srgbClr val="141414"/>
+          </a:solidFill>
+          <a:ln>
+            <a:noFill/>
+          </a:ln>
+        </p:spPr>
+        <p:style>
+          <a:lnRef idx="1">
+            <a:schemeClr val="accent1"/>
+          </a:lnRef>
+          <a:fillRef idx="3">
+            <a:schemeClr val="accent1"/>
+          </a:fillRef>
+          <a:effectRef idx="2">
+            <a:schemeClr val="accent1"/>
+          </a:effectRef>
+          <a:fontRef idx="minor">
+            <a:schemeClr val="lt1"/>
+          </a:fontRef>
+        </p:style>
+        <p:txBody>
+          <a:bodyPr rtlCol="0" anchor="ctr"/>
+          <a:lstStyle/>
+          <a:p>
+            <a:pPr algn="ctr"/>
+            <a:endParaRPr/>
+          </a:p>
+        </p:txBody>
+      </p:sp>
+      <p:sp>
+        <p:nvSpPr>
+          <p:cNvPr id="23" name="TextBox 22"/>
+          <p:cNvSpPr txBox="1"/>
+          <p:nvPr/>
+        </p:nvSpPr>
+        <p:spPr>
+          <a:xfrm>
+            <a:off x="6303973" y="2133066"/>
+            <a:ext cx="5066033" cy="171407"/>
+          </a:xfrm>
+          <a:prstGeom prst="rect">
+            <a:avLst/>
+          </a:prstGeom>
+          <a:noFill/>
+        </p:spPr>
+        <p:txBody>
+          <a:bodyPr wrap="none" lIns="0" tIns="0" rIns="0" bIns="0">
+            <a:spAutoFit/>
+          </a:bodyPr>
+          <a:lstStyle/>
+          <a:p>
+            <a:pPr algn="l"/>
+            <a:r>
+              <a:rPr sz="750" b="1">
+                <a:solidFill>
+                  <a:srgbClr val="444444"/>
+                </a:solidFill>
+                <a:latin typeface="Malgun Gothic"/>
+              </a:rPr>
+              <a:t>NET CHANGE  JAN → FEB</a:t>
+            </a:r>
+          </a:p>
+        </p:txBody>
+      </p:sp>
+      <p:sp>
+        <p:nvSpPr>
+          <p:cNvPr id="24" name="Rectangle 23"/>
+          <p:cNvSpPr/>
+          <p:nvPr/>
+        </p:nvSpPr>
+        <p:spPr>
+          <a:xfrm>
+            <a:off x="6303973" y="2342564"/>
+            <a:ext cx="5066033" cy="9522"/>
           </a:xfrm>
           <a:prstGeom prst="rect">
             <a:avLst/>
@@ -5401,6 +6072,171 @@
           <a:lstStyle/>
           <a:p>
             <a:pPr algn="ctr"/>
+            <a:endParaRPr/>
+          </a:p>
+        </p:txBody>
+      </p:sp>
+      <p:sp>
+        <p:nvSpPr>
+          <p:cNvPr id="25" name="TextBox 24"/>
+          <p:cNvSpPr txBox="1"/>
+          <p:nvPr/>
+        </p:nvSpPr>
+        <p:spPr>
+          <a:xfrm>
+            <a:off x="6323018" y="2761559"/>
+            <a:ext cx="1904523" cy="228542"/>
+          </a:xfrm>
+          <a:prstGeom prst="rect">
+            <a:avLst/>
+          </a:prstGeom>
+          <a:noFill/>
+        </p:spPr>
+        <p:txBody>
+          <a:bodyPr wrap="none" lIns="0" tIns="0" rIns="0" bIns="0">
+            <a:spAutoFit/>
+          </a:bodyPr>
+          <a:lstStyle/>
+          <a:p>
+            <a:pPr algn="l"/>
+            <a:r>
+              <a:rPr sz="1200" b="1">
+                <a:solidFill>
+                  <a:srgbClr val="666666"/>
+                </a:solidFill>
+                <a:latin typeface="Malgun Gothic"/>
+              </a:rPr>
+              <a:t>Korea</a:t>
+            </a:r>
+          </a:p>
+        </p:txBody>
+      </p:sp>
+      <p:sp>
+        <p:nvSpPr>
+          <p:cNvPr id="26" name="TextBox 25"/>
+          <p:cNvSpPr txBox="1"/>
+          <p:nvPr/>
+        </p:nvSpPr>
+        <p:spPr>
+          <a:xfrm>
+            <a:off x="10201607" y="2666333"/>
+            <a:ext cx="1149354" cy="369332"/>
+          </a:xfrm>
+          <a:prstGeom prst="rect">
+            <a:avLst/>
+          </a:prstGeom>
+          <a:noFill/>
+        </p:spPr>
+        <p:txBody>
+          <a:bodyPr wrap="none" lIns="0" tIns="0" rIns="0" bIns="0">
+            <a:spAutoFit/>
+          </a:bodyPr>
+          <a:lstStyle/>
+          <a:p>
+            <a:pPr algn="r"/>
+            <a:r>
+              <a:rPr sz="2400" b="1" dirty="0">
+                <a:solidFill>
+                  <a:srgbClr val="FF2D55"/>
+                </a:solidFill>
+                <a:latin typeface="Malgun Gothic"/>
+              </a:rPr>
+              <a:t>▼ </a:t>
+            </a:r>
+            <a:r>
+              <a:rPr lang="en-US" sz="2400" b="1" dirty="0">
+                <a:solidFill>
+                  <a:srgbClr val="FF2D55"/>
+                </a:solidFill>
+                <a:latin typeface="Malgun Gothic"/>
+              </a:rPr>
+              <a:t>$39K</a:t>
+            </a:r>
+            <a:endParaRPr sz="2400" b="1" dirty="0">
+              <a:solidFill>
+                <a:srgbClr val="FF2D55"/>
+              </a:solidFill>
+              <a:latin typeface="Malgun Gothic"/>
+            </a:endParaRPr>
+          </a:p>
+        </p:txBody>
+      </p:sp>
+      <p:sp>
+        <p:nvSpPr>
+          <p:cNvPr id="27" name="Rectangle 26"/>
+          <p:cNvSpPr/>
+          <p:nvPr/>
+        </p:nvSpPr>
+        <p:spPr>
+          <a:xfrm>
+            <a:off x="6323018" y="3371007"/>
+            <a:ext cx="5027942" cy="9522"/>
+          </a:xfrm>
+          <a:prstGeom prst="rect">
+            <a:avLst/>
+          </a:prstGeom>
+          <a:solidFill>
+            <a:srgbClr val="282828"/>
+          </a:solidFill>
+          <a:ln>
+            <a:noFill/>
+          </a:ln>
+        </p:spPr>
+        <p:style>
+          <a:lnRef idx="1">
+            <a:schemeClr val="accent1"/>
+          </a:lnRef>
+          <a:fillRef idx="3">
+            <a:schemeClr val="accent1"/>
+          </a:fillRef>
+          <a:effectRef idx="2">
+            <a:schemeClr val="accent1"/>
+          </a:effectRef>
+          <a:fontRef idx="minor">
+            <a:schemeClr val="lt1"/>
+          </a:fontRef>
+        </p:style>
+        <p:txBody>
+          <a:bodyPr rtlCol="0" anchor="ctr"/>
+          <a:lstStyle/>
+          <a:p>
+            <a:pPr algn="ctr"/>
+            <a:endParaRPr/>
+          </a:p>
+        </p:txBody>
+      </p:sp>
+      <p:sp>
+        <p:nvSpPr>
+          <p:cNvPr id="28" name="TextBox 27"/>
+          <p:cNvSpPr txBox="1"/>
+          <p:nvPr/>
+        </p:nvSpPr>
+        <p:spPr>
+          <a:xfrm>
+            <a:off x="6323018" y="3751911"/>
+            <a:ext cx="1904523" cy="228542"/>
+          </a:xfrm>
+          <a:prstGeom prst="rect">
+            <a:avLst/>
+          </a:prstGeom>
+          <a:noFill/>
+        </p:spPr>
+        <p:txBody>
+          <a:bodyPr wrap="none" lIns="0" tIns="0" rIns="0" bIns="0">
+            <a:spAutoFit/>
+          </a:bodyPr>
+          <a:lstStyle/>
+          <a:p>
+            <a:pPr algn="l"/>
+            <a:r>
+              <a:rPr sz="1200" b="1">
+                <a:solidFill>
+                  <a:srgbClr val="666666"/>
+                </a:solidFill>
+                <a:latin typeface="Malgun Gothic"/>
+              </a:rPr>
+              <a:t>US</a:t>
+            </a:r>
           </a:p>
         </p:txBody>
       </p:sp>
@@ -5412,16 +6248,110 @@
         </p:nvSpPr>
         <p:spPr>
           <a:xfrm>
-            <a:off x="837990" y="4589902"/>
-            <a:ext cx="1523619" cy="247588"/>
-          </a:xfrm>
-          <a:prstGeom prst="rect">
-            <a:avLst/>
-          </a:prstGeom>
-          <a:noFill/>
-        </p:spPr>
-        <p:txBody>
-          <a:bodyPr wrap="none" lIns="0" rIns="0" tIns="0" bIns="0">
+            <a:off x="10201607" y="3656685"/>
+            <a:ext cx="1149354" cy="369332"/>
+          </a:xfrm>
+          <a:prstGeom prst="rect">
+            <a:avLst/>
+          </a:prstGeom>
+          <a:noFill/>
+        </p:spPr>
+        <p:txBody>
+          <a:bodyPr wrap="none" lIns="0" tIns="0" rIns="0" bIns="0">
+            <a:spAutoFit/>
+          </a:bodyPr>
+          <a:lstStyle/>
+          <a:p>
+            <a:pPr algn="r"/>
+            <a:r>
+              <a:rPr sz="2400" b="1" dirty="0">
+                <a:solidFill>
+                  <a:srgbClr val="FF2D55"/>
+                </a:solidFill>
+                <a:latin typeface="Malgun Gothic"/>
+              </a:rPr>
+              <a:t>▼ </a:t>
+            </a:r>
+            <a:r>
+              <a:rPr lang="en-US" sz="2400" b="1" dirty="0">
+                <a:solidFill>
+                  <a:srgbClr val="FF2D55"/>
+                </a:solidFill>
+                <a:latin typeface="Malgun Gothic"/>
+              </a:rPr>
+              <a:t>$78K</a:t>
+            </a:r>
+            <a:endParaRPr sz="2400" b="1" dirty="0">
+              <a:solidFill>
+                <a:srgbClr val="FF2D55"/>
+              </a:solidFill>
+              <a:latin typeface="Malgun Gothic"/>
+            </a:endParaRPr>
+          </a:p>
+        </p:txBody>
+      </p:sp>
+      <p:sp>
+        <p:nvSpPr>
+          <p:cNvPr id="30" name="Rectangle 29"/>
+          <p:cNvSpPr/>
+          <p:nvPr/>
+        </p:nvSpPr>
+        <p:spPr>
+          <a:xfrm>
+            <a:off x="6323018" y="4361359"/>
+            <a:ext cx="5027942" cy="9522"/>
+          </a:xfrm>
+          <a:prstGeom prst="rect">
+            <a:avLst/>
+          </a:prstGeom>
+          <a:solidFill>
+            <a:srgbClr val="282828"/>
+          </a:solidFill>
+          <a:ln>
+            <a:noFill/>
+          </a:ln>
+        </p:spPr>
+        <p:style>
+          <a:lnRef idx="1">
+            <a:schemeClr val="accent1"/>
+          </a:lnRef>
+          <a:fillRef idx="3">
+            <a:schemeClr val="accent1"/>
+          </a:fillRef>
+          <a:effectRef idx="2">
+            <a:schemeClr val="accent1"/>
+          </a:effectRef>
+          <a:fontRef idx="minor">
+            <a:schemeClr val="lt1"/>
+          </a:fontRef>
+        </p:style>
+        <p:txBody>
+          <a:bodyPr rtlCol="0" anchor="ctr"/>
+          <a:lstStyle/>
+          <a:p>
+            <a:pPr algn="ctr"/>
+            <a:endParaRPr/>
+          </a:p>
+        </p:txBody>
+      </p:sp>
+      <p:sp>
+        <p:nvSpPr>
+          <p:cNvPr id="31" name="TextBox 30"/>
+          <p:cNvSpPr txBox="1"/>
+          <p:nvPr/>
+        </p:nvSpPr>
+        <p:spPr>
+          <a:xfrm>
+            <a:off x="6323018" y="4742264"/>
+            <a:ext cx="1904523" cy="228542"/>
+          </a:xfrm>
+          <a:prstGeom prst="rect">
+            <a:avLst/>
+          </a:prstGeom>
+          <a:noFill/>
+        </p:spPr>
+        <p:txBody>
+          <a:bodyPr wrap="none" lIns="0" tIns="0" rIns="0" bIns="0">
             <a:spAutoFit/>
           </a:bodyPr>
           <a:lstStyle/>
@@ -5430,117 +6360,62 @@
             <a:r>
               <a:rPr sz="1200" b="1">
                 <a:solidFill>
-                  <a:srgbClr val="FFFFFF"/>
-                </a:solidFill>
-                <a:latin typeface="Malgun Gothic"/>
-              </a:rPr>
-              <a:t>GL Global</a:t>
-            </a:r>
-          </a:p>
-        </p:txBody>
-      </p:sp>
-      <p:sp>
-        <p:nvSpPr>
-          <p:cNvPr id="30" name="TextBox 29"/>
-          <p:cNvSpPr txBox="1"/>
-          <p:nvPr/>
-        </p:nvSpPr>
-        <p:spPr>
-          <a:xfrm>
-            <a:off x="2380654" y="4589902"/>
-            <a:ext cx="952261" cy="247588"/>
-          </a:xfrm>
-          <a:prstGeom prst="rect">
-            <a:avLst/>
-          </a:prstGeom>
-          <a:noFill/>
-        </p:spPr>
-        <p:txBody>
-          <a:bodyPr wrap="none" lIns="0" rIns="0" tIns="0" bIns="0">
+                  <a:srgbClr val="666666"/>
+                </a:solidFill>
+                <a:latin typeface="Malgun Gothic"/>
+              </a:rPr>
+              <a:t>Vietnam</a:t>
+            </a:r>
+          </a:p>
+        </p:txBody>
+      </p:sp>
+      <p:sp>
+        <p:nvSpPr>
+          <p:cNvPr id="32" name="TextBox 31"/>
+          <p:cNvSpPr txBox="1"/>
+          <p:nvPr/>
+        </p:nvSpPr>
+        <p:spPr>
+          <a:xfrm>
+            <a:off x="10201607" y="4647037"/>
+            <a:ext cx="1149354" cy="369332"/>
+          </a:xfrm>
+          <a:prstGeom prst="rect">
+            <a:avLst/>
+          </a:prstGeom>
+          <a:noFill/>
+        </p:spPr>
+        <p:txBody>
+          <a:bodyPr wrap="none" lIns="0" tIns="0" rIns="0" bIns="0">
             <a:spAutoFit/>
           </a:bodyPr>
           <a:lstStyle/>
           <a:p>
             <a:pPr algn="r"/>
             <a:r>
-              <a:rPr sz="1200" b="1">
-                <a:solidFill>
-                  <a:srgbClr val="666666"/>
-                </a:solidFill>
-                <a:latin typeface="Malgun Gothic"/>
-              </a:rPr>
-              <a:t>₩320.7M</a:t>
-            </a:r>
-          </a:p>
-        </p:txBody>
-      </p:sp>
-      <p:sp>
-        <p:nvSpPr>
-          <p:cNvPr id="31" name="TextBox 30"/>
-          <p:cNvSpPr txBox="1"/>
-          <p:nvPr/>
-        </p:nvSpPr>
-        <p:spPr>
-          <a:xfrm>
-            <a:off x="3504323" y="4589902"/>
-            <a:ext cx="952261" cy="247588"/>
-          </a:xfrm>
-          <a:prstGeom prst="rect">
-            <a:avLst/>
-          </a:prstGeom>
-          <a:noFill/>
-        </p:spPr>
-        <p:txBody>
-          <a:bodyPr wrap="none" lIns="0" rIns="0" tIns="0" bIns="0">
-            <a:spAutoFit/>
-          </a:bodyPr>
-          <a:lstStyle/>
-          <a:p>
-            <a:pPr algn="r"/>
-            <a:r>
-              <a:rPr sz="1200" b="1">
-                <a:solidFill>
-                  <a:srgbClr val="FFFFFF"/>
-                </a:solidFill>
-                <a:latin typeface="Malgun Gothic"/>
-              </a:rPr>
-              <a:t>₩85.2M</a:t>
-            </a:r>
-          </a:p>
-        </p:txBody>
-      </p:sp>
-      <p:sp>
-        <p:nvSpPr>
-          <p:cNvPr id="32" name="TextBox 31"/>
-          <p:cNvSpPr txBox="1"/>
-          <p:nvPr/>
-        </p:nvSpPr>
-        <p:spPr>
-          <a:xfrm>
-            <a:off x="4627992" y="4589902"/>
-            <a:ext cx="1085578" cy="247588"/>
-          </a:xfrm>
-          <a:prstGeom prst="rect">
-            <a:avLst/>
-          </a:prstGeom>
-          <a:noFill/>
-        </p:spPr>
-        <p:txBody>
-          <a:bodyPr wrap="none" lIns="0" rIns="0" tIns="0" bIns="0">
-            <a:spAutoFit/>
-          </a:bodyPr>
-          <a:lstStyle/>
-          <a:p>
-            <a:pPr algn="r"/>
-            <a:r>
-              <a:rPr sz="1200" b="1">
-                <a:solidFill>
-                  <a:srgbClr val="E8FF47"/>
-                </a:solidFill>
-                <a:latin typeface="Malgun Gothic"/>
-              </a:rPr>
-              <a:t>₩405.9M</a:t>
-            </a:r>
+              <a:rPr sz="2400" b="1" dirty="0">
+                <a:solidFill>
+                  <a:srgbClr val="FF2D55"/>
+                </a:solidFill>
+                <a:latin typeface="Malgun Gothic"/>
+              </a:rPr>
+              <a:t>▼ </a:t>
+            </a:r>
+            <a:r>
+              <a:rPr lang="en-US" sz="2400" b="1" dirty="0">
+                <a:solidFill>
+                  <a:srgbClr val="FF2D55"/>
+                </a:solidFill>
+                <a:latin typeface="Malgun Gothic"/>
+              </a:rPr>
+              <a:t>$11K</a:t>
+            </a:r>
+            <a:endParaRPr sz="2400" b="1" dirty="0">
+              <a:solidFill>
+                <a:srgbClr val="FF2D55"/>
+              </a:solidFill>
+              <a:latin typeface="Malgun Gothic"/>
+            </a:endParaRPr>
           </a:p>
         </p:txBody>
       </p:sp>
@@ -5552,7 +6427,7 @@
         </p:nvSpPr>
         <p:spPr>
           <a:xfrm>
-            <a:off x="837990" y="5437415"/>
+            <a:off x="6323018" y="5351711"/>
             <a:ext cx="5027942" cy="9522"/>
           </a:xfrm>
           <a:prstGeom prst="rect">
@@ -5584,6 +6459,7 @@
           <a:lstStyle/>
           <a:p>
             <a:pPr algn="ctr"/>
+            <a:endParaRPr/>
           </a:p>
         </p:txBody>
       </p:sp>
@@ -5595,23 +6471,23 @@
         </p:nvSpPr>
         <p:spPr>
           <a:xfrm>
-            <a:off x="837990" y="5513596"/>
-            <a:ext cx="1523619" cy="266633"/>
-          </a:xfrm>
-          <a:prstGeom prst="rect">
-            <a:avLst/>
-          </a:prstGeom>
-          <a:noFill/>
-        </p:spPr>
-        <p:txBody>
-          <a:bodyPr wrap="none" lIns="0" rIns="0" tIns="0" bIns="0">
+            <a:off x="6323018" y="5732616"/>
+            <a:ext cx="1904523" cy="228542"/>
+          </a:xfrm>
+          <a:prstGeom prst="rect">
+            <a:avLst/>
+          </a:prstGeom>
+          <a:noFill/>
+        </p:spPr>
+        <p:txBody>
+          <a:bodyPr wrap="none" lIns="0" tIns="0" rIns="0" bIns="0">
             <a:spAutoFit/>
           </a:bodyPr>
           <a:lstStyle/>
           <a:p>
             <a:pPr algn="l"/>
             <a:r>
-              <a:rPr sz="1350" b="1">
+              <a:rPr sz="1200" b="1">
                 <a:solidFill>
                   <a:srgbClr val="FFFFFF"/>
                 </a:solidFill>
@@ -5630,735 +6506,45 @@
         </p:nvSpPr>
         <p:spPr>
           <a:xfrm>
-            <a:off x="2380654" y="5513596"/>
-            <a:ext cx="952261" cy="266633"/>
-          </a:xfrm>
-          <a:prstGeom prst="rect">
-            <a:avLst/>
-          </a:prstGeom>
-          <a:noFill/>
-        </p:spPr>
-        <p:txBody>
-          <a:bodyPr wrap="none" lIns="0" rIns="0" tIns="0" bIns="0">
+            <a:off x="10023675" y="5637390"/>
+            <a:ext cx="1327286" cy="369332"/>
+          </a:xfrm>
+          <a:prstGeom prst="rect">
+            <a:avLst/>
+          </a:prstGeom>
+          <a:noFill/>
+        </p:spPr>
+        <p:txBody>
+          <a:bodyPr wrap="none" lIns="0" tIns="0" rIns="0" bIns="0">
             <a:spAutoFit/>
           </a:bodyPr>
           <a:lstStyle/>
           <a:p>
             <a:pPr algn="r"/>
             <a:r>
-              <a:rPr sz="1350" b="1">
-                <a:solidFill>
-                  <a:srgbClr val="FFFFFF"/>
-                </a:solidFill>
-                <a:latin typeface="Malgun Gothic"/>
-              </a:rPr>
-              <a:t>₩328.9M</a:t>
-            </a:r>
-          </a:p>
-        </p:txBody>
-      </p:sp>
-      <p:sp>
-        <p:nvSpPr>
-          <p:cNvPr id="36" name="TextBox 35"/>
-          <p:cNvSpPr txBox="1"/>
-          <p:nvPr/>
-        </p:nvSpPr>
-        <p:spPr>
-          <a:xfrm>
-            <a:off x="3504323" y="5513596"/>
-            <a:ext cx="952261" cy="266633"/>
-          </a:xfrm>
-          <a:prstGeom prst="rect">
-            <a:avLst/>
-          </a:prstGeom>
-          <a:noFill/>
-        </p:spPr>
-        <p:txBody>
-          <a:bodyPr wrap="none" lIns="0" rIns="0" tIns="0" bIns="0">
-            <a:spAutoFit/>
-          </a:bodyPr>
-          <a:lstStyle/>
-          <a:p>
-            <a:pPr algn="r"/>
-            <a:r>
-              <a:rPr sz="1350" b="1">
-                <a:solidFill>
-                  <a:srgbClr val="FFFFFF"/>
-                </a:solidFill>
-                <a:latin typeface="Malgun Gothic"/>
-              </a:rPr>
-              <a:t>₩103.3M</a:t>
-            </a:r>
-          </a:p>
-        </p:txBody>
-      </p:sp>
-      <p:sp>
-        <p:nvSpPr>
-          <p:cNvPr id="37" name="TextBox 36"/>
-          <p:cNvSpPr txBox="1"/>
-          <p:nvPr/>
-        </p:nvSpPr>
-        <p:spPr>
-          <a:xfrm>
-            <a:off x="4627992" y="5513596"/>
-            <a:ext cx="1085578" cy="266633"/>
-          </a:xfrm>
-          <a:prstGeom prst="rect">
-            <a:avLst/>
-          </a:prstGeom>
-          <a:noFill/>
-        </p:spPr>
-        <p:txBody>
-          <a:bodyPr wrap="none" lIns="0" rIns="0" tIns="0" bIns="0">
-            <a:spAutoFit/>
-          </a:bodyPr>
-          <a:lstStyle/>
-          <a:p>
-            <a:pPr algn="r"/>
-            <a:r>
-              <a:rPr sz="1350" b="1">
-                <a:solidFill>
-                  <a:srgbClr val="E8FF47"/>
-                </a:solidFill>
-                <a:latin typeface="Malgun Gothic"/>
-              </a:rPr>
-              <a:t>₩432.2M</a:t>
-            </a:r>
-          </a:p>
-        </p:txBody>
-      </p:sp>
-      <p:sp>
-        <p:nvSpPr>
-          <p:cNvPr id="38" name="Rectangle 37"/>
-          <p:cNvSpPr/>
-          <p:nvPr/>
-        </p:nvSpPr>
-        <p:spPr>
-          <a:xfrm>
-            <a:off x="6170656" y="1999749"/>
-            <a:ext cx="5332666" cy="4342314"/>
-          </a:xfrm>
-          <a:prstGeom prst="rect">
-            <a:avLst/>
-          </a:prstGeom>
-          <a:solidFill>
-            <a:srgbClr val="141414"/>
-          </a:solidFill>
-          <a:ln>
-            <a:noFill/>
-          </a:ln>
-        </p:spPr>
-        <p:style>
-          <a:lnRef idx="1">
-            <a:schemeClr val="accent1"/>
-          </a:lnRef>
-          <a:fillRef idx="3">
-            <a:schemeClr val="accent1"/>
-          </a:fillRef>
-          <a:effectRef idx="2">
-            <a:schemeClr val="accent1"/>
-          </a:effectRef>
-          <a:fontRef idx="minor">
-            <a:schemeClr val="lt1"/>
-          </a:fontRef>
-        </p:style>
-        <p:txBody>
-          <a:bodyPr rtlCol="0" anchor="ctr"/>
-          <a:lstStyle/>
-          <a:p>
-            <a:pPr algn="ctr"/>
-          </a:p>
-        </p:txBody>
-      </p:sp>
-      <p:sp>
-        <p:nvSpPr>
-          <p:cNvPr id="39" name="TextBox 38"/>
-          <p:cNvSpPr txBox="1"/>
-          <p:nvPr/>
-        </p:nvSpPr>
-        <p:spPr>
-          <a:xfrm>
-            <a:off x="6303973" y="2133066"/>
-            <a:ext cx="5066033" cy="171407"/>
-          </a:xfrm>
-          <a:prstGeom prst="rect">
-            <a:avLst/>
-          </a:prstGeom>
-          <a:noFill/>
-        </p:spPr>
-        <p:txBody>
-          <a:bodyPr wrap="none" lIns="0" rIns="0" tIns="0" bIns="0">
-            <a:spAutoFit/>
-          </a:bodyPr>
-          <a:lstStyle/>
-          <a:p>
-            <a:pPr algn="l"/>
-            <a:r>
-              <a:rPr sz="750" b="1">
-                <a:solidFill>
-                  <a:srgbClr val="444444"/>
-                </a:solidFill>
-                <a:latin typeface="Malgun Gothic"/>
-              </a:rPr>
-              <a:t>YOY  2025 vs 2026 (Same BU)</a:t>
-            </a:r>
-          </a:p>
-        </p:txBody>
-      </p:sp>
-      <p:sp>
-        <p:nvSpPr>
-          <p:cNvPr id="40" name="Rectangle 39"/>
-          <p:cNvSpPr/>
-          <p:nvPr/>
-        </p:nvSpPr>
-        <p:spPr>
-          <a:xfrm>
-            <a:off x="6303973" y="2342564"/>
-            <a:ext cx="5066033" cy="9522"/>
-          </a:xfrm>
-          <a:prstGeom prst="rect">
-            <a:avLst/>
-          </a:prstGeom>
-          <a:solidFill>
-            <a:srgbClr val="282828"/>
-          </a:solidFill>
-          <a:ln>
-            <a:noFill/>
-          </a:ln>
-        </p:spPr>
-        <p:style>
-          <a:lnRef idx="1">
-            <a:schemeClr val="accent1"/>
-          </a:lnRef>
-          <a:fillRef idx="3">
-            <a:schemeClr val="accent1"/>
-          </a:fillRef>
-          <a:effectRef idx="2">
-            <a:schemeClr val="accent1"/>
-          </a:effectRef>
-          <a:fontRef idx="minor">
-            <a:schemeClr val="lt1"/>
-          </a:fontRef>
-        </p:style>
-        <p:txBody>
-          <a:bodyPr rtlCol="0" anchor="ctr"/>
-          <a:lstStyle/>
-          <a:p>
-            <a:pPr algn="ctr"/>
-          </a:p>
-        </p:txBody>
-      </p:sp>
-      <p:sp>
-        <p:nvSpPr>
-          <p:cNvPr id="41" name="TextBox 40"/>
-          <p:cNvSpPr txBox="1"/>
-          <p:nvPr/>
-        </p:nvSpPr>
-        <p:spPr>
-          <a:xfrm>
-            <a:off x="6323018" y="2494926"/>
-            <a:ext cx="2475880" cy="228542"/>
-          </a:xfrm>
-          <a:prstGeom prst="rect">
-            <a:avLst/>
-          </a:prstGeom>
-          <a:noFill/>
-        </p:spPr>
-        <p:txBody>
-          <a:bodyPr wrap="none" lIns="0" rIns="0" tIns="0" bIns="0">
-            <a:spAutoFit/>
-          </a:bodyPr>
-          <a:lstStyle/>
-          <a:p>
-            <a:pPr algn="l"/>
-            <a:r>
-              <a:rPr sz="1200" b="1">
-                <a:solidFill>
-                  <a:srgbClr val="FFFFFF"/>
-                </a:solidFill>
-                <a:latin typeface="Malgun Gothic"/>
-              </a:rPr>
-              <a:t>GL Global</a:t>
-            </a:r>
-          </a:p>
-        </p:txBody>
-      </p:sp>
-      <p:sp>
-        <p:nvSpPr>
-          <p:cNvPr id="42" name="TextBox 41"/>
-          <p:cNvSpPr txBox="1"/>
-          <p:nvPr/>
-        </p:nvSpPr>
-        <p:spPr>
-          <a:xfrm>
-            <a:off x="6323018" y="2742514"/>
-            <a:ext cx="2475880" cy="190452"/>
-          </a:xfrm>
-          <a:prstGeom prst="rect">
-            <a:avLst/>
-          </a:prstGeom>
-          <a:noFill/>
-        </p:spPr>
-        <p:txBody>
-          <a:bodyPr wrap="none" lIns="0" rIns="0" tIns="0" bIns="0">
-            <a:spAutoFit/>
-          </a:bodyPr>
-          <a:lstStyle/>
-          <a:p>
-            <a:pPr algn="l"/>
-            <a:r>
-              <a:rPr sz="900" b="0">
-                <a:solidFill>
-                  <a:srgbClr val="444444"/>
-                </a:solidFill>
-                <a:latin typeface="Malgun Gothic"/>
-              </a:rPr>
-              <a:t>2025:  ₩319M</a:t>
-            </a:r>
-          </a:p>
-        </p:txBody>
-      </p:sp>
-      <p:sp>
-        <p:nvSpPr>
-          <p:cNvPr id="43" name="TextBox 42"/>
-          <p:cNvSpPr txBox="1"/>
-          <p:nvPr/>
-        </p:nvSpPr>
-        <p:spPr>
-          <a:xfrm>
-            <a:off x="9217894" y="2418745"/>
-            <a:ext cx="2133066" cy="552311"/>
-          </a:xfrm>
-          <a:prstGeom prst="rect">
-            <a:avLst/>
-          </a:prstGeom>
-          <a:noFill/>
-        </p:spPr>
-        <p:txBody>
-          <a:bodyPr wrap="none" lIns="0" rIns="0" tIns="0" bIns="0">
-            <a:spAutoFit/>
-          </a:bodyPr>
-          <a:lstStyle/>
-          <a:p>
-            <a:pPr algn="r"/>
-            <a:r>
-              <a:rPr sz="3300" b="1">
-                <a:solidFill>
-                  <a:srgbClr val="0AFF6C"/>
-                </a:solidFill>
-                <a:latin typeface="Malgun Gothic"/>
-              </a:rPr>
-              <a:t>+27%</a:t>
-            </a:r>
-          </a:p>
-        </p:txBody>
-      </p:sp>
-      <p:sp>
-        <p:nvSpPr>
-          <p:cNvPr id="44" name="Rectangle 43"/>
-          <p:cNvSpPr/>
-          <p:nvPr/>
-        </p:nvSpPr>
-        <p:spPr>
-          <a:xfrm>
-            <a:off x="6323018" y="3371007"/>
-            <a:ext cx="5027942" cy="9522"/>
-          </a:xfrm>
-          <a:prstGeom prst="rect">
-            <a:avLst/>
-          </a:prstGeom>
-          <a:solidFill>
-            <a:srgbClr val="282828"/>
-          </a:solidFill>
-          <a:ln>
-            <a:noFill/>
-          </a:ln>
-        </p:spPr>
-        <p:style>
-          <a:lnRef idx="1">
-            <a:schemeClr val="accent1"/>
-          </a:lnRef>
-          <a:fillRef idx="3">
-            <a:schemeClr val="accent1"/>
-          </a:fillRef>
-          <a:effectRef idx="2">
-            <a:schemeClr val="accent1"/>
-          </a:effectRef>
-          <a:fontRef idx="minor">
-            <a:schemeClr val="lt1"/>
-          </a:fontRef>
-        </p:style>
-        <p:txBody>
-          <a:bodyPr rtlCol="0" anchor="ctr"/>
-          <a:lstStyle/>
-          <a:p>
-            <a:pPr algn="ctr"/>
-          </a:p>
-        </p:txBody>
-      </p:sp>
-      <p:sp>
-        <p:nvSpPr>
-          <p:cNvPr id="45" name="TextBox 44"/>
-          <p:cNvSpPr txBox="1"/>
-          <p:nvPr/>
-        </p:nvSpPr>
-        <p:spPr>
-          <a:xfrm>
-            <a:off x="6323018" y="3485278"/>
-            <a:ext cx="2475880" cy="228542"/>
-          </a:xfrm>
-          <a:prstGeom prst="rect">
-            <a:avLst/>
-          </a:prstGeom>
-          <a:noFill/>
-        </p:spPr>
-        <p:txBody>
-          <a:bodyPr wrap="none" lIns="0" rIns="0" tIns="0" bIns="0">
-            <a:spAutoFit/>
-          </a:bodyPr>
-          <a:lstStyle/>
-          <a:p>
-            <a:pPr algn="l"/>
-            <a:r>
-              <a:rPr sz="1200" b="1">
-                <a:solidFill>
-                  <a:srgbClr val="FFFFFF"/>
-                </a:solidFill>
-                <a:latin typeface="Malgun Gothic"/>
-              </a:rPr>
-              <a:t>KR Content</a:t>
-            </a:r>
-          </a:p>
-        </p:txBody>
-      </p:sp>
-      <p:sp>
-        <p:nvSpPr>
-          <p:cNvPr id="46" name="TextBox 45"/>
-          <p:cNvSpPr txBox="1"/>
-          <p:nvPr/>
-        </p:nvSpPr>
-        <p:spPr>
-          <a:xfrm>
-            <a:off x="6323018" y="3732866"/>
-            <a:ext cx="2475880" cy="190452"/>
-          </a:xfrm>
-          <a:prstGeom prst="rect">
-            <a:avLst/>
-          </a:prstGeom>
-          <a:noFill/>
-        </p:spPr>
-        <p:txBody>
-          <a:bodyPr wrap="none" lIns="0" rIns="0" tIns="0" bIns="0">
-            <a:spAutoFit/>
-          </a:bodyPr>
-          <a:lstStyle/>
-          <a:p>
-            <a:pPr algn="l"/>
-            <a:r>
-              <a:rPr sz="900" b="0">
-                <a:solidFill>
-                  <a:srgbClr val="444444"/>
-                </a:solidFill>
-                <a:latin typeface="Malgun Gothic"/>
-              </a:rPr>
-              <a:t>2025:  ₩63M</a:t>
-            </a:r>
-          </a:p>
-        </p:txBody>
-      </p:sp>
-      <p:sp>
-        <p:nvSpPr>
-          <p:cNvPr id="47" name="TextBox 46"/>
-          <p:cNvSpPr txBox="1"/>
-          <p:nvPr/>
-        </p:nvSpPr>
-        <p:spPr>
-          <a:xfrm>
-            <a:off x="9217894" y="3409097"/>
-            <a:ext cx="2133066" cy="552311"/>
-          </a:xfrm>
-          <a:prstGeom prst="rect">
-            <a:avLst/>
-          </a:prstGeom>
-          <a:noFill/>
-        </p:spPr>
-        <p:txBody>
-          <a:bodyPr wrap="none" lIns="0" rIns="0" tIns="0" bIns="0">
-            <a:spAutoFit/>
-          </a:bodyPr>
-          <a:lstStyle/>
-          <a:p>
-            <a:pPr algn="r"/>
-            <a:r>
-              <a:rPr sz="3300" b="1">
+              <a:rPr sz="2400" b="1" dirty="0">
                 <a:solidFill>
                   <a:srgbClr val="FF2D55"/>
                 </a:solidFill>
                 <a:latin typeface="Malgun Gothic"/>
               </a:rPr>
-              <a:t>-77%</a:t>
-            </a:r>
-          </a:p>
-        </p:txBody>
-      </p:sp>
-      <p:sp>
-        <p:nvSpPr>
-          <p:cNvPr id="48" name="Rectangle 47"/>
-          <p:cNvSpPr/>
-          <p:nvPr/>
-        </p:nvSpPr>
-        <p:spPr>
-          <a:xfrm>
-            <a:off x="6323018" y="4361359"/>
-            <a:ext cx="5027942" cy="9522"/>
-          </a:xfrm>
-          <a:prstGeom prst="rect">
-            <a:avLst/>
-          </a:prstGeom>
-          <a:solidFill>
-            <a:srgbClr val="282828"/>
-          </a:solidFill>
-          <a:ln>
-            <a:noFill/>
-          </a:ln>
-        </p:spPr>
-        <p:style>
-          <a:lnRef idx="1">
-            <a:schemeClr val="accent1"/>
-          </a:lnRef>
-          <a:fillRef idx="3">
-            <a:schemeClr val="accent1"/>
-          </a:fillRef>
-          <a:effectRef idx="2">
-            <a:schemeClr val="accent1"/>
-          </a:effectRef>
-          <a:fontRef idx="minor">
-            <a:schemeClr val="lt1"/>
-          </a:fontRef>
-        </p:style>
-        <p:txBody>
-          <a:bodyPr rtlCol="0" anchor="ctr"/>
-          <a:lstStyle/>
-          <a:p>
-            <a:pPr algn="ctr"/>
-          </a:p>
-        </p:txBody>
-      </p:sp>
-      <p:sp>
-        <p:nvSpPr>
-          <p:cNvPr id="49" name="TextBox 48"/>
-          <p:cNvSpPr txBox="1"/>
-          <p:nvPr/>
-        </p:nvSpPr>
-        <p:spPr>
-          <a:xfrm>
-            <a:off x="6323018" y="4475630"/>
-            <a:ext cx="2475880" cy="228542"/>
-          </a:xfrm>
-          <a:prstGeom prst="rect">
-            <a:avLst/>
-          </a:prstGeom>
-          <a:noFill/>
-        </p:spPr>
-        <p:txBody>
-          <a:bodyPr wrap="none" lIns="0" rIns="0" tIns="0" bIns="0">
-            <a:spAutoFit/>
-          </a:bodyPr>
-          <a:lstStyle/>
-          <a:p>
-            <a:pPr algn="l"/>
-            <a:r>
-              <a:rPr sz="1200" b="1">
-                <a:solidFill>
-                  <a:srgbClr val="FFFFFF"/>
-                </a:solidFill>
-                <a:latin typeface="Malgun Gothic"/>
-              </a:rPr>
-              <a:t>KR Planet</a:t>
-            </a:r>
-          </a:p>
-        </p:txBody>
-      </p:sp>
-      <p:sp>
-        <p:nvSpPr>
-          <p:cNvPr id="50" name="TextBox 49"/>
-          <p:cNvSpPr txBox="1"/>
-          <p:nvPr/>
-        </p:nvSpPr>
-        <p:spPr>
-          <a:xfrm>
-            <a:off x="6323018" y="4723218"/>
-            <a:ext cx="2475880" cy="190452"/>
-          </a:xfrm>
-          <a:prstGeom prst="rect">
-            <a:avLst/>
-          </a:prstGeom>
-          <a:noFill/>
-        </p:spPr>
-        <p:txBody>
-          <a:bodyPr wrap="none" lIns="0" rIns="0" tIns="0" bIns="0">
-            <a:spAutoFit/>
-          </a:bodyPr>
-          <a:lstStyle/>
-          <a:p>
-            <a:pPr algn="l"/>
-            <a:r>
-              <a:rPr sz="900" b="0">
-                <a:solidFill>
-                  <a:srgbClr val="444444"/>
-                </a:solidFill>
-                <a:latin typeface="Malgun Gothic"/>
-              </a:rPr>
-              <a:t>2025:  ₩87M</a:t>
-            </a:r>
-          </a:p>
-        </p:txBody>
-      </p:sp>
-      <p:sp>
-        <p:nvSpPr>
-          <p:cNvPr id="51" name="TextBox 50"/>
-          <p:cNvSpPr txBox="1"/>
-          <p:nvPr/>
-        </p:nvSpPr>
-        <p:spPr>
-          <a:xfrm>
-            <a:off x="9217894" y="4399449"/>
-            <a:ext cx="2133066" cy="552311"/>
-          </a:xfrm>
-          <a:prstGeom prst="rect">
-            <a:avLst/>
-          </a:prstGeom>
-          <a:noFill/>
-        </p:spPr>
-        <p:txBody>
-          <a:bodyPr wrap="none" lIns="0" rIns="0" tIns="0" bIns="0">
-            <a:spAutoFit/>
-          </a:bodyPr>
-          <a:lstStyle/>
-          <a:p>
-            <a:pPr algn="r"/>
-            <a:r>
-              <a:rPr sz="3300" b="1">
+              <a:t>▼ </a:t>
+            </a:r>
+            <a:r>
+              <a:rPr lang="en-US" sz="2400" b="1" dirty="0">
                 <a:solidFill>
                   <a:srgbClr val="FF2D55"/>
                 </a:solidFill>
                 <a:latin typeface="Malgun Gothic"/>
               </a:rPr>
-              <a:t>-87%</a:t>
-            </a:r>
-          </a:p>
-        </p:txBody>
-      </p:sp>
-      <p:sp>
-        <p:nvSpPr>
-          <p:cNvPr id="52" name="Rectangle 51"/>
-          <p:cNvSpPr/>
-          <p:nvPr/>
-        </p:nvSpPr>
-        <p:spPr>
-          <a:xfrm>
-            <a:off x="6323018" y="5351711"/>
-            <a:ext cx="5027942" cy="9522"/>
-          </a:xfrm>
-          <a:prstGeom prst="rect">
-            <a:avLst/>
-          </a:prstGeom>
-          <a:solidFill>
-            <a:srgbClr val="2A2A2A"/>
-          </a:solidFill>
-          <a:ln>
-            <a:noFill/>
-          </a:ln>
-        </p:spPr>
-        <p:style>
-          <a:lnRef idx="1">
-            <a:schemeClr val="accent1"/>
-          </a:lnRef>
-          <a:fillRef idx="3">
-            <a:schemeClr val="accent1"/>
-          </a:fillRef>
-          <a:effectRef idx="2">
-            <a:schemeClr val="accent1"/>
-          </a:effectRef>
-          <a:fontRef idx="minor">
-            <a:schemeClr val="lt1"/>
-          </a:fontRef>
-        </p:style>
-        <p:txBody>
-          <a:bodyPr rtlCol="0" anchor="ctr"/>
-          <a:lstStyle/>
-          <a:p>
-            <a:pPr algn="ctr"/>
-          </a:p>
-        </p:txBody>
-      </p:sp>
-      <p:sp>
-        <p:nvSpPr>
-          <p:cNvPr id="53" name="TextBox 52"/>
-          <p:cNvSpPr txBox="1"/>
-          <p:nvPr/>
-        </p:nvSpPr>
-        <p:spPr>
-          <a:xfrm>
-            <a:off x="6323018" y="5446937"/>
-            <a:ext cx="2856785" cy="285678"/>
-          </a:xfrm>
-          <a:prstGeom prst="rect">
-            <a:avLst/>
-          </a:prstGeom>
-          <a:noFill/>
-        </p:spPr>
-        <p:txBody>
-          <a:bodyPr wrap="none" lIns="0" rIns="0" tIns="0" bIns="0">
-            <a:spAutoFit/>
-          </a:bodyPr>
-          <a:lstStyle/>
-          <a:p>
-            <a:pPr algn="l"/>
-            <a:r>
-              <a:rPr sz="1500" b="1">
-                <a:solidFill>
-                  <a:srgbClr val="FFFFFF"/>
-                </a:solidFill>
-                <a:latin typeface="Malgun Gothic"/>
-              </a:rPr>
-              <a:t>Overall (Same BU)</a:t>
-            </a:r>
-          </a:p>
-        </p:txBody>
-      </p:sp>
-      <p:sp>
-        <p:nvSpPr>
-          <p:cNvPr id="54" name="TextBox 53"/>
-          <p:cNvSpPr txBox="1"/>
-          <p:nvPr/>
-        </p:nvSpPr>
-        <p:spPr>
-          <a:xfrm>
-            <a:off x="9217894" y="5370756"/>
-            <a:ext cx="2133066" cy="571357"/>
-          </a:xfrm>
-          <a:prstGeom prst="rect">
-            <a:avLst/>
-          </a:prstGeom>
-          <a:noFill/>
-        </p:spPr>
-        <p:txBody>
-          <a:bodyPr wrap="none" lIns="0" rIns="0" tIns="0" bIns="0">
-            <a:spAutoFit/>
-          </a:bodyPr>
-          <a:lstStyle/>
-          <a:p>
-            <a:pPr algn="r"/>
-            <a:r>
-              <a:rPr sz="3450" b="1">
-                <a:solidFill>
-                  <a:srgbClr val="FF2D55"/>
-                </a:solidFill>
-                <a:latin typeface="Malgun Gothic"/>
-              </a:rPr>
-              <a:t>-8%</a:t>
-            </a:r>
+              <a:t>$174K</a:t>
+            </a:r>
+            <a:endParaRPr sz="2400" b="1" dirty="0">
+              <a:solidFill>
+                <a:srgbClr val="FF2D55"/>
+              </a:solidFill>
+              <a:latin typeface="Malgun Gothic"/>
+            </a:endParaRPr>
           </a:p>
         </p:txBody>
       </p:sp>
@@ -6371,7 +6557,7 @@
 </file>
 
 <file path=ppt/slides/slide3.xml><?xml version="1.0" encoding="utf-8"?>
-<p:sld xmlns:a="http://schemas.openxmlformats.org/drawingml/2006/main" xmlns:p="http://schemas.openxmlformats.org/presentationml/2006/main" xmlns:r="http://schemas.openxmlformats.org/officeDocument/2006/relationships">
+<p:sld xmlns:a="http://schemas.openxmlformats.org/drawingml/2006/main" xmlns:r="http://schemas.openxmlformats.org/officeDocument/2006/relationships" xmlns:p="http://schemas.openxmlformats.org/presentationml/2006/main">
   <p:cSld>
     <p:bg>
       <p:bgPr>
@@ -6387,7 +6573,14 @@
         <p:cNvGrpSpPr/>
         <p:nvPr/>
       </p:nvGrpSpPr>
-      <p:grpSpPr/>
+      <p:grpSpPr>
+        <a:xfrm>
+          <a:off x="0" y="0"/>
+          <a:ext cx="0" cy="0"/>
+          <a:chOff x="0" y="0"/>
+          <a:chExt cx="0" cy="0"/>
+        </a:xfrm>
+      </p:grpSpPr>
       <p:sp>
         <p:nvSpPr>
           <p:cNvPr id="2" name="TextBox 1"/>
@@ -6405,7 +6598,7 @@
           <a:noFill/>
         </p:spPr>
         <p:txBody>
-          <a:bodyPr wrap="none" lIns="0" rIns="0" tIns="0" bIns="0">
+          <a:bodyPr wrap="none" lIns="0" tIns="0" rIns="0" bIns="0">
             <a:spAutoFit/>
           </a:bodyPr>
           <a:lstStyle/>
@@ -6440,7 +6633,7 @@
           <a:noFill/>
         </p:spPr>
         <p:txBody>
-          <a:bodyPr wrap="none" lIns="0" rIns="0" tIns="0" bIns="0">
+          <a:bodyPr wrap="none" lIns="0" tIns="0" rIns="0" bIns="0">
             <a:spAutoFit/>
           </a:bodyPr>
           <a:lstStyle/>
@@ -6453,7 +6646,7 @@
                 </a:solidFill>
                 <a:latin typeface="Malgun Gothic"/>
               </a:rPr>
-              <a:t>BU Goal Achievement</a:t>
+              <a:t>Revenue Goal Achievement</a:t>
             </a:r>
           </a:p>
         </p:txBody>
@@ -6498,6 +6691,7 @@
           <a:lstStyle/>
           <a:p>
             <a:pPr algn="ctr"/>
+            <a:endParaRPr/>
           </a:p>
         </p:txBody>
       </p:sp>
@@ -6518,7 +6712,7 @@
           <a:noFill/>
         </p:spPr>
         <p:txBody>
-          <a:bodyPr wrap="none" lIns="0" rIns="0" tIns="0" bIns="0">
+          <a:bodyPr wrap="none" lIns="0" tIns="0" rIns="0" bIns="0">
             <a:spAutoFit/>
           </a:bodyPr>
           <a:lstStyle/>
@@ -6553,7 +6747,7 @@
           <a:noFill/>
         </p:spPr>
         <p:txBody>
-          <a:bodyPr wrap="none" lIns="0" rIns="0" tIns="0" bIns="0">
+          <a:bodyPr wrap="none" lIns="0" tIns="0" rIns="0" bIns="0">
             <a:spAutoFit/>
           </a:bodyPr>
           <a:lstStyle/>
@@ -6588,7 +6782,7 @@
           <a:noFill/>
         </p:spPr>
         <p:txBody>
-          <a:bodyPr wrap="none" lIns="0" rIns="0" tIns="0" bIns="0">
+          <a:bodyPr wrap="none" lIns="0" tIns="0" rIns="0" bIns="0">
             <a:spAutoFit/>
           </a:bodyPr>
           <a:lstStyle/>
@@ -6623,7 +6817,7 @@
           <a:noFill/>
         </p:spPr>
         <p:txBody>
-          <a:bodyPr wrap="none" lIns="0" rIns="0" tIns="0" bIns="0">
+          <a:bodyPr wrap="none" lIns="0" tIns="0" rIns="0" bIns="0">
             <a:spAutoFit/>
           </a:bodyPr>
           <a:lstStyle/>
@@ -6650,29 +6844,79 @@
         <p:spPr>
           <a:xfrm>
             <a:off x="685628" y="1742639"/>
-            <a:ext cx="8570356" cy="209497"/>
-          </a:xfrm>
-          <a:prstGeom prst="rect">
-            <a:avLst/>
-          </a:prstGeom>
-          <a:noFill/>
-        </p:spPr>
-        <p:txBody>
-          <a:bodyPr wrap="none" lIns="0" rIns="0" tIns="0" bIns="0">
-            <a:spAutoFit/>
-          </a:bodyPr>
-          <a:lstStyle/>
-          <a:p>
-            <a:pPr algn="l"/>
-            <a:r>
-              <a:rPr sz="975" b="0">
+            <a:ext cx="3690113" cy="150041"/>
+          </a:xfrm>
+          <a:prstGeom prst="rect">
+            <a:avLst/>
+          </a:prstGeom>
+          <a:noFill/>
+        </p:spPr>
+        <p:txBody>
+          <a:bodyPr wrap="none" lIns="0" tIns="0" rIns="0" bIns="0">
+            <a:spAutoFit/>
+          </a:bodyPr>
+          <a:lstStyle/>
+          <a:p>
+            <a:r>
+              <a:rPr sz="975" b="0" dirty="0">
                 <a:solidFill>
                   <a:srgbClr val="666666"/>
                 </a:solidFill>
                 <a:latin typeface="Malgun Gothic"/>
               </a:rPr>
-              <a:t>Annual Target: ₩12B  |  Confirmed: ₩2.1B  |  Remaining: ₩9.9B</a:t>
-            </a:r>
+              <a:t>Annual Target: </a:t>
+            </a:r>
+            <a:r>
+              <a:rPr lang="en-US" sz="975" b="0" dirty="0">
+                <a:solidFill>
+                  <a:srgbClr val="666666"/>
+                </a:solidFill>
+                <a:latin typeface="Malgun Gothic"/>
+              </a:rPr>
+              <a:t>$10M </a:t>
+            </a:r>
+            <a:r>
+              <a:rPr sz="975" b="0" dirty="0">
+                <a:solidFill>
+                  <a:srgbClr val="666666"/>
+                </a:solidFill>
+                <a:latin typeface="Malgun Gothic"/>
+              </a:rPr>
+              <a:t>|  Confirmed: </a:t>
+            </a:r>
+            <a:r>
+              <a:rPr lang="en-US" sz="975" b="0" dirty="0">
+                <a:solidFill>
+                  <a:srgbClr val="666666"/>
+                </a:solidFill>
+                <a:latin typeface="Malgun Gothic"/>
+              </a:rPr>
+              <a:t>$1.75M</a:t>
+            </a:r>
+            <a:r>
+              <a:rPr sz="975" b="0" dirty="0">
+                <a:solidFill>
+                  <a:srgbClr val="666666"/>
+                </a:solidFill>
+                <a:latin typeface="Malgun Gothic"/>
+              </a:rPr>
+              <a:t> |  Remaining: </a:t>
+            </a:r>
+            <a:r>
+              <a:rPr lang="en-US" sz="975" dirty="0">
+                <a:solidFill>
+                  <a:srgbClr val="666666"/>
+                </a:solidFill>
+                <a:latin typeface="Malgun Gothic"/>
+              </a:rPr>
+              <a:t>$8.25M</a:t>
+            </a:r>
+            <a:endParaRPr sz="975" b="0" dirty="0">
+              <a:solidFill>
+                <a:srgbClr val="666666"/>
+              </a:solidFill>
+              <a:latin typeface="Malgun Gothic"/>
+            </a:endParaRPr>
           </a:p>
         </p:txBody>
       </p:sp>
@@ -6716,6 +6960,7 @@
           <a:lstStyle/>
           <a:p>
             <a:pPr algn="ctr"/>
+            <a:endParaRPr/>
           </a:p>
         </p:txBody>
       </p:sp>
@@ -6759,6 +7004,7 @@
           <a:lstStyle/>
           <a:p>
             <a:pPr algn="ctr"/>
+            <a:endParaRPr/>
           </a:p>
         </p:txBody>
       </p:sp>
@@ -6771,28 +7017,27 @@
         <p:spPr>
           <a:xfrm>
             <a:off x="818945" y="2133066"/>
-            <a:ext cx="3247212" cy="209497"/>
-          </a:xfrm>
-          <a:prstGeom prst="rect">
-            <a:avLst/>
-          </a:prstGeom>
-          <a:noFill/>
-        </p:spPr>
-        <p:txBody>
-          <a:bodyPr wrap="none" lIns="0" rIns="0" tIns="0" bIns="0">
-            <a:spAutoFit/>
-          </a:bodyPr>
-          <a:lstStyle/>
-          <a:p>
-            <a:pPr algn="l"/>
-            <a:r>
-              <a:rPr sz="1050" b="1">
+            <a:ext cx="732573" cy="161583"/>
+          </a:xfrm>
+          <a:prstGeom prst="rect">
+            <a:avLst/>
+          </a:prstGeom>
+          <a:noFill/>
+        </p:spPr>
+        <p:txBody>
+          <a:bodyPr wrap="none" lIns="0" tIns="0" rIns="0" bIns="0">
+            <a:spAutoFit/>
+          </a:bodyPr>
+          <a:lstStyle/>
+          <a:p>
+            <a:r>
+              <a:rPr lang="en-US" altLang="ko-KR" sz="1050" b="1" dirty="0">
                 <a:solidFill>
                   <a:srgbClr val="E8FF47"/>
                 </a:solidFill>
                 <a:latin typeface="Malgun Gothic"/>
               </a:rPr>
-              <a:t>KR</a:t>
+              <a:t>KR Content</a:t>
             </a:r>
           </a:p>
         </p:txBody>
@@ -6837,6 +7082,7 @@
           <a:lstStyle/>
           <a:p>
             <a:pPr algn="ctr"/>
+            <a:endParaRPr/>
           </a:p>
         </p:txBody>
       </p:sp>
@@ -6857,7 +7103,7 @@
           <a:noFill/>
         </p:spPr>
         <p:txBody>
-          <a:bodyPr wrap="none" lIns="0" rIns="0" tIns="0" bIns="0">
+          <a:bodyPr wrap="none" lIns="0" tIns="0" rIns="0" bIns="0">
             <a:spAutoFit/>
           </a:bodyPr>
           <a:lstStyle/>
@@ -6884,29 +7130,35 @@
         <p:spPr>
           <a:xfrm>
             <a:off x="818945" y="2666333"/>
-            <a:ext cx="3247212" cy="609447"/>
-          </a:xfrm>
-          <a:prstGeom prst="rect">
-            <a:avLst/>
-          </a:prstGeom>
-          <a:noFill/>
-        </p:spPr>
-        <p:txBody>
-          <a:bodyPr wrap="none" lIns="0" rIns="0" tIns="0" bIns="0">
+            <a:ext cx="1426673" cy="577081"/>
+          </a:xfrm>
+          <a:prstGeom prst="rect">
+            <a:avLst/>
+          </a:prstGeom>
+          <a:noFill/>
+        </p:spPr>
+        <p:txBody>
+          <a:bodyPr wrap="none" lIns="0" tIns="0" rIns="0" bIns="0">
             <a:spAutoFit/>
           </a:bodyPr>
           <a:lstStyle/>
           <a:p>
             <a:pPr algn="l"/>
             <a:r>
-              <a:rPr sz="3750" b="1">
+              <a:rPr lang="en-US" sz="3750" b="1" dirty="0">
                 <a:solidFill>
                   <a:srgbClr val="FFFFFF"/>
                 </a:solidFill>
                 <a:latin typeface="Malgun Gothic"/>
               </a:rPr>
-              <a:t>₩1.3B</a:t>
-            </a:r>
+              <a:t>$1.8M</a:t>
+            </a:r>
+            <a:endParaRPr sz="3750" b="1" dirty="0">
+              <a:solidFill>
+                <a:srgbClr val="FFFFFF"/>
+              </a:solidFill>
+              <a:latin typeface="Malgun Gothic"/>
+            </a:endParaRPr>
           </a:p>
         </p:txBody>
       </p:sp>
@@ -6927,7 +7179,7 @@
           <a:noFill/>
         </p:spPr>
         <p:txBody>
-          <a:bodyPr wrap="none" lIns="0" rIns="0" tIns="0" bIns="0">
+          <a:bodyPr wrap="none" lIns="0" tIns="0" rIns="0" bIns="0">
             <a:spAutoFit/>
           </a:bodyPr>
           <a:lstStyle/>
@@ -6954,29 +7206,35 @@
         <p:spPr>
           <a:xfrm>
             <a:off x="818945" y="3542414"/>
-            <a:ext cx="3247212" cy="533266"/>
-          </a:xfrm>
-          <a:prstGeom prst="rect">
-            <a:avLst/>
-          </a:prstGeom>
-          <a:noFill/>
-        </p:spPr>
-        <p:txBody>
-          <a:bodyPr wrap="none" lIns="0" rIns="0" tIns="0" bIns="0">
+            <a:ext cx="1197444" cy="484748"/>
+          </a:xfrm>
+          <a:prstGeom prst="rect">
+            <a:avLst/>
+          </a:prstGeom>
+          <a:noFill/>
+        </p:spPr>
+        <p:txBody>
+          <a:bodyPr wrap="none" lIns="0" tIns="0" rIns="0" bIns="0">
             <a:spAutoFit/>
           </a:bodyPr>
           <a:lstStyle/>
           <a:p>
             <a:pPr algn="l"/>
             <a:r>
-              <a:rPr sz="3150" b="1">
+              <a:rPr lang="en-US" sz="3150" b="1" dirty="0">
                 <a:solidFill>
                   <a:srgbClr val="FFFFFF"/>
                 </a:solidFill>
                 <a:latin typeface="Malgun Gothic"/>
               </a:rPr>
-              <a:t>₩330M</a:t>
-            </a:r>
+              <a:t>$275K</a:t>
+            </a:r>
+            <a:endParaRPr sz="3150" b="1" dirty="0">
+              <a:solidFill>
+                <a:srgbClr val="FFFFFF"/>
+              </a:solidFill>
+              <a:latin typeface="Malgun Gothic"/>
+            </a:endParaRPr>
           </a:p>
         </p:txBody>
       </p:sp>
@@ -7020,6 +7278,7 @@
           <a:lstStyle/>
           <a:p>
             <a:pPr algn="ctr"/>
+            <a:endParaRPr/>
           </a:p>
         </p:txBody>
       </p:sp>
@@ -7063,6 +7322,7 @@
           <a:lstStyle/>
           <a:p>
             <a:pPr algn="ctr"/>
+            <a:endParaRPr/>
           </a:p>
         </p:txBody>
       </p:sp>
@@ -7083,7 +7343,7 @@
           <a:noFill/>
         </p:spPr>
         <p:txBody>
-          <a:bodyPr wrap="none" lIns="0" rIns="0" tIns="0" bIns="0">
+          <a:bodyPr wrap="none" lIns="0" tIns="0" rIns="0" bIns="0">
             <a:spAutoFit/>
           </a:bodyPr>
           <a:lstStyle/>
@@ -7110,35 +7370,103 @@
         <p:spPr>
           <a:xfrm>
             <a:off x="818945" y="5027942"/>
-            <a:ext cx="3247212" cy="209497"/>
-          </a:xfrm>
-          <a:prstGeom prst="rect">
-            <a:avLst/>
-          </a:prstGeom>
-          <a:noFill/>
-        </p:spPr>
-        <p:txBody>
-          <a:bodyPr wrap="none" lIns="0" rIns="0" tIns="0" bIns="0">
+            <a:ext cx="809517" cy="161583"/>
+          </a:xfrm>
+          <a:prstGeom prst="rect">
+            <a:avLst/>
+          </a:prstGeom>
+          <a:noFill/>
+        </p:spPr>
+        <p:txBody>
+          <a:bodyPr wrap="none" lIns="0" tIns="0" rIns="0" bIns="0">
             <a:spAutoFit/>
           </a:bodyPr>
           <a:lstStyle/>
           <a:p>
             <a:pPr algn="l"/>
             <a:r>
-              <a:rPr sz="1050" b="1">
+              <a:rPr sz="1050" b="1" dirty="0">
                 <a:solidFill>
                   <a:srgbClr val="444444"/>
                 </a:solidFill>
                 <a:latin typeface="Malgun Gothic"/>
               </a:rPr>
-              <a:t>Gap  -₩970M</a:t>
-            </a:r>
-          </a:p>
-        </p:txBody>
-      </p:sp>
-      <p:sp>
-        <p:nvSpPr>
-          <p:cNvPr id="22" name="Rectangle 21"/>
+              <a:t>Gap  -</a:t>
+            </a:r>
+            <a:r>
+              <a:rPr lang="en-US" sz="1050" b="1" dirty="0">
+                <a:solidFill>
+                  <a:srgbClr val="444444"/>
+                </a:solidFill>
+                <a:latin typeface="Malgun Gothic"/>
+              </a:rPr>
+              <a:t>$808K</a:t>
+            </a:r>
+            <a:endParaRPr sz="1050" b="1" dirty="0">
+              <a:solidFill>
+                <a:srgbClr val="444444"/>
+              </a:solidFill>
+              <a:latin typeface="Malgun Gothic"/>
+            </a:endParaRPr>
+          </a:p>
+        </p:txBody>
+      </p:sp>
+      <p:sp>
+        <p:nvSpPr>
+          <p:cNvPr id="22" name="TextBox 21"/>
+          <p:cNvSpPr txBox="1"/>
+          <p:nvPr/>
+        </p:nvSpPr>
+        <p:spPr>
+          <a:xfrm>
+            <a:off x="818945" y="5275530"/>
+            <a:ext cx="2053447" cy="161583"/>
+          </a:xfrm>
+          <a:prstGeom prst="rect">
+            <a:avLst/>
+          </a:prstGeom>
+          <a:noFill/>
+        </p:spPr>
+        <p:txBody>
+          <a:bodyPr wrap="none" lIns="0" tIns="0" rIns="0" bIns="0">
+            <a:spAutoFit/>
+          </a:bodyPr>
+          <a:lstStyle/>
+          <a:p>
+            <a:pPr algn="l"/>
+            <a:r>
+              <a:rPr sz="1050" b="0" dirty="0">
+                <a:solidFill>
+                  <a:srgbClr val="FF0000"/>
+                </a:solidFill>
+                <a:latin typeface="Malgun Gothic"/>
+              </a:rPr>
+              <a:t>* Includes </a:t>
+            </a:r>
+            <a:r>
+              <a:rPr lang="en-US" sz="1050" b="0" dirty="0">
+                <a:solidFill>
+                  <a:srgbClr val="FF0000"/>
+                </a:solidFill>
+                <a:latin typeface="Malgun Gothic"/>
+              </a:rPr>
+              <a:t>$250K </a:t>
+            </a:r>
+            <a:r>
+              <a:rPr sz="1050" b="0" dirty="0">
+                <a:solidFill>
+                  <a:srgbClr val="FF0000"/>
+                </a:solidFill>
+                <a:latin typeface="Malgun Gothic"/>
+              </a:rPr>
+              <a:t>KTO Production</a:t>
+            </a:r>
+          </a:p>
+        </p:txBody>
+      </p:sp>
+      <p:sp>
+        <p:nvSpPr>
+          <p:cNvPr id="23" name="Rectangle 22"/>
           <p:cNvSpPr/>
           <p:nvPr/>
         </p:nvSpPr>
@@ -7176,47 +7504,47 @@
           <a:lstStyle/>
           <a:p>
             <a:pPr algn="ctr"/>
-          </a:p>
-        </p:txBody>
-      </p:sp>
-      <p:sp>
-        <p:nvSpPr>
-          <p:cNvPr id="23" name="TextBox 22"/>
+            <a:endParaRPr/>
+          </a:p>
+        </p:txBody>
+      </p:sp>
+      <p:sp>
+        <p:nvSpPr>
+          <p:cNvPr id="24" name="TextBox 23"/>
           <p:cNvSpPr txBox="1"/>
           <p:nvPr/>
         </p:nvSpPr>
         <p:spPr>
           <a:xfrm>
             <a:off x="4466108" y="2133066"/>
-            <a:ext cx="3247212" cy="209497"/>
-          </a:xfrm>
-          <a:prstGeom prst="rect">
-            <a:avLst/>
-          </a:prstGeom>
-          <a:noFill/>
-        </p:spPr>
-        <p:txBody>
-          <a:bodyPr wrap="none" lIns="0" rIns="0" tIns="0" bIns="0">
-            <a:spAutoFit/>
-          </a:bodyPr>
-          <a:lstStyle/>
-          <a:p>
-            <a:pPr algn="l"/>
-            <a:r>
-              <a:rPr sz="1050" b="1">
+            <a:ext cx="623569" cy="161583"/>
+          </a:xfrm>
+          <a:prstGeom prst="rect">
+            <a:avLst/>
+          </a:prstGeom>
+          <a:noFill/>
+        </p:spPr>
+        <p:txBody>
+          <a:bodyPr wrap="none" lIns="0" tIns="0" rIns="0" bIns="0">
+            <a:spAutoFit/>
+          </a:bodyPr>
+          <a:lstStyle/>
+          <a:p>
+            <a:r>
+              <a:rPr lang="en-US" altLang="ko-KR" sz="1050" b="1" dirty="0">
                 <a:solidFill>
                   <a:srgbClr val="E8FF47"/>
                 </a:solidFill>
                 <a:latin typeface="Malgun Gothic"/>
               </a:rPr>
-              <a:t>PLANNING</a:t>
-            </a:r>
-          </a:p>
-        </p:txBody>
-      </p:sp>
-      <p:sp>
-        <p:nvSpPr>
-          <p:cNvPr id="24" name="Rectangle 23"/>
+              <a:t>KR Planet</a:t>
+            </a:r>
+          </a:p>
+        </p:txBody>
+      </p:sp>
+      <p:sp>
+        <p:nvSpPr>
+          <p:cNvPr id="25" name="Rectangle 24"/>
           <p:cNvSpPr/>
           <p:nvPr/>
         </p:nvSpPr>
@@ -7254,12 +7582,13 @@
           <a:lstStyle/>
           <a:p>
             <a:pPr algn="ctr"/>
-          </a:p>
-        </p:txBody>
-      </p:sp>
-      <p:sp>
-        <p:nvSpPr>
-          <p:cNvPr id="25" name="TextBox 24"/>
+            <a:endParaRPr/>
+          </a:p>
+        </p:txBody>
+      </p:sp>
+      <p:sp>
+        <p:nvSpPr>
+          <p:cNvPr id="26" name="TextBox 25"/>
           <p:cNvSpPr txBox="1"/>
           <p:nvPr/>
         </p:nvSpPr>
@@ -7274,7 +7603,7 @@
           <a:noFill/>
         </p:spPr>
         <p:txBody>
-          <a:bodyPr wrap="none" lIns="0" rIns="0" tIns="0" bIns="0">
+          <a:bodyPr wrap="none" lIns="0" tIns="0" rIns="0" bIns="0">
             <a:spAutoFit/>
           </a:bodyPr>
           <a:lstStyle/>
@@ -7294,42 +7623,48 @@
       </p:sp>
       <p:sp>
         <p:nvSpPr>
-          <p:cNvPr id="26" name="TextBox 25"/>
+          <p:cNvPr id="27" name="TextBox 26"/>
           <p:cNvSpPr txBox="1"/>
           <p:nvPr/>
         </p:nvSpPr>
         <p:spPr>
           <a:xfrm>
             <a:off x="4466108" y="2666333"/>
-            <a:ext cx="3247212" cy="609447"/>
-          </a:xfrm>
-          <a:prstGeom prst="rect">
-            <a:avLst/>
-          </a:prstGeom>
-          <a:noFill/>
-        </p:spPr>
-        <p:txBody>
-          <a:bodyPr wrap="none" lIns="0" rIns="0" tIns="0" bIns="0">
+            <a:ext cx="1705595" cy="577081"/>
+          </a:xfrm>
+          <a:prstGeom prst="rect">
+            <a:avLst/>
+          </a:prstGeom>
+          <a:noFill/>
+        </p:spPr>
+        <p:txBody>
+          <a:bodyPr wrap="none" lIns="0" tIns="0" rIns="0" bIns="0">
             <a:spAutoFit/>
           </a:bodyPr>
           <a:lstStyle/>
           <a:p>
             <a:pPr algn="l"/>
             <a:r>
-              <a:rPr sz="3750" b="1">
+              <a:rPr lang="en-US" sz="3750" b="1" dirty="0">
                 <a:solidFill>
                   <a:srgbClr val="FFFFFF"/>
                 </a:solidFill>
                 <a:latin typeface="Malgun Gothic"/>
               </a:rPr>
-              <a:t>₩2.2B</a:t>
-            </a:r>
-          </a:p>
-        </p:txBody>
-      </p:sp>
-      <p:sp>
-        <p:nvSpPr>
-          <p:cNvPr id="27" name="TextBox 26"/>
+              <a:t>$1.83M</a:t>
+            </a:r>
+            <a:endParaRPr sz="3750" b="1" dirty="0">
+              <a:solidFill>
+                <a:srgbClr val="FFFFFF"/>
+              </a:solidFill>
+              <a:latin typeface="Malgun Gothic"/>
+            </a:endParaRPr>
+          </a:p>
+        </p:txBody>
+      </p:sp>
+      <p:sp>
+        <p:nvSpPr>
+          <p:cNvPr id="28" name="TextBox 27"/>
           <p:cNvSpPr txBox="1"/>
           <p:nvPr/>
         </p:nvSpPr>
@@ -7344,7 +7679,7 @@
           <a:noFill/>
         </p:spPr>
         <p:txBody>
-          <a:bodyPr wrap="none" lIns="0" rIns="0" tIns="0" bIns="0">
+          <a:bodyPr wrap="none" lIns="0" tIns="0" rIns="0" bIns="0">
             <a:spAutoFit/>
           </a:bodyPr>
           <a:lstStyle/>
@@ -7364,42 +7699,48 @@
       </p:sp>
       <p:sp>
         <p:nvSpPr>
-          <p:cNvPr id="28" name="TextBox 27"/>
+          <p:cNvPr id="29" name="TextBox 28"/>
           <p:cNvSpPr txBox="1"/>
           <p:nvPr/>
         </p:nvSpPr>
         <p:spPr>
           <a:xfrm>
             <a:off x="4466108" y="3542414"/>
-            <a:ext cx="3247212" cy="533266"/>
-          </a:xfrm>
-          <a:prstGeom prst="rect">
-            <a:avLst/>
-          </a:prstGeom>
-          <a:noFill/>
-        </p:spPr>
-        <p:txBody>
-          <a:bodyPr wrap="none" lIns="0" rIns="0" tIns="0" bIns="0">
+            <a:ext cx="1197444" cy="484748"/>
+          </a:xfrm>
+          <a:prstGeom prst="rect">
+            <a:avLst/>
+          </a:prstGeom>
+          <a:noFill/>
+        </p:spPr>
+        <p:txBody>
+          <a:bodyPr wrap="none" lIns="0" tIns="0" rIns="0" bIns="0">
             <a:spAutoFit/>
           </a:bodyPr>
           <a:lstStyle/>
           <a:p>
             <a:pPr algn="l"/>
             <a:r>
-              <a:rPr sz="3150" b="1">
+              <a:rPr lang="en-US" sz="3150" b="1" dirty="0">
                 <a:solidFill>
                   <a:srgbClr val="FFFFFF"/>
                 </a:solidFill>
                 <a:latin typeface="Malgun Gothic"/>
               </a:rPr>
-              <a:t>₩850M</a:t>
-            </a:r>
-          </a:p>
-        </p:txBody>
-      </p:sp>
-      <p:sp>
-        <p:nvSpPr>
-          <p:cNvPr id="29" name="Rectangle 28"/>
+              <a:t>$708K</a:t>
+            </a:r>
+            <a:endParaRPr sz="3150" b="1" dirty="0">
+              <a:solidFill>
+                <a:srgbClr val="FFFFFF"/>
+              </a:solidFill>
+              <a:latin typeface="Malgun Gothic"/>
+            </a:endParaRPr>
+          </a:p>
+        </p:txBody>
+      </p:sp>
+      <p:sp>
+        <p:nvSpPr>
+          <p:cNvPr id="30" name="Rectangle 29"/>
           <p:cNvSpPr/>
           <p:nvPr/>
         </p:nvSpPr>
@@ -7437,12 +7778,13 @@
           <a:lstStyle/>
           <a:p>
             <a:pPr algn="ctr"/>
-          </a:p>
-        </p:txBody>
-      </p:sp>
-      <p:sp>
-        <p:nvSpPr>
-          <p:cNvPr id="30" name="Rectangle 29"/>
+            <a:endParaRPr/>
+          </a:p>
+        </p:txBody>
+      </p:sp>
+      <p:sp>
+        <p:nvSpPr>
+          <p:cNvPr id="31" name="Rectangle 30"/>
           <p:cNvSpPr/>
           <p:nvPr/>
         </p:nvSpPr>
@@ -7480,12 +7822,13 @@
           <a:lstStyle/>
           <a:p>
             <a:pPr algn="ctr"/>
-          </a:p>
-        </p:txBody>
-      </p:sp>
-      <p:sp>
-        <p:nvSpPr>
-          <p:cNvPr id="31" name="TextBox 30"/>
+            <a:endParaRPr/>
+          </a:p>
+        </p:txBody>
+      </p:sp>
+      <p:sp>
+        <p:nvSpPr>
+          <p:cNvPr id="32" name="TextBox 31"/>
           <p:cNvSpPr txBox="1"/>
           <p:nvPr/>
         </p:nvSpPr>
@@ -7500,7 +7843,7 @@
           <a:noFill/>
         </p:spPr>
         <p:txBody>
-          <a:bodyPr wrap="none" lIns="0" rIns="0" tIns="0" bIns="0">
+          <a:bodyPr wrap="none" lIns="0" tIns="0" rIns="0" bIns="0">
             <a:spAutoFit/>
           </a:bodyPr>
           <a:lstStyle/>
@@ -7520,7 +7863,7 @@
       </p:sp>
       <p:sp>
         <p:nvSpPr>
-          <p:cNvPr id="32" name="TextBox 31"/>
+          <p:cNvPr id="33" name="TextBox 32"/>
           <p:cNvSpPr txBox="1"/>
           <p:nvPr/>
         </p:nvSpPr>
@@ -7535,7 +7878,7 @@
           <a:noFill/>
         </p:spPr>
         <p:txBody>
-          <a:bodyPr wrap="none" lIns="0" rIns="0" tIns="0" bIns="0">
+          <a:bodyPr wrap="none" lIns="0" tIns="0" rIns="0" bIns="0">
             <a:spAutoFit/>
           </a:bodyPr>
           <a:lstStyle/>
@@ -7555,7 +7898,7 @@
       </p:sp>
       <p:sp>
         <p:nvSpPr>
-          <p:cNvPr id="33" name="Rectangle 32"/>
+          <p:cNvPr id="34" name="Rectangle 33"/>
           <p:cNvSpPr/>
           <p:nvPr/>
         </p:nvSpPr>
@@ -7593,12 +7936,13 @@
           <a:lstStyle/>
           <a:p>
             <a:pPr algn="ctr"/>
-          </a:p>
-        </p:txBody>
-      </p:sp>
-      <p:sp>
-        <p:nvSpPr>
-          <p:cNvPr id="34" name="TextBox 33"/>
+            <a:endParaRPr/>
+          </a:p>
+        </p:txBody>
+      </p:sp>
+      <p:sp>
+        <p:nvSpPr>
+          <p:cNvPr id="35" name="TextBox 34"/>
           <p:cNvSpPr txBox="1"/>
           <p:nvPr/>
         </p:nvSpPr>
@@ -7613,14 +7957,14 @@
           <a:noFill/>
         </p:spPr>
         <p:txBody>
-          <a:bodyPr wrap="none" lIns="0" rIns="0" tIns="0" bIns="0">
+          <a:bodyPr wrap="none" lIns="0" tIns="0" rIns="0" bIns="0">
             <a:spAutoFit/>
           </a:bodyPr>
           <a:lstStyle/>
           <a:p>
             <a:pPr algn="l"/>
             <a:r>
-              <a:rPr sz="1050" b="1">
+              <a:rPr sz="1050" b="1" dirty="0">
                 <a:solidFill>
                   <a:srgbClr val="E8FF47"/>
                 </a:solidFill>
@@ -7633,7 +7977,7 @@
       </p:sp>
       <p:sp>
         <p:nvSpPr>
-          <p:cNvPr id="35" name="Rectangle 34"/>
+          <p:cNvPr id="36" name="Rectangle 35"/>
           <p:cNvSpPr/>
           <p:nvPr/>
         </p:nvSpPr>
@@ -7671,12 +8015,13 @@
           <a:lstStyle/>
           <a:p>
             <a:pPr algn="ctr"/>
-          </a:p>
-        </p:txBody>
-      </p:sp>
-      <p:sp>
-        <p:nvSpPr>
-          <p:cNvPr id="36" name="TextBox 35"/>
+            <a:endParaRPr/>
+          </a:p>
+        </p:txBody>
+      </p:sp>
+      <p:sp>
+        <p:nvSpPr>
+          <p:cNvPr id="37" name="TextBox 36"/>
           <p:cNvSpPr txBox="1"/>
           <p:nvPr/>
         </p:nvSpPr>
@@ -7691,7 +8036,7 @@
           <a:noFill/>
         </p:spPr>
         <p:txBody>
-          <a:bodyPr wrap="none" lIns="0" rIns="0" tIns="0" bIns="0">
+          <a:bodyPr wrap="none" lIns="0" tIns="0" rIns="0" bIns="0">
             <a:spAutoFit/>
           </a:bodyPr>
           <a:lstStyle/>
@@ -7711,42 +8056,48 @@
       </p:sp>
       <p:sp>
         <p:nvSpPr>
-          <p:cNvPr id="37" name="TextBox 36"/>
+          <p:cNvPr id="38" name="TextBox 37"/>
           <p:cNvSpPr txBox="1"/>
           <p:nvPr/>
         </p:nvSpPr>
         <p:spPr>
           <a:xfrm>
             <a:off x="8113271" y="2666333"/>
-            <a:ext cx="3247212" cy="609447"/>
-          </a:xfrm>
-          <a:prstGeom prst="rect">
-            <a:avLst/>
-          </a:prstGeom>
-          <a:noFill/>
-        </p:spPr>
-        <p:txBody>
-          <a:bodyPr wrap="none" lIns="0" rIns="0" tIns="0" bIns="0">
+            <a:ext cx="1705595" cy="577081"/>
+          </a:xfrm>
+          <a:prstGeom prst="rect">
+            <a:avLst/>
+          </a:prstGeom>
+          <a:noFill/>
+        </p:spPr>
+        <p:txBody>
+          <a:bodyPr wrap="none" lIns="0" tIns="0" rIns="0" bIns="0">
             <a:spAutoFit/>
           </a:bodyPr>
           <a:lstStyle/>
           <a:p>
             <a:pPr algn="l"/>
             <a:r>
-              <a:rPr sz="3750" b="1">
+              <a:rPr lang="en-US" sz="3750" b="1" dirty="0">
                 <a:solidFill>
                   <a:srgbClr val="FFFFFF"/>
                 </a:solidFill>
                 <a:latin typeface="Malgun Gothic"/>
               </a:rPr>
-              <a:t>₩8.5B</a:t>
-            </a:r>
-          </a:p>
-        </p:txBody>
-      </p:sp>
-      <p:sp>
-        <p:nvSpPr>
-          <p:cNvPr id="38" name="TextBox 37"/>
+              <a:t>$7.08M</a:t>
+            </a:r>
+            <a:endParaRPr sz="3750" b="1" dirty="0">
+              <a:solidFill>
+                <a:srgbClr val="FFFFFF"/>
+              </a:solidFill>
+              <a:latin typeface="Malgun Gothic"/>
+            </a:endParaRPr>
+          </a:p>
+        </p:txBody>
+      </p:sp>
+      <p:sp>
+        <p:nvSpPr>
+          <p:cNvPr id="39" name="TextBox 38"/>
           <p:cNvSpPr txBox="1"/>
           <p:nvPr/>
         </p:nvSpPr>
@@ -7761,7 +8112,7 @@
           <a:noFill/>
         </p:spPr>
         <p:txBody>
-          <a:bodyPr wrap="none" lIns="0" rIns="0" tIns="0" bIns="0">
+          <a:bodyPr wrap="none" lIns="0" tIns="0" rIns="0" bIns="0">
             <a:spAutoFit/>
           </a:bodyPr>
           <a:lstStyle/>
@@ -7781,42 +8132,48 @@
       </p:sp>
       <p:sp>
         <p:nvSpPr>
-          <p:cNvPr id="39" name="TextBox 38"/>
+          <p:cNvPr id="40" name="TextBox 39"/>
           <p:cNvSpPr txBox="1"/>
           <p:nvPr/>
         </p:nvSpPr>
         <p:spPr>
           <a:xfrm>
             <a:off x="8113271" y="3542414"/>
-            <a:ext cx="3247212" cy="533266"/>
-          </a:xfrm>
-          <a:prstGeom prst="rect">
-            <a:avLst/>
-          </a:prstGeom>
-          <a:noFill/>
-        </p:spPr>
-        <p:txBody>
-          <a:bodyPr wrap="none" lIns="0" rIns="0" tIns="0" bIns="0">
+            <a:ext cx="1197444" cy="484748"/>
+          </a:xfrm>
+          <a:prstGeom prst="rect">
+            <a:avLst/>
+          </a:prstGeom>
+          <a:noFill/>
+        </p:spPr>
+        <p:txBody>
+          <a:bodyPr wrap="none" lIns="0" tIns="0" rIns="0" bIns="0">
             <a:spAutoFit/>
           </a:bodyPr>
           <a:lstStyle/>
           <a:p>
             <a:pPr algn="l"/>
             <a:r>
-              <a:rPr sz="3150" b="1">
+              <a:rPr lang="en-US" sz="3150" b="1" dirty="0">
                 <a:solidFill>
                   <a:srgbClr val="FFFFFF"/>
                 </a:solidFill>
                 <a:latin typeface="Malgun Gothic"/>
               </a:rPr>
-              <a:t>₩960M</a:t>
-            </a:r>
-          </a:p>
-        </p:txBody>
-      </p:sp>
-      <p:sp>
-        <p:nvSpPr>
-          <p:cNvPr id="40" name="Rectangle 39"/>
+              <a:t>$800K</a:t>
+            </a:r>
+            <a:endParaRPr sz="3150" b="1" dirty="0">
+              <a:solidFill>
+                <a:srgbClr val="FFFFFF"/>
+              </a:solidFill>
+              <a:latin typeface="Malgun Gothic"/>
+            </a:endParaRPr>
+          </a:p>
+        </p:txBody>
+      </p:sp>
+      <p:sp>
+        <p:nvSpPr>
+          <p:cNvPr id="41" name="Rectangle 40"/>
           <p:cNvSpPr/>
           <p:nvPr/>
         </p:nvSpPr>
@@ -7854,12 +8211,13 @@
           <a:lstStyle/>
           <a:p>
             <a:pPr algn="ctr"/>
-          </a:p>
-        </p:txBody>
-      </p:sp>
-      <p:sp>
-        <p:nvSpPr>
-          <p:cNvPr id="41" name="Rectangle 40"/>
+            <a:endParaRPr/>
+          </a:p>
+        </p:txBody>
+      </p:sp>
+      <p:sp>
+        <p:nvSpPr>
+          <p:cNvPr id="42" name="Rectangle 41"/>
           <p:cNvSpPr/>
           <p:nvPr/>
         </p:nvSpPr>
@@ -7897,12 +8255,13 @@
           <a:lstStyle/>
           <a:p>
             <a:pPr algn="ctr"/>
-          </a:p>
-        </p:txBody>
-      </p:sp>
-      <p:sp>
-        <p:nvSpPr>
-          <p:cNvPr id="42" name="TextBox 41"/>
+            <a:endParaRPr/>
+          </a:p>
+        </p:txBody>
+      </p:sp>
+      <p:sp>
+        <p:nvSpPr>
+          <p:cNvPr id="43" name="TextBox 42"/>
           <p:cNvSpPr txBox="1"/>
           <p:nvPr/>
         </p:nvSpPr>
@@ -7917,7 +8276,7 @@
           <a:noFill/>
         </p:spPr>
         <p:txBody>
-          <a:bodyPr wrap="none" lIns="0" rIns="0" tIns="0" bIns="0">
+          <a:bodyPr wrap="none" lIns="0" tIns="0" rIns="0" bIns="0">
             <a:spAutoFit/>
           </a:bodyPr>
           <a:lstStyle/>
@@ -7937,7 +8296,7 @@
       </p:sp>
       <p:sp>
         <p:nvSpPr>
-          <p:cNvPr id="43" name="TextBox 42"/>
+          <p:cNvPr id="44" name="TextBox 43"/>
           <p:cNvSpPr txBox="1"/>
           <p:nvPr/>
         </p:nvSpPr>
@@ -7952,7 +8311,7 @@
           <a:noFill/>
         </p:spPr>
         <p:txBody>
-          <a:bodyPr wrap="none" lIns="0" rIns="0" tIns="0" bIns="0">
+          <a:bodyPr wrap="none" lIns="0" tIns="0" rIns="0" bIns="0">
             <a:spAutoFit/>
           </a:bodyPr>
           <a:lstStyle/>
@@ -7979,7 +8338,7 @@
 </file>
 
 <file path=ppt/slides/slide4.xml><?xml version="1.0" encoding="utf-8"?>
-<p:sld xmlns:a="http://schemas.openxmlformats.org/drawingml/2006/main" xmlns:p="http://schemas.openxmlformats.org/presentationml/2006/main" xmlns:r="http://schemas.openxmlformats.org/officeDocument/2006/relationships">
+<p:sld xmlns:a="http://schemas.openxmlformats.org/drawingml/2006/main" xmlns:r="http://schemas.openxmlformats.org/officeDocument/2006/relationships" xmlns:p="http://schemas.openxmlformats.org/presentationml/2006/main">
   <p:cSld>
     <p:bg>
       <p:bgPr>
@@ -7995,7 +8354,14 @@
         <p:cNvGrpSpPr/>
         <p:nvPr/>
       </p:nvGrpSpPr>
-      <p:grpSpPr/>
+      <p:grpSpPr>
+        <a:xfrm>
+          <a:off x="0" y="0"/>
+          <a:ext cx="0" cy="0"/>
+          <a:chOff x="0" y="0"/>
+          <a:chExt cx="0" cy="0"/>
+        </a:xfrm>
+      </p:grpSpPr>
       <p:sp>
         <p:nvSpPr>
           <p:cNvPr id="2" name="TextBox 1"/>
@@ -8013,7 +8379,7 @@
           <a:noFill/>
         </p:spPr>
         <p:txBody>
-          <a:bodyPr wrap="none" lIns="0" rIns="0" tIns="0" bIns="0">
+          <a:bodyPr wrap="none" lIns="0" tIns="0" rIns="0" bIns="0">
             <a:spAutoFit/>
           </a:bodyPr>
           <a:lstStyle/>
@@ -8048,7 +8414,7 @@
           <a:noFill/>
         </p:spPr>
         <p:txBody>
-          <a:bodyPr wrap="none" lIns="0" rIns="0" tIns="0" bIns="0">
+          <a:bodyPr wrap="none" lIns="0" tIns="0" rIns="0" bIns="0">
             <a:spAutoFit/>
           </a:bodyPr>
           <a:lstStyle/>
@@ -8106,6 +8472,7 @@
           <a:lstStyle/>
           <a:p>
             <a:pPr algn="ctr"/>
+            <a:endParaRPr/>
           </a:p>
         </p:txBody>
       </p:sp>
@@ -8126,7 +8493,7 @@
           <a:noFill/>
         </p:spPr>
         <p:txBody>
-          <a:bodyPr wrap="none" lIns="0" rIns="0" tIns="0" bIns="0">
+          <a:bodyPr wrap="none" lIns="0" tIns="0" rIns="0" bIns="0">
             <a:spAutoFit/>
           </a:bodyPr>
           <a:lstStyle/>
@@ -8161,7 +8528,7 @@
           <a:noFill/>
         </p:spPr>
         <p:txBody>
-          <a:bodyPr wrap="none" lIns="0" rIns="0" tIns="0" bIns="0">
+          <a:bodyPr wrap="none" lIns="0" tIns="0" rIns="0" bIns="0">
             <a:spAutoFit/>
           </a:bodyPr>
           <a:lstStyle/>
@@ -8196,20 +8563,20 @@
           <a:noFill/>
         </p:spPr>
         <p:txBody>
-          <a:bodyPr wrap="none" lIns="0" rIns="0" tIns="0" bIns="0">
+          <a:bodyPr wrap="none" lIns="0" tIns="0" rIns="0" bIns="0">
             <a:spAutoFit/>
           </a:bodyPr>
           <a:lstStyle/>
           <a:p>
             <a:pPr algn="l"/>
             <a:r>
-              <a:rPr sz="7650" b="1">
+              <a:rPr sz="7650" b="1" dirty="0">
                 <a:solidFill>
                   <a:srgbClr val="FFFFFF"/>
                 </a:solidFill>
                 <a:latin typeface="Malgun Gothic"/>
               </a:rPr>
-              <a:t>The Tsunami</a:t>
+              <a:t>The Era of</a:t>
             </a:r>
           </a:p>
         </p:txBody>
@@ -8231,20 +8598,20 @@
           <a:noFill/>
         </p:spPr>
         <p:txBody>
-          <a:bodyPr wrap="none" lIns="0" rIns="0" tIns="0" bIns="0">
+          <a:bodyPr wrap="none" lIns="0" tIns="0" rIns="0" bIns="0">
             <a:spAutoFit/>
           </a:bodyPr>
           <a:lstStyle/>
           <a:p>
             <a:pPr algn="l"/>
             <a:r>
-              <a:rPr sz="7650" b="1">
+              <a:rPr sz="7650" b="1" dirty="0">
                 <a:solidFill>
                   <a:srgbClr val="E8FF47"/>
                 </a:solidFill>
                 <a:latin typeface="Malgun Gothic"/>
               </a:rPr>
-              <a:t>is Coming.</a:t>
+              <a:t>10x Leverage.</a:t>
             </a:r>
           </a:p>
         </p:txBody>
@@ -8258,29 +8625,35 @@
         <p:spPr>
           <a:xfrm>
             <a:off x="1066533" y="3447187"/>
-            <a:ext cx="9141713" cy="342814"/>
-          </a:xfrm>
-          <a:prstGeom prst="rect">
-            <a:avLst/>
-          </a:prstGeom>
-          <a:noFill/>
-        </p:spPr>
-        <p:txBody>
-          <a:bodyPr wrap="square" lIns="0" rIns="0" tIns="0" bIns="0">
+            <a:ext cx="9141713" cy="230832"/>
+          </a:xfrm>
+          <a:prstGeom prst="rect">
+            <a:avLst/>
+          </a:prstGeom>
+          <a:noFill/>
+        </p:spPr>
+        <p:txBody>
+          <a:bodyPr wrap="square" lIns="0" tIns="0" rIns="0" bIns="0">
             <a:spAutoFit/>
           </a:bodyPr>
           <a:lstStyle/>
           <a:p>
             <a:pPr algn="l"/>
             <a:r>
-              <a:rPr sz="1500" b="1">
+              <a:rPr lang="en-US" sz="1500" b="1" dirty="0">
                 <a:solidFill>
                   <a:srgbClr val="666666"/>
                 </a:solidFill>
                 <a:latin typeface="Malgun Gothic"/>
               </a:rPr>
-              <a:t>Running a 10-person AI team 24/7 while you sleep.  That is AI Native.</a:t>
-            </a:r>
+              <a:t>The only thing AI will replace is the person who refuses to use it.</a:t>
+            </a:r>
+            <a:endParaRPr sz="1500" b="1" dirty="0">
+              <a:solidFill>
+                <a:srgbClr val="666666"/>
+              </a:solidFill>
+              <a:latin typeface="Malgun Gothic"/>
+            </a:endParaRPr>
           </a:p>
         </p:txBody>
       </p:sp>
@@ -8301,7 +8674,7 @@
           <a:noFill/>
         </p:spPr>
         <p:txBody>
-          <a:bodyPr wrap="square" lIns="0" rIns="0" tIns="0" bIns="0">
+          <a:bodyPr wrap="square" lIns="0" tIns="0" rIns="0" bIns="0">
             <a:spAutoFit/>
           </a:bodyPr>
           <a:lstStyle/>
@@ -8314,7 +8687,7 @@
                 </a:solidFill>
                 <a:latin typeface="Malgun Gothic"/>
               </a:rPr>
-              <a:t>If you don't find a way to use AI, someone else will find a way to replace you with it.</a:t>
+              <a:t>Build your own 24/7 AI team to clone your workflow. That is AI Native.</a:t>
             </a:r>
           </a:p>
         </p:txBody>
@@ -8328,7 +8701,7 @@
         <p:spPr>
           <a:xfrm>
             <a:off x="1066533" y="4494676"/>
-            <a:ext cx="7237190" cy="571357"/>
+            <a:ext cx="8379904" cy="571357"/>
           </a:xfrm>
           <a:prstGeom prst="rect">
             <a:avLst/>
@@ -8359,6 +8732,7 @@
           <a:lstStyle/>
           <a:p>
             <a:pPr algn="ctr"/>
+            <a:endParaRPr/>
           </a:p>
         </p:txBody>
       </p:sp>
@@ -8371,32 +8745,95 @@
         <p:spPr>
           <a:xfrm>
             <a:off x="1371257" y="4647037"/>
-            <a:ext cx="6856285" cy="323769"/>
-          </a:xfrm>
-          <a:prstGeom prst="rect">
-            <a:avLst/>
-          </a:prstGeom>
-          <a:noFill/>
-        </p:spPr>
-        <p:txBody>
-          <a:bodyPr wrap="none" lIns="0" rIns="0" tIns="0" bIns="0">
+            <a:ext cx="5819670" cy="230832"/>
+          </a:xfrm>
+          <a:prstGeom prst="rect">
+            <a:avLst/>
+          </a:prstGeom>
+          <a:noFill/>
+        </p:spPr>
+        <p:txBody>
+          <a:bodyPr wrap="none" lIns="0" tIns="0" rIns="0" bIns="0">
             <a:spAutoFit/>
           </a:bodyPr>
           <a:lstStyle/>
           <a:p>
             <a:pPr algn="l"/>
             <a:r>
-              <a:rPr sz="1500" b="1">
+              <a:rPr sz="1500" b="1" dirty="0">
                 <a:solidFill>
                   <a:srgbClr val="E8FF47"/>
                 </a:solidFill>
                 <a:latin typeface="Malgun Gothic"/>
               </a:rPr>
-              <a:t>→   Install Claude Code Right Now</a:t>
-            </a:r>
-          </a:p>
-        </p:txBody>
-      </p:sp>
+              <a:t>→   Install Claude Code &amp; Build Your AI </a:t>
+            </a:r>
+            <a:r>
+              <a:rPr lang="en-US" sz="1500" b="1" dirty="0">
+                <a:solidFill>
+                  <a:srgbClr val="E8FF47"/>
+                </a:solidFill>
+                <a:latin typeface="Malgun Gothic"/>
+              </a:rPr>
+              <a:t>agent </a:t>
+            </a:r>
+            <a:r>
+              <a:rPr sz="1500" b="1" dirty="0">
+                <a:solidFill>
+                  <a:srgbClr val="E8FF47"/>
+                </a:solidFill>
+                <a:latin typeface="Malgun Gothic"/>
+              </a:rPr>
+              <a:t>Team</a:t>
+            </a:r>
+            <a:r>
+              <a:rPr lang="en-US" sz="1500" b="1" dirty="0">
+                <a:solidFill>
+                  <a:srgbClr val="E8FF47"/>
+                </a:solidFill>
+                <a:latin typeface="Malgun Gothic"/>
+              </a:rPr>
+              <a:t> Right now</a:t>
+            </a:r>
+            <a:endParaRPr sz="1500" b="1" dirty="0">
+              <a:solidFill>
+                <a:srgbClr val="E8FF47"/>
+              </a:solidFill>
+              <a:latin typeface="Malgun Gothic"/>
+            </a:endParaRPr>
+          </a:p>
+        </p:txBody>
+      </p:sp>
+      <p:pic>
+        <p:nvPicPr>
+          <p:cNvPr id="16" name="그림 15" descr="픽셀, 상징, 디자인이(가) 표시된 사진&#10;&#10;AI 생성 콘텐츠는 정확하지 않을 수 있습니다.">
+            <a:extLst>
+              <a:ext uri="{FF2B5EF4-FFF2-40B4-BE49-F238E27FC236}">
+                <a16:creationId xmlns:a16="http://schemas.microsoft.com/office/drawing/2014/main" id="{01246A4F-D16D-5F70-27FE-C8721675F46E}"/>
+              </a:ext>
+            </a:extLst>
+          </p:cNvPr>
+          <p:cNvPicPr>
+            <a:picLocks noChangeAspect="1"/>
+          </p:cNvPicPr>
+          <p:nvPr/>
+        </p:nvPicPr>
+        <p:blipFill>
+          <a:blip r:embed="rId2"/>
+          <a:stretch>
+            <a:fillRect/>
+          </a:stretch>
+        </p:blipFill>
+        <p:spPr>
+          <a:xfrm>
+            <a:off x="8172761" y="2991817"/>
+            <a:ext cx="1821699" cy="1312406"/>
+          </a:xfrm>
+          <a:prstGeom prst="rect">
+            <a:avLst/>
+          </a:prstGeom>
+        </p:spPr>
+      </p:pic>
     </p:spTree>
   </p:cSld>
   <p:clrMapOvr>
